--- a/ppts/CHAPTER 6 Agent Architecture.pptx
+++ b/ppts/CHAPTER 6 Agent Architecture.pptx
@@ -270,7 +270,7 @@
                 <a:latin typeface="맑은 고딕" panose="020B0503020000020004" pitchFamily="50" charset="-127"/>
                 <a:ea typeface="맑은 고딕" panose="020B0503020000020004" pitchFamily="50" charset="-127"/>
               </a:rPr>
-              <a:t>2026-08-20</a:t>
+              <a:t>2026-10-03</a:t>
             </a:fld>
             <a:endParaRPr lang="ko-KR" altLang="en-US">
               <a:latin typeface="맑은 고딕" panose="020B0503020000020004" pitchFamily="50" charset="-127"/>
@@ -456,7 +456,7 @@
           <a:p>
             <a:fld id="{43E1C3DD-4A19-441D-907C-380838DB51C4}" type="datetime1">
               <a:rPr lang="ko-KR" altLang="en-US" noProof="0" smtClean="0"/>
-              <a:t>2026-08-20</a:t>
+              <a:t>2026-10-03</a:t>
             </a:fld>
             <a:endParaRPr lang="ko-KR" altLang="en-US" noProof="0"/>
           </a:p>
@@ -1304,7 +1304,7 @@
           <a:p>
             <a:fld id="{990475B5-67CA-4281-BDCA-DA943C3C8EB3}" type="datetime1">
               <a:rPr lang="ko-KR" altLang="en-US" noProof="0" smtClean="0"/>
-              <a:t>2026-08-20</a:t>
+              <a:t>2026-10-03</a:t>
             </a:fld>
             <a:endParaRPr lang="ko-KR" altLang="en-US" noProof="0"/>
           </a:p>
@@ -1958,7 +1958,7 @@
           <a:p>
             <a:fld id="{48A87A34-81AB-432B-8DAE-1953F412C126}" type="datetimeFigureOut">
               <a:rPr lang="en-US" smtClean="0"/>
-              <a:t>8/20/2026</a:t>
+              <a:t>10/3/2026</a:t>
             </a:fld>
             <a:endParaRPr lang="en-US" dirty="0"/>
           </a:p>
@@ -2254,7 +2254,7 @@
           <a:p>
             <a:fld id="{C655C81E-72E7-4D05-94B5-F45B321A525D}" type="datetime1">
               <a:rPr lang="ko-KR" altLang="en-US" noProof="0" smtClean="0"/>
-              <a:t>2026-08-20</a:t>
+              <a:t>2026-10-03</a:t>
             </a:fld>
             <a:endParaRPr lang="ko-KR" altLang="en-US" noProof="0" dirty="0">
               <a:latin typeface="맑은 고딕" panose="020B0503020000020004" pitchFamily="50" charset="-127"/>
@@ -3257,6 +3257,11 @@
           <a:prstGeom prst="rect">
             <a:avLst/>
           </a:prstGeom>
+          <a:ln>
+            <a:solidFill>
+              <a:schemeClr val="tx1"/>
+            </a:solidFill>
+          </a:ln>
         </p:spPr>
       </p:pic>
       <p:sp>
@@ -4395,7 +4400,7 @@
         <p:spPr>
           <a:xfrm>
             <a:off x="663574" y="2190256"/>
-            <a:ext cx="4812666" cy="4218975"/>
+            <a:ext cx="4812666" cy="4198201"/>
           </a:xfrm>
           <a:prstGeom prst="rect">
             <a:avLst/>
@@ -4419,27 +4424,27 @@
               </a:lnSpc>
             </a:pPr>
             <a:r>
-              <a:rPr lang="ko-KR" altLang="en-US" sz="1200" dirty="0">
+              <a:rPr lang="ko-KR" altLang="en-US" sz="1200" b="1" dirty="0">
                 <a:latin typeface="D2Coding" panose="020B0609020101020101" pitchFamily="49" charset="-127"/>
                 <a:ea typeface="D2Coding" panose="020B0609020101020101" pitchFamily="49" charset="-127"/>
               </a:rPr>
               <a:t>① 도구 명세(Tool </a:t>
             </a:r>
             <a:r>
-              <a:rPr lang="ko-KR" altLang="en-US" sz="1200" dirty="0" err="1">
+              <a:rPr lang="ko-KR" altLang="en-US" sz="1200" b="1" dirty="0" err="1">
                 <a:latin typeface="D2Coding" panose="020B0609020101020101" pitchFamily="49" charset="-127"/>
                 <a:ea typeface="D2Coding" panose="020B0609020101020101" pitchFamily="49" charset="-127"/>
               </a:rPr>
               <a:t>Description</a:t>
             </a:r>
             <a:r>
-              <a:rPr lang="ko-KR" altLang="en-US" sz="1200" dirty="0">
+              <a:rPr lang="ko-KR" altLang="en-US" sz="1200" b="1" dirty="0">
                 <a:latin typeface="D2Coding" panose="020B0609020101020101" pitchFamily="49" charset="-127"/>
                 <a:ea typeface="D2Coding" panose="020B0609020101020101" pitchFamily="49" charset="-127"/>
               </a:rPr>
               <a:t>) 해석</a:t>
             </a:r>
-            <a:endParaRPr lang="en-US" altLang="ko-KR" sz="1200" dirty="0">
+            <a:endParaRPr lang="en-US" altLang="ko-KR" sz="1200" b="1" dirty="0">
               <a:latin typeface="D2Coding" panose="020B0609020101020101" pitchFamily="49" charset="-127"/>
               <a:ea typeface="D2Coding" panose="020B0609020101020101" pitchFamily="49" charset="-127"/>
             </a:endParaRPr>
@@ -4453,124 +4458,72 @@
               <a:buChar char="•"/>
             </a:pPr>
             <a:r>
-              <a:rPr lang="ko-KR" altLang="en-US" sz="1200" dirty="0">
+              <a:rPr lang="ko-KR" altLang="en-US" sz="1100" dirty="0">
                 <a:latin typeface="D2Coding" panose="020B0609020101020101" pitchFamily="49" charset="-127"/>
                 <a:ea typeface="D2Coding" panose="020B0609020101020101" pitchFamily="49" charset="-127"/>
               </a:rPr>
               <a:t>개발자가 </a:t>
             </a:r>
             <a:r>
-              <a:rPr lang="ko-KR" altLang="en-US" sz="1200" dirty="0" err="1">
+              <a:rPr lang="ko-KR" altLang="en-US" sz="1100" dirty="0" err="1">
                 <a:latin typeface="D2Coding" panose="020B0609020101020101" pitchFamily="49" charset="-127"/>
                 <a:ea typeface="D2Coding" panose="020B0609020101020101" pitchFamily="49" charset="-127"/>
               </a:rPr>
               <a:t>LLM에</a:t>
             </a:r>
             <a:r>
-              <a:rPr lang="ko-KR" altLang="en-US" sz="1200" dirty="0">
+              <a:rPr lang="ko-KR" altLang="en-US" sz="1100" dirty="0">
                 <a:latin typeface="D2Coding" panose="020B0609020101020101" pitchFamily="49" charset="-127"/>
                 <a:ea typeface="D2Coding" panose="020B0609020101020101" pitchFamily="49" charset="-127"/>
               </a:rPr>
               <a:t> 도구를 전달할 때, 모델은 입력 프롬프트의 일부로 도구의 이름, 설명(</a:t>
             </a:r>
             <a:r>
-              <a:rPr lang="ko-KR" altLang="en-US" sz="1200" dirty="0" err="1">
+              <a:rPr lang="ko-KR" altLang="en-US" sz="1100" dirty="0" err="1">
                 <a:latin typeface="D2Coding" panose="020B0609020101020101" pitchFamily="49" charset="-127"/>
                 <a:ea typeface="D2Coding" panose="020B0609020101020101" pitchFamily="49" charset="-127"/>
               </a:rPr>
               <a:t>Description</a:t>
             </a:r>
             <a:r>
-              <a:rPr lang="ko-KR" altLang="en-US" sz="1200" dirty="0">
+              <a:rPr lang="ko-KR" altLang="en-US" sz="1100" dirty="0">
                 <a:latin typeface="D2Coding" panose="020B0609020101020101" pitchFamily="49" charset="-127"/>
                 <a:ea typeface="D2Coding" panose="020B0609020101020101" pitchFamily="49" charset="-127"/>
               </a:rPr>
               <a:t>), 매개변수 구조를 함께 전달하면 </a:t>
             </a:r>
             <a:r>
-              <a:rPr lang="ko-KR" altLang="en-US" sz="1200" dirty="0" err="1">
+              <a:rPr lang="ko-KR" altLang="en-US" sz="1100" dirty="0" err="1">
                 <a:latin typeface="D2Coding" panose="020B0609020101020101" pitchFamily="49" charset="-127"/>
                 <a:ea typeface="D2Coding" panose="020B0609020101020101" pitchFamily="49" charset="-127"/>
               </a:rPr>
               <a:t>LLM은</a:t>
             </a:r>
             <a:r>
-              <a:rPr lang="ko-KR" altLang="en-US" sz="1200" dirty="0">
+              <a:rPr lang="ko-KR" altLang="en-US" sz="1100" dirty="0">
                 <a:latin typeface="D2Coding" panose="020B0609020101020101" pitchFamily="49" charset="-127"/>
                 <a:ea typeface="D2Coding" panose="020B0609020101020101" pitchFamily="49" charset="-127"/>
               </a:rPr>
               <a:t> 사용자의 질문과 자신이 전달받은 도구의 </a:t>
             </a:r>
             <a:r>
-              <a:rPr lang="ko-KR" altLang="en-US" sz="1200" dirty="0" err="1">
+              <a:rPr lang="ko-KR" altLang="en-US" sz="1100" dirty="0" err="1">
                 <a:latin typeface="D2Coding" panose="020B0609020101020101" pitchFamily="49" charset="-127"/>
                 <a:ea typeface="D2Coding" panose="020B0609020101020101" pitchFamily="49" charset="-127"/>
               </a:rPr>
               <a:t>description을</a:t>
             </a:r>
             <a:r>
-              <a:rPr lang="ko-KR" altLang="en-US" sz="1200" dirty="0">
-                <a:latin typeface="D2Coding" panose="020B0609020101020101" pitchFamily="49" charset="-127"/>
-                <a:ea typeface="D2Coding" panose="020B0609020101020101" pitchFamily="49" charset="-127"/>
-              </a:rPr>
-              <a:t> 대조하게 됨</a:t>
-            </a:r>
-          </a:p>
-          <a:p>
-            <a:pPr>
-              <a:lnSpc>
-                <a:spcPct val="150000"/>
-              </a:lnSpc>
-            </a:pPr>
-            <a:r>
-              <a:rPr lang="ko-KR" altLang="en-US" sz="1200" dirty="0">
-                <a:latin typeface="D2Coding" panose="020B0609020101020101" pitchFamily="49" charset="-127"/>
-                <a:ea typeface="D2Coding" panose="020B0609020101020101" pitchFamily="49" charset="-127"/>
-              </a:rPr>
-              <a:t>② 도구 호출 전용 </a:t>
-            </a:r>
-            <a:r>
-              <a:rPr lang="ko-KR" altLang="en-US" sz="1200" dirty="0" err="1">
-                <a:latin typeface="D2Coding" panose="020B0609020101020101" pitchFamily="49" charset="-127"/>
-                <a:ea typeface="D2Coding" panose="020B0609020101020101" pitchFamily="49" charset="-127"/>
-              </a:rPr>
-              <a:t>파인튜닝</a:t>
-            </a:r>
-            <a:r>
-              <a:rPr lang="ko-KR" altLang="en-US" sz="1200" dirty="0">
-                <a:latin typeface="D2Coding" panose="020B0609020101020101" pitchFamily="49" charset="-127"/>
-                <a:ea typeface="D2Coding" panose="020B0609020101020101" pitchFamily="49" charset="-127"/>
-              </a:rPr>
-              <a:t> (Tool-</a:t>
-            </a:r>
-            <a:r>
-              <a:rPr lang="ko-KR" altLang="en-US" sz="1200" dirty="0" err="1">
-                <a:latin typeface="D2Coding" panose="020B0609020101020101" pitchFamily="49" charset="-127"/>
-                <a:ea typeface="D2Coding" panose="020B0609020101020101" pitchFamily="49" charset="-127"/>
-              </a:rPr>
-              <a:t>calling</a:t>
-            </a:r>
-            <a:r>
-              <a:rPr lang="ko-KR" altLang="en-US" sz="1200" dirty="0">
-                <a:latin typeface="D2Coding" panose="020B0609020101020101" pitchFamily="49" charset="-127"/>
-                <a:ea typeface="D2Coding" panose="020B0609020101020101" pitchFamily="49" charset="-127"/>
-              </a:rPr>
-              <a:t> </a:t>
-            </a:r>
-            <a:r>
-              <a:rPr lang="ko-KR" altLang="en-US" sz="1200" dirty="0" err="1">
-                <a:latin typeface="D2Coding" panose="020B0609020101020101" pitchFamily="49" charset="-127"/>
-                <a:ea typeface="D2Coding" panose="020B0609020101020101" pitchFamily="49" charset="-127"/>
-              </a:rPr>
-              <a:t>Fine-tuning</a:t>
-            </a:r>
-            <a:r>
-              <a:rPr lang="ko-KR" altLang="en-US" sz="1200" dirty="0">
-                <a:latin typeface="D2Coding" panose="020B0609020101020101" pitchFamily="49" charset="-127"/>
-                <a:ea typeface="D2Coding" panose="020B0609020101020101" pitchFamily="49" charset="-127"/>
-              </a:rPr>
-              <a:t>)</a:t>
-            </a:r>
+              <a:rPr lang="ko-KR" altLang="en-US" sz="1100" dirty="0">
+                <a:latin typeface="D2Coding" panose="020B0609020101020101" pitchFamily="49" charset="-127"/>
+                <a:ea typeface="D2Coding" panose="020B0609020101020101" pitchFamily="49" charset="-127"/>
+              </a:rPr>
+              <a:t> 대조</a:t>
+            </a:r>
+            <a:endParaRPr lang="en-US" altLang="ko-KR" sz="1100" dirty="0">
+              <a:latin typeface="D2Coding" panose="020B0609020101020101" pitchFamily="49" charset="-127"/>
+              <a:ea typeface="D2Coding" panose="020B0609020101020101" pitchFamily="49" charset="-127"/>
+            </a:endParaRPr>
           </a:p>
           <a:p>
             <a:pPr marL="285750" indent="-285750">
@@ -4580,69 +4533,10 @@
               <a:buFont typeface="Arial" panose="020B0604020202020204" pitchFamily="34" charset="0"/>
               <a:buChar char="•"/>
             </a:pPr>
-            <a:r>
-              <a:rPr lang="ko-KR" altLang="en-US" sz="1200" dirty="0">
-                <a:latin typeface="D2Coding" panose="020B0609020101020101" pitchFamily="49" charset="-127"/>
-                <a:ea typeface="D2Coding" panose="020B0609020101020101" pitchFamily="49" charset="-127"/>
-              </a:rPr>
-              <a:t>최신 모델(GPT-4o, </a:t>
-            </a:r>
-            <a:r>
-              <a:rPr lang="ko-KR" altLang="en-US" sz="1200" dirty="0" err="1">
-                <a:latin typeface="D2Coding" panose="020B0609020101020101" pitchFamily="49" charset="-127"/>
-                <a:ea typeface="D2Coding" panose="020B0609020101020101" pitchFamily="49" charset="-127"/>
-              </a:rPr>
-              <a:t>Llama</a:t>
-            </a:r>
-            <a:r>
-              <a:rPr lang="ko-KR" altLang="en-US" sz="1200" dirty="0">
-                <a:latin typeface="D2Coding" panose="020B0609020101020101" pitchFamily="49" charset="-127"/>
-                <a:ea typeface="D2Coding" panose="020B0609020101020101" pitchFamily="49" charset="-127"/>
-              </a:rPr>
-              <a:t> 3, </a:t>
-            </a:r>
-            <a:r>
-              <a:rPr lang="ko-KR" altLang="en-US" sz="1200" dirty="0" err="1">
-                <a:latin typeface="D2Coding" panose="020B0609020101020101" pitchFamily="49" charset="-127"/>
-                <a:ea typeface="D2Coding" panose="020B0609020101020101" pitchFamily="49" charset="-127"/>
-              </a:rPr>
-              <a:t>Claude</a:t>
-            </a:r>
-            <a:r>
-              <a:rPr lang="ko-KR" altLang="en-US" sz="1200" dirty="0">
-                <a:latin typeface="D2Coding" panose="020B0609020101020101" pitchFamily="49" charset="-127"/>
-                <a:ea typeface="D2Coding" panose="020B0609020101020101" pitchFamily="49" charset="-127"/>
-              </a:rPr>
-              <a:t> 등)은 다음과 같은 데이터셋으로 집중 학습 덕분에 모델은 "내 내부 지식으로 답할 수 없거나 외부 기능이 필요한 </a:t>
-            </a:r>
-            <a:r>
-              <a:rPr lang="ko-KR" altLang="en-US" sz="1200" dirty="0" err="1">
-                <a:latin typeface="D2Coding" panose="020B0609020101020101" pitchFamily="49" charset="-127"/>
-                <a:ea typeface="D2Coding" panose="020B0609020101020101" pitchFamily="49" charset="-127"/>
-              </a:rPr>
-              <a:t>패턴"이</a:t>
-            </a:r>
-            <a:r>
-              <a:rPr lang="ko-KR" altLang="en-US" sz="1200" dirty="0">
-                <a:latin typeface="D2Coding" panose="020B0609020101020101" pitchFamily="49" charset="-127"/>
-                <a:ea typeface="D2Coding" panose="020B0609020101020101" pitchFamily="49" charset="-127"/>
-              </a:rPr>
-              <a:t> 들어오면 일반 텍스트 대신 도구 호출용 포맷(JSON 등)을 생성하도록 확률(</a:t>
-            </a:r>
-            <a:r>
-              <a:rPr lang="ko-KR" altLang="en-US" sz="1200" dirty="0" err="1">
-                <a:latin typeface="D2Coding" panose="020B0609020101020101" pitchFamily="49" charset="-127"/>
-                <a:ea typeface="D2Coding" panose="020B0609020101020101" pitchFamily="49" charset="-127"/>
-              </a:rPr>
-              <a:t>Logits</a:t>
-            </a:r>
-            <a:r>
-              <a:rPr lang="ko-KR" altLang="en-US" sz="1200" dirty="0">
-                <a:latin typeface="D2Coding" panose="020B0609020101020101" pitchFamily="49" charset="-127"/>
-                <a:ea typeface="D2Coding" panose="020B0609020101020101" pitchFamily="49" charset="-127"/>
-              </a:rPr>
-              <a:t>)이 급상승 하게 됨</a:t>
-            </a:r>
+            <a:endParaRPr lang="ko-KR" altLang="en-US" sz="1100" dirty="0">
+              <a:latin typeface="D2Coding" panose="020B0609020101020101" pitchFamily="49" charset="-127"/>
+              <a:ea typeface="D2Coding" panose="020B0609020101020101" pitchFamily="49" charset="-127"/>
+            </a:endParaRPr>
           </a:p>
           <a:p>
             <a:pPr>
@@ -4651,11 +4545,53 @@
               </a:lnSpc>
             </a:pPr>
             <a:r>
-              <a:rPr lang="ko-KR" altLang="en-US" sz="1200" dirty="0">
-                <a:latin typeface="D2Coding" panose="020B0609020101020101" pitchFamily="49" charset="-127"/>
-                <a:ea typeface="D2Coding" panose="020B0609020101020101" pitchFamily="49" charset="-127"/>
-              </a:rPr>
-              <a:t>③ 지식/능력 한계 인지 및 매칭</a:t>
+              <a:rPr lang="ko-KR" altLang="en-US" sz="1200" b="1" dirty="0">
+                <a:latin typeface="D2Coding" panose="020B0609020101020101" pitchFamily="49" charset="-127"/>
+                <a:ea typeface="D2Coding" panose="020B0609020101020101" pitchFamily="49" charset="-127"/>
+              </a:rPr>
+              <a:t>② 도구 호출 전용 </a:t>
+            </a:r>
+            <a:r>
+              <a:rPr lang="ko-KR" altLang="en-US" sz="1200" b="1" dirty="0" err="1">
+                <a:latin typeface="D2Coding" panose="020B0609020101020101" pitchFamily="49" charset="-127"/>
+                <a:ea typeface="D2Coding" panose="020B0609020101020101" pitchFamily="49" charset="-127"/>
+              </a:rPr>
+              <a:t>파인튜닝</a:t>
+            </a:r>
+            <a:r>
+              <a:rPr lang="ko-KR" altLang="en-US" sz="1200" b="1" dirty="0">
+                <a:latin typeface="D2Coding" panose="020B0609020101020101" pitchFamily="49" charset="-127"/>
+                <a:ea typeface="D2Coding" panose="020B0609020101020101" pitchFamily="49" charset="-127"/>
+              </a:rPr>
+              <a:t> (Tool-</a:t>
+            </a:r>
+            <a:r>
+              <a:rPr lang="ko-KR" altLang="en-US" sz="1200" b="1" dirty="0" err="1">
+                <a:latin typeface="D2Coding" panose="020B0609020101020101" pitchFamily="49" charset="-127"/>
+                <a:ea typeface="D2Coding" panose="020B0609020101020101" pitchFamily="49" charset="-127"/>
+              </a:rPr>
+              <a:t>calling</a:t>
+            </a:r>
+            <a:r>
+              <a:rPr lang="ko-KR" altLang="en-US" sz="1200" b="1" dirty="0">
+                <a:latin typeface="D2Coding" panose="020B0609020101020101" pitchFamily="49" charset="-127"/>
+                <a:ea typeface="D2Coding" panose="020B0609020101020101" pitchFamily="49" charset="-127"/>
+              </a:rPr>
+              <a:t> </a:t>
+            </a:r>
+            <a:r>
+              <a:rPr lang="ko-KR" altLang="en-US" sz="1200" b="1" dirty="0" err="1">
+                <a:latin typeface="D2Coding" panose="020B0609020101020101" pitchFamily="49" charset="-127"/>
+                <a:ea typeface="D2Coding" panose="020B0609020101020101" pitchFamily="49" charset="-127"/>
+              </a:rPr>
+              <a:t>Fine-tuning</a:t>
+            </a:r>
+            <a:r>
+              <a:rPr lang="ko-KR" altLang="en-US" sz="1200" b="1" dirty="0">
+                <a:latin typeface="D2Coding" panose="020B0609020101020101" pitchFamily="49" charset="-127"/>
+                <a:ea typeface="D2Coding" panose="020B0609020101020101" pitchFamily="49" charset="-127"/>
+              </a:rPr>
+              <a:t>)</a:t>
             </a:r>
           </a:p>
           <a:p>
@@ -4667,56 +4603,163 @@
               <a:buChar char="•"/>
             </a:pPr>
             <a:r>
-              <a:rPr lang="ko-KR" altLang="en-US" sz="1200" dirty="0" err="1">
+              <a:rPr lang="ko-KR" altLang="en-US" sz="1100" dirty="0">
+                <a:latin typeface="D2Coding" panose="020B0609020101020101" pitchFamily="49" charset="-127"/>
+                <a:ea typeface="D2Coding" panose="020B0609020101020101" pitchFamily="49" charset="-127"/>
+              </a:rPr>
+              <a:t>최신 모델(GPT-4o, </a:t>
+            </a:r>
+            <a:r>
+              <a:rPr lang="ko-KR" altLang="en-US" sz="1100" dirty="0" err="1">
+                <a:latin typeface="D2Coding" panose="020B0609020101020101" pitchFamily="49" charset="-127"/>
+                <a:ea typeface="D2Coding" panose="020B0609020101020101" pitchFamily="49" charset="-127"/>
+              </a:rPr>
+              <a:t>Llama</a:t>
+            </a:r>
+            <a:r>
+              <a:rPr lang="ko-KR" altLang="en-US" sz="1100" dirty="0">
+                <a:latin typeface="D2Coding" panose="020B0609020101020101" pitchFamily="49" charset="-127"/>
+                <a:ea typeface="D2Coding" panose="020B0609020101020101" pitchFamily="49" charset="-127"/>
+              </a:rPr>
+              <a:t> 3, </a:t>
+            </a:r>
+            <a:r>
+              <a:rPr lang="ko-KR" altLang="en-US" sz="1100" dirty="0" err="1">
+                <a:latin typeface="D2Coding" panose="020B0609020101020101" pitchFamily="49" charset="-127"/>
+                <a:ea typeface="D2Coding" panose="020B0609020101020101" pitchFamily="49" charset="-127"/>
+              </a:rPr>
+              <a:t>Claude</a:t>
+            </a:r>
+            <a:r>
+              <a:rPr lang="ko-KR" altLang="en-US" sz="1100" dirty="0">
+                <a:latin typeface="D2Coding" panose="020B0609020101020101" pitchFamily="49" charset="-127"/>
+                <a:ea typeface="D2Coding" panose="020B0609020101020101" pitchFamily="49" charset="-127"/>
+              </a:rPr>
+              <a:t> 등)은 다음과 같은 데이터셋으로 집중 학습 덕분에 모델은 "내 내부 지식으로 답할 수 없거나 외부 기능이 필요한 </a:t>
+            </a:r>
+            <a:r>
+              <a:rPr lang="ko-KR" altLang="en-US" sz="1100" dirty="0" err="1">
+                <a:latin typeface="D2Coding" panose="020B0609020101020101" pitchFamily="49" charset="-127"/>
+                <a:ea typeface="D2Coding" panose="020B0609020101020101" pitchFamily="49" charset="-127"/>
+              </a:rPr>
+              <a:t>패턴"이</a:t>
+            </a:r>
+            <a:r>
+              <a:rPr lang="ko-KR" altLang="en-US" sz="1100" dirty="0">
+                <a:latin typeface="D2Coding" panose="020B0609020101020101" pitchFamily="49" charset="-127"/>
+                <a:ea typeface="D2Coding" panose="020B0609020101020101" pitchFamily="49" charset="-127"/>
+              </a:rPr>
+              <a:t> 들어오면 일반 텍스트 대신 도구 호출용 포맷(JSON 등)을 생성하도록 확률(</a:t>
+            </a:r>
+            <a:r>
+              <a:rPr lang="ko-KR" altLang="en-US" sz="1100" dirty="0" err="1">
+                <a:latin typeface="D2Coding" panose="020B0609020101020101" pitchFamily="49" charset="-127"/>
+                <a:ea typeface="D2Coding" panose="020B0609020101020101" pitchFamily="49" charset="-127"/>
+              </a:rPr>
+              <a:t>Logits</a:t>
+            </a:r>
+            <a:r>
+              <a:rPr lang="ko-KR" altLang="en-US" sz="1100" dirty="0">
+                <a:latin typeface="D2Coding" panose="020B0609020101020101" pitchFamily="49" charset="-127"/>
+                <a:ea typeface="D2Coding" panose="020B0609020101020101" pitchFamily="49" charset="-127"/>
+              </a:rPr>
+              <a:t>)이 급상승</a:t>
+            </a:r>
+            <a:endParaRPr lang="en-US" altLang="ko-KR" sz="1100" dirty="0">
+              <a:latin typeface="D2Coding" panose="020B0609020101020101" pitchFamily="49" charset="-127"/>
+              <a:ea typeface="D2Coding" panose="020B0609020101020101" pitchFamily="49" charset="-127"/>
+            </a:endParaRPr>
+          </a:p>
+          <a:p>
+            <a:pPr marL="285750" indent="-285750">
+              <a:lnSpc>
+                <a:spcPct val="150000"/>
+              </a:lnSpc>
+              <a:buFont typeface="Arial" panose="020B0604020202020204" pitchFamily="34" charset="0"/>
+              <a:buChar char="•"/>
+            </a:pPr>
+            <a:endParaRPr lang="ko-KR" altLang="en-US" sz="1100" dirty="0">
+              <a:latin typeface="D2Coding" panose="020B0609020101020101" pitchFamily="49" charset="-127"/>
+              <a:ea typeface="D2Coding" panose="020B0609020101020101" pitchFamily="49" charset="-127"/>
+            </a:endParaRPr>
+          </a:p>
+          <a:p>
+            <a:pPr>
+              <a:lnSpc>
+                <a:spcPct val="150000"/>
+              </a:lnSpc>
+            </a:pPr>
+            <a:r>
+              <a:rPr lang="ko-KR" altLang="en-US" sz="1200" b="1" dirty="0">
+                <a:latin typeface="D2Coding" panose="020B0609020101020101" pitchFamily="49" charset="-127"/>
+                <a:ea typeface="D2Coding" panose="020B0609020101020101" pitchFamily="49" charset="-127"/>
+              </a:rPr>
+              <a:t>③ 지식/능력 한계 인지 및 매칭</a:t>
+            </a:r>
+            <a:endParaRPr lang="ko-KR" altLang="en-US" sz="1100" b="1" dirty="0">
+              <a:latin typeface="D2Coding" panose="020B0609020101020101" pitchFamily="49" charset="-127"/>
+              <a:ea typeface="D2Coding" panose="020B0609020101020101" pitchFamily="49" charset="-127"/>
+            </a:endParaRPr>
+          </a:p>
+          <a:p>
+            <a:pPr marL="285750" indent="-285750">
+              <a:lnSpc>
+                <a:spcPct val="150000"/>
+              </a:lnSpc>
+              <a:buFont typeface="Arial" panose="020B0604020202020204" pitchFamily="34" charset="0"/>
+              <a:buChar char="•"/>
+            </a:pPr>
+            <a:r>
+              <a:rPr lang="ko-KR" altLang="en-US" sz="1100" dirty="0" err="1">
                 <a:latin typeface="D2Coding" panose="020B0609020101020101" pitchFamily="49" charset="-127"/>
                 <a:ea typeface="D2Coding" panose="020B0609020101020101" pitchFamily="49" charset="-127"/>
               </a:rPr>
               <a:t>LLM은</a:t>
             </a:r>
             <a:r>
-              <a:rPr lang="ko-KR" altLang="en-US" sz="1200" dirty="0">
+              <a:rPr lang="ko-KR" altLang="en-US" sz="1100" dirty="0">
                 <a:latin typeface="D2Coding" panose="020B0609020101020101" pitchFamily="49" charset="-127"/>
                 <a:ea typeface="D2Coding" panose="020B0609020101020101" pitchFamily="49" charset="-127"/>
               </a:rPr>
               <a:t> 사용자 질문을 접했을 때 '직접 텍스트로 </a:t>
             </a:r>
             <a:r>
-              <a:rPr lang="ko-KR" altLang="en-US" sz="1200" dirty="0" err="1">
+              <a:rPr lang="ko-KR" altLang="en-US" sz="1100" dirty="0" err="1">
                 <a:latin typeface="D2Coding" panose="020B0609020101020101" pitchFamily="49" charset="-127"/>
                 <a:ea typeface="D2Coding" panose="020B0609020101020101" pitchFamily="49" charset="-127"/>
               </a:rPr>
               <a:t>답하기'보다</a:t>
             </a:r>
             <a:r>
-              <a:rPr lang="ko-KR" altLang="en-US" sz="1200" dirty="0">
+              <a:rPr lang="ko-KR" altLang="en-US" sz="1100" dirty="0">
                 <a:latin typeface="D2Coding" panose="020B0609020101020101" pitchFamily="49" charset="-127"/>
                 <a:ea typeface="D2Coding" panose="020B0609020101020101" pitchFamily="49" charset="-127"/>
               </a:rPr>
               <a:t> '도구를 호출하는 </a:t>
             </a:r>
             <a:r>
-              <a:rPr lang="ko-KR" altLang="en-US" sz="1200" dirty="0" err="1">
+              <a:rPr lang="ko-KR" altLang="en-US" sz="1100" dirty="0" err="1">
                 <a:latin typeface="D2Coding" panose="020B0609020101020101" pitchFamily="49" charset="-127"/>
                 <a:ea typeface="D2Coding" panose="020B0609020101020101" pitchFamily="49" charset="-127"/>
               </a:rPr>
               <a:t>토큰'을</a:t>
             </a:r>
             <a:r>
-              <a:rPr lang="ko-KR" altLang="en-US" sz="1200" dirty="0">
+              <a:rPr lang="ko-KR" altLang="en-US" sz="1100" dirty="0">
                 <a:latin typeface="D2Coding" panose="020B0609020101020101" pitchFamily="49" charset="-127"/>
                 <a:ea typeface="D2Coding" panose="020B0609020101020101" pitchFamily="49" charset="-127"/>
               </a:rPr>
               <a:t> 출력하는 쪽이 훨씬 높은 확신도(확률)</a:t>
             </a:r>
             <a:r>
-              <a:rPr lang="ko-KR" altLang="en-US" sz="1200" dirty="0" err="1">
+              <a:rPr lang="ko-KR" altLang="en-US" sz="1100" dirty="0" err="1">
                 <a:latin typeface="D2Coding" panose="020B0609020101020101" pitchFamily="49" charset="-127"/>
                 <a:ea typeface="D2Coding" panose="020B0609020101020101" pitchFamily="49" charset="-127"/>
               </a:rPr>
               <a:t>를</a:t>
             </a:r>
             <a:r>
-              <a:rPr lang="ko-KR" altLang="en-US" sz="1200" dirty="0">
+              <a:rPr lang="ko-KR" altLang="en-US" sz="1100" dirty="0">
                 <a:latin typeface="D2Coding" panose="020B0609020101020101" pitchFamily="49" charset="-127"/>
                 <a:ea typeface="D2Coding" panose="020B0609020101020101" pitchFamily="49" charset="-127"/>
               </a:rPr>
@@ -5459,12 +5502,17 @@
         </p:blipFill>
         <p:spPr>
           <a:xfrm>
-            <a:off x="942975" y="1589903"/>
-            <a:ext cx="1647886" cy="3571905"/>
+            <a:off x="942974" y="1589903"/>
+            <a:ext cx="1882513" cy="4080476"/>
           </a:xfrm>
           <a:prstGeom prst="rect">
             <a:avLst/>
           </a:prstGeom>
+          <a:ln>
+            <a:solidFill>
+              <a:schemeClr val="tx1"/>
+            </a:solidFill>
+          </a:ln>
         </p:spPr>
       </p:pic>
       <p:sp>
@@ -5481,8 +5529,8 @@
         </p:nvSpPr>
         <p:spPr>
           <a:xfrm>
-            <a:off x="409606" y="5344246"/>
-            <a:ext cx="2714623" cy="738664"/>
+            <a:off x="638206" y="5801446"/>
+            <a:ext cx="2400269" cy="646331"/>
           </a:xfrm>
           <a:prstGeom prst="rect">
             <a:avLst/>
@@ -5496,13 +5544,13 @@
           <a:lstStyle/>
           <a:p>
             <a:r>
-              <a:rPr lang="en-US" altLang="ko-KR" sz="1400" dirty="0">
+              <a:rPr lang="en-US" altLang="ko-KR" sz="1200" dirty="0">
                 <a:latin typeface="D2Coding" panose="020B0609020101020101" pitchFamily="49" charset="-127"/>
                 <a:ea typeface="D2Coding" panose="020B0609020101020101" pitchFamily="49" charset="-127"/>
               </a:rPr>
               <a:t>Figure. Modifying the agent architecture to always call a specific tool first</a:t>
             </a:r>
-            <a:endParaRPr lang="ko-KR" altLang="en-US" sz="1400" dirty="0">
+            <a:endParaRPr lang="ko-KR" altLang="en-US" sz="1200" dirty="0">
               <a:latin typeface="D2Coding" panose="020B0609020101020101" pitchFamily="49" charset="-127"/>
               <a:ea typeface="D2Coding" panose="020B0609020101020101" pitchFamily="49" charset="-127"/>
             </a:endParaRPr>
@@ -5524,7 +5572,7 @@
         <p:spPr>
           <a:xfrm>
             <a:off x="3400423" y="1589903"/>
-            <a:ext cx="8153401" cy="4675960"/>
+            <a:ext cx="8153401" cy="4080476"/>
           </a:xfrm>
           <a:prstGeom prst="rect">
             <a:avLst/>
@@ -5550,125 +5598,125 @@
               <a:buChar char="v"/>
             </a:pPr>
             <a:r>
-              <a:rPr lang="ko-KR" altLang="en-US" sz="1600" dirty="0">
+              <a:rPr lang="ko-KR" altLang="en-US" sz="1400" dirty="0">
                 <a:latin typeface="D2Coding" panose="020B0609020101020101" pitchFamily="49" charset="-127"/>
                 <a:ea typeface="D2Coding" panose="020B0609020101020101" pitchFamily="49" charset="-127"/>
               </a:rPr>
               <a:t>개발자가 만들려는 서비스의 목적이 </a:t>
             </a:r>
             <a:r>
-              <a:rPr lang="en-US" altLang="ko-KR" sz="1600" dirty="0">
+              <a:rPr lang="en-US" altLang="ko-KR" sz="1400" dirty="0">
                 <a:latin typeface="D2Coding" panose="020B0609020101020101" pitchFamily="49" charset="-127"/>
                 <a:ea typeface="D2Coding" panose="020B0609020101020101" pitchFamily="49" charset="-127"/>
               </a:rPr>
               <a:t>"</a:t>
             </a:r>
             <a:r>
-              <a:rPr lang="ko-KR" altLang="en-US" sz="1600" dirty="0">
+              <a:rPr lang="ko-KR" altLang="en-US" sz="1400" dirty="0">
                 <a:latin typeface="D2Coding" panose="020B0609020101020101" pitchFamily="49" charset="-127"/>
                 <a:ea typeface="D2Coding" panose="020B0609020101020101" pitchFamily="49" charset="-127"/>
               </a:rPr>
               <a:t>무조건 웹 검색 결과를 바탕으로 답변해야 하는 시스템</a:t>
             </a:r>
             <a:r>
-              <a:rPr lang="en-US" altLang="ko-KR" sz="1600" dirty="0">
+              <a:rPr lang="en-US" altLang="ko-KR" sz="1400" dirty="0">
                 <a:latin typeface="D2Coding" panose="020B0609020101020101" pitchFamily="49" charset="-127"/>
                 <a:ea typeface="D2Coding" panose="020B0609020101020101" pitchFamily="49" charset="-127"/>
               </a:rPr>
               <a:t>"</a:t>
             </a:r>
             <a:r>
-              <a:rPr lang="ko-KR" altLang="en-US" sz="1600" dirty="0">
+              <a:rPr lang="ko-KR" altLang="en-US" sz="1400" dirty="0">
                 <a:latin typeface="D2Coding" panose="020B0609020101020101" pitchFamily="49" charset="-127"/>
                 <a:ea typeface="D2Coding" panose="020B0609020101020101" pitchFamily="49" charset="-127"/>
               </a:rPr>
               <a:t>이라면</a:t>
             </a:r>
             <a:r>
-              <a:rPr lang="en-US" altLang="ko-KR" sz="1600" dirty="0">
+              <a:rPr lang="en-US" altLang="ko-KR" sz="1400" dirty="0">
                 <a:latin typeface="D2Coding" panose="020B0609020101020101" pitchFamily="49" charset="-127"/>
                 <a:ea typeface="D2Coding" panose="020B0609020101020101" pitchFamily="49" charset="-127"/>
               </a:rPr>
               <a:t>, </a:t>
             </a:r>
             <a:r>
-              <a:rPr lang="ko-KR" altLang="en-US" sz="1600" dirty="0">
+              <a:rPr lang="ko-KR" altLang="en-US" sz="1400" dirty="0">
                 <a:latin typeface="D2Coding" panose="020B0609020101020101" pitchFamily="49" charset="-127"/>
                 <a:ea typeface="D2Coding" panose="020B0609020101020101" pitchFamily="49" charset="-127"/>
               </a:rPr>
               <a:t>굳이 첫 번째 회차에서 </a:t>
             </a:r>
             <a:r>
-              <a:rPr lang="en-US" altLang="ko-KR" sz="1600" dirty="0">
+              <a:rPr lang="en-US" altLang="ko-KR" sz="1400" dirty="0">
                 <a:latin typeface="D2Coding" panose="020B0609020101020101" pitchFamily="49" charset="-127"/>
                 <a:ea typeface="D2Coding" panose="020B0609020101020101" pitchFamily="49" charset="-127"/>
               </a:rPr>
               <a:t>LLM</a:t>
             </a:r>
             <a:r>
-              <a:rPr lang="ko-KR" altLang="en-US" sz="1600" dirty="0">
+              <a:rPr lang="ko-KR" altLang="en-US" sz="1400" dirty="0">
                 <a:latin typeface="D2Coding" panose="020B0609020101020101" pitchFamily="49" charset="-127"/>
                 <a:ea typeface="D2Coding" panose="020B0609020101020101" pitchFamily="49" charset="-127"/>
               </a:rPr>
               <a:t>에게 </a:t>
             </a:r>
             <a:r>
-              <a:rPr lang="en-US" altLang="ko-KR" sz="1600" dirty="0">
+              <a:rPr lang="en-US" altLang="ko-KR" sz="1400" dirty="0">
                 <a:latin typeface="D2Coding" panose="020B0609020101020101" pitchFamily="49" charset="-127"/>
                 <a:ea typeface="D2Coding" panose="020B0609020101020101" pitchFamily="49" charset="-127"/>
               </a:rPr>
               <a:t>"</a:t>
             </a:r>
             <a:r>
-              <a:rPr lang="ko-KR" altLang="en-US" sz="1600" dirty="0">
+              <a:rPr lang="ko-KR" altLang="en-US" sz="1400" dirty="0">
                 <a:latin typeface="D2Coding" panose="020B0609020101020101" pitchFamily="49" charset="-127"/>
                 <a:ea typeface="D2Coding" panose="020B0609020101020101" pitchFamily="49" charset="-127"/>
               </a:rPr>
               <a:t>검색할까 말까</a:t>
             </a:r>
             <a:r>
-              <a:rPr lang="en-US" altLang="ko-KR" sz="1600" dirty="0">
+              <a:rPr lang="en-US" altLang="ko-KR" sz="1400" dirty="0">
                 <a:latin typeface="D2Coding" panose="020B0609020101020101" pitchFamily="49" charset="-127"/>
                 <a:ea typeface="D2Coding" panose="020B0609020101020101" pitchFamily="49" charset="-127"/>
               </a:rPr>
               <a:t>?"</a:t>
             </a:r>
             <a:r>
-              <a:rPr lang="ko-KR" altLang="en-US" sz="1600" dirty="0">
+              <a:rPr lang="ko-KR" altLang="en-US" sz="1400" dirty="0">
                 <a:latin typeface="D2Coding" panose="020B0609020101020101" pitchFamily="49" charset="-127"/>
                 <a:ea typeface="D2Coding" panose="020B0609020101020101" pitchFamily="49" charset="-127"/>
               </a:rPr>
               <a:t>를 물어보며 시간</a:t>
             </a:r>
             <a:r>
-              <a:rPr lang="en-US" altLang="ko-KR" sz="1600" dirty="0">
+              <a:rPr lang="en-US" altLang="ko-KR" sz="1400" dirty="0">
                 <a:latin typeface="D2Coding" panose="020B0609020101020101" pitchFamily="49" charset="-127"/>
                 <a:ea typeface="D2Coding" panose="020B0609020101020101" pitchFamily="49" charset="-127"/>
               </a:rPr>
               <a:t>(Latency)</a:t>
             </a:r>
             <a:r>
-              <a:rPr lang="ko-KR" altLang="en-US" sz="1600" dirty="0">
+              <a:rPr lang="ko-KR" altLang="en-US" sz="1400" dirty="0">
                 <a:latin typeface="D2Coding" panose="020B0609020101020101" pitchFamily="49" charset="-127"/>
                 <a:ea typeface="D2Coding" panose="020B0609020101020101" pitchFamily="49" charset="-127"/>
               </a:rPr>
               <a:t>과 비용</a:t>
             </a:r>
             <a:r>
-              <a:rPr lang="en-US" altLang="ko-KR" sz="1600" dirty="0">
+              <a:rPr lang="en-US" altLang="ko-KR" sz="1400" dirty="0">
                 <a:latin typeface="D2Coding" panose="020B0609020101020101" pitchFamily="49" charset="-127"/>
                 <a:ea typeface="D2Coding" panose="020B0609020101020101" pitchFamily="49" charset="-127"/>
               </a:rPr>
               <a:t>(Token)</a:t>
             </a:r>
             <a:r>
-              <a:rPr lang="ko-KR" altLang="en-US" sz="1600" dirty="0">
+              <a:rPr lang="ko-KR" altLang="en-US" sz="1400" dirty="0">
                 <a:latin typeface="D2Coding" panose="020B0609020101020101" pitchFamily="49" charset="-127"/>
                 <a:ea typeface="D2Coding" panose="020B0609020101020101" pitchFamily="49" charset="-127"/>
               </a:rPr>
               <a:t>을 낭비할 필요 없이 곧바로 검색 노드로 보내는 것이 훨씬 효율적</a:t>
             </a:r>
-            <a:endParaRPr lang="en-US" altLang="ko-KR" sz="1600" dirty="0">
+            <a:endParaRPr lang="en-US" altLang="ko-KR" sz="1400" dirty="0">
               <a:latin typeface="D2Coding" panose="020B0609020101020101" pitchFamily="49" charset="-127"/>
               <a:ea typeface="D2Coding" panose="020B0609020101020101" pitchFamily="49" charset="-127"/>
             </a:endParaRPr>
@@ -5681,7 +5729,7 @@
               <a:buFont typeface="Wingdings" panose="05000000000000000000" pitchFamily="2" charset="2"/>
               <a:buChar char="v"/>
             </a:pPr>
-            <a:endParaRPr lang="en-US" altLang="ko-KR" sz="1600" dirty="0">
+            <a:endParaRPr lang="en-US" altLang="ko-KR" sz="1400" dirty="0">
               <a:latin typeface="D2Coding" panose="020B0609020101020101" pitchFamily="49" charset="-127"/>
               <a:ea typeface="D2Coding" panose="020B0609020101020101" pitchFamily="49" charset="-127"/>
             </a:endParaRPr>
@@ -5695,90 +5743,90 @@
               <a:buChar char="v"/>
             </a:pPr>
             <a:r>
-              <a:rPr lang="ko-KR" altLang="en-US" sz="1600" dirty="0" err="1">
+              <a:rPr lang="ko-KR" altLang="en-US" sz="1400" dirty="0" err="1">
                 <a:latin typeface="D2Coding" panose="020B0609020101020101" pitchFamily="49" charset="-127"/>
                 <a:ea typeface="D2Coding" panose="020B0609020101020101" pitchFamily="49" charset="-127"/>
               </a:rPr>
               <a:t>first_model은</a:t>
             </a:r>
             <a:r>
-              <a:rPr lang="ko-KR" altLang="en-US" sz="1600" dirty="0">
+              <a:rPr lang="ko-KR" altLang="en-US" sz="1400" dirty="0">
                 <a:latin typeface="D2Coding" panose="020B0609020101020101" pitchFamily="49" charset="-127"/>
                 <a:ea typeface="D2Coding" panose="020B0609020101020101" pitchFamily="49" charset="-127"/>
               </a:rPr>
               <a:t> 고정</a:t>
             </a:r>
             <a:r>
-              <a:rPr lang="en-US" altLang="ko-KR" sz="1600" dirty="0">
+              <a:rPr lang="en-US" altLang="ko-KR" sz="1400" dirty="0">
                 <a:latin typeface="D2Coding" panose="020B0609020101020101" pitchFamily="49" charset="-127"/>
                 <a:ea typeface="D2Coding" panose="020B0609020101020101" pitchFamily="49" charset="-127"/>
               </a:rPr>
               <a:t>(Hardcoding)</a:t>
             </a:r>
             <a:r>
-              <a:rPr lang="ko-KR" altLang="en-US" sz="1600" dirty="0">
+              <a:rPr lang="ko-KR" altLang="en-US" sz="1400" dirty="0">
                 <a:latin typeface="D2Coding" panose="020B0609020101020101" pitchFamily="49" charset="-127"/>
                 <a:ea typeface="D2Coding" panose="020B0609020101020101" pitchFamily="49" charset="-127"/>
               </a:rPr>
               <a:t>했을 뿐</a:t>
             </a:r>
             <a:r>
-              <a:rPr lang="en-US" altLang="ko-KR" sz="1600" dirty="0">
+              <a:rPr lang="en-US" altLang="ko-KR" sz="1400" dirty="0">
                 <a:latin typeface="D2Coding" panose="020B0609020101020101" pitchFamily="49" charset="-127"/>
                 <a:ea typeface="D2Coding" panose="020B0609020101020101" pitchFamily="49" charset="-127"/>
               </a:rPr>
               <a:t>, tools</a:t>
             </a:r>
             <a:r>
-              <a:rPr lang="ko-KR" altLang="en-US" sz="1600" dirty="0">
+              <a:rPr lang="ko-KR" altLang="en-US" sz="1400" dirty="0">
                 <a:latin typeface="D2Coding" panose="020B0609020101020101" pitchFamily="49" charset="-127"/>
                 <a:ea typeface="D2Coding" panose="020B0609020101020101" pitchFamily="49" charset="-127"/>
               </a:rPr>
               <a:t>에서 검색 결과를 받아온 </a:t>
             </a:r>
             <a:r>
-              <a:rPr lang="en-US" altLang="ko-KR" sz="1600" dirty="0">
+              <a:rPr lang="en-US" altLang="ko-KR" sz="1400" dirty="0">
                 <a:latin typeface="D2Coding" panose="020B0609020101020101" pitchFamily="49" charset="-127"/>
                 <a:ea typeface="D2Coding" panose="020B0609020101020101" pitchFamily="49" charset="-127"/>
               </a:rPr>
               <a:t>2</a:t>
             </a:r>
             <a:r>
-              <a:rPr lang="ko-KR" altLang="en-US" sz="1600" dirty="0">
+              <a:rPr lang="ko-KR" altLang="en-US" sz="1400" dirty="0">
                 <a:latin typeface="D2Coding" panose="020B0609020101020101" pitchFamily="49" charset="-127"/>
                 <a:ea typeface="D2Coding" panose="020B0609020101020101" pitchFamily="49" charset="-127"/>
               </a:rPr>
               <a:t>번째 단계부터는 다시 표준 에이전트 방식</a:t>
             </a:r>
             <a:r>
-              <a:rPr lang="en-US" altLang="ko-KR" sz="1600" dirty="0">
+              <a:rPr lang="en-US" altLang="ko-KR" sz="1400" dirty="0">
                 <a:latin typeface="D2Coding" panose="020B0609020101020101" pitchFamily="49" charset="-127"/>
                 <a:ea typeface="D2Coding" panose="020B0609020101020101" pitchFamily="49" charset="-127"/>
               </a:rPr>
               <a:t>(model </a:t>
             </a:r>
             <a:r>
-              <a:rPr lang="ko-KR" altLang="en-US" sz="1600" dirty="0">
+              <a:rPr lang="ko-KR" altLang="en-US" sz="1400" dirty="0">
                 <a:latin typeface="D2Coding" panose="020B0609020101020101" pitchFamily="49" charset="-127"/>
                 <a:ea typeface="D2Coding" panose="020B0609020101020101" pitchFamily="49" charset="-127"/>
               </a:rPr>
               <a:t>노드</a:t>
             </a:r>
             <a:r>
-              <a:rPr lang="en-US" altLang="ko-KR" sz="1600" dirty="0">
+              <a:rPr lang="en-US" altLang="ko-KR" sz="1400" dirty="0">
                 <a:latin typeface="D2Coding" panose="020B0609020101020101" pitchFamily="49" charset="-127"/>
                 <a:ea typeface="D2Coding" panose="020B0609020101020101" pitchFamily="49" charset="-127"/>
               </a:rPr>
               <a:t>)</a:t>
             </a:r>
             <a:r>
-              <a:rPr lang="ko-KR" altLang="en-US" sz="1600" dirty="0">
+              <a:rPr lang="ko-KR" altLang="en-US" sz="1400" dirty="0">
                 <a:latin typeface="D2Coding" panose="020B0609020101020101" pitchFamily="49" charset="-127"/>
                 <a:ea typeface="D2Coding" panose="020B0609020101020101" pitchFamily="49" charset="-127"/>
               </a:rPr>
               <a:t> 수행</a:t>
             </a:r>
-            <a:endParaRPr lang="en-US" altLang="ko-KR" sz="1600" dirty="0">
+            <a:endParaRPr lang="en-US" altLang="ko-KR" sz="1400" dirty="0">
               <a:latin typeface="D2Coding" panose="020B0609020101020101" pitchFamily="49" charset="-127"/>
               <a:ea typeface="D2Coding" panose="020B0609020101020101" pitchFamily="49" charset="-127"/>
             </a:endParaRPr>
@@ -5791,7 +5839,7 @@
               <a:buFont typeface="Wingdings" panose="05000000000000000000" pitchFamily="2" charset="2"/>
               <a:buChar char="v"/>
             </a:pPr>
-            <a:endParaRPr lang="en-US" altLang="ko-KR" sz="1600" dirty="0">
+            <a:endParaRPr lang="en-US" altLang="ko-KR" sz="1400" dirty="0">
               <a:latin typeface="D2Coding" panose="020B0609020101020101" pitchFamily="49" charset="-127"/>
               <a:ea typeface="D2Coding" panose="020B0609020101020101" pitchFamily="49" charset="-127"/>
             </a:endParaRPr>
@@ -5805,14 +5853,14 @@
               <a:buChar char="v"/>
             </a:pPr>
             <a:r>
-              <a:rPr lang="ko-KR" altLang="en-US" sz="1600" dirty="0">
+              <a:rPr lang="ko-KR" altLang="en-US" sz="1400" dirty="0">
                 <a:latin typeface="D2Coding" panose="020B0609020101020101" pitchFamily="49" charset="-127"/>
                 <a:ea typeface="D2Coding" panose="020B0609020101020101" pitchFamily="49" charset="-127"/>
               </a:rPr>
               <a:t>START </a:t>
             </a:r>
             <a:r>
-              <a:rPr lang="en-US" altLang="ko-KR" sz="1600" dirty="0">
+              <a:rPr lang="en-US" altLang="ko-KR" sz="1400" dirty="0">
                 <a:latin typeface="D2Coding" panose="020B0609020101020101" pitchFamily="49" charset="-127"/>
                 <a:ea typeface="D2Coding" panose="020B0609020101020101" pitchFamily="49" charset="-127"/>
                 <a:sym typeface="Wingdings" panose="05000000000000000000" pitchFamily="2" charset="2"/>
@@ -5820,28 +5868,28 @@
               <a:t></a:t>
             </a:r>
             <a:r>
-              <a:rPr lang="ko-KR" altLang="en-US" sz="1600" dirty="0">
+              <a:rPr lang="ko-KR" altLang="en-US" sz="1400" dirty="0">
                 <a:latin typeface="D2Coding" panose="020B0609020101020101" pitchFamily="49" charset="-127"/>
                 <a:ea typeface="D2Coding" panose="020B0609020101020101" pitchFamily="49" charset="-127"/>
               </a:rPr>
               <a:t> </a:t>
             </a:r>
             <a:r>
-              <a:rPr lang="ko-KR" altLang="en-US" sz="1600" dirty="0" err="1">
+              <a:rPr lang="ko-KR" altLang="en-US" sz="1400" dirty="0" err="1">
                 <a:latin typeface="D2Coding" panose="020B0609020101020101" pitchFamily="49" charset="-127"/>
                 <a:ea typeface="D2Coding" panose="020B0609020101020101" pitchFamily="49" charset="-127"/>
               </a:rPr>
               <a:t>first_model</a:t>
             </a:r>
             <a:r>
-              <a:rPr lang="ko-KR" altLang="en-US" sz="1600" dirty="0">
+              <a:rPr lang="ko-KR" altLang="en-US" sz="1400" dirty="0">
                 <a:latin typeface="D2Coding" panose="020B0609020101020101" pitchFamily="49" charset="-127"/>
                 <a:ea typeface="D2Coding" panose="020B0609020101020101" pitchFamily="49" charset="-127"/>
               </a:rPr>
               <a:t> (규칙 기반 강제) </a:t>
             </a:r>
             <a:r>
-              <a:rPr lang="en-US" altLang="ko-KR" sz="1600" dirty="0">
+              <a:rPr lang="en-US" altLang="ko-KR" sz="1400" dirty="0">
                 <a:latin typeface="D2Coding" panose="020B0609020101020101" pitchFamily="49" charset="-127"/>
                 <a:ea typeface="D2Coding" panose="020B0609020101020101" pitchFamily="49" charset="-127"/>
                 <a:sym typeface="Wingdings" panose="05000000000000000000" pitchFamily="2" charset="2"/>
@@ -5849,28 +5897,28 @@
               <a:t></a:t>
             </a:r>
             <a:r>
-              <a:rPr lang="ko-KR" altLang="en-US" sz="1600" dirty="0">
+              <a:rPr lang="ko-KR" altLang="en-US" sz="1400" dirty="0">
                 <a:latin typeface="D2Coding" panose="020B0609020101020101" pitchFamily="49" charset="-127"/>
                 <a:ea typeface="D2Coding" panose="020B0609020101020101" pitchFamily="49" charset="-127"/>
               </a:rPr>
               <a:t> </a:t>
             </a:r>
             <a:r>
-              <a:rPr lang="ko-KR" altLang="en-US" sz="1600" dirty="0" err="1">
+              <a:rPr lang="ko-KR" altLang="en-US" sz="1400" dirty="0" err="1">
                 <a:latin typeface="D2Coding" panose="020B0609020101020101" pitchFamily="49" charset="-127"/>
                 <a:ea typeface="D2Coding" panose="020B0609020101020101" pitchFamily="49" charset="-127"/>
               </a:rPr>
               <a:t>tools</a:t>
             </a:r>
             <a:r>
-              <a:rPr lang="ko-KR" altLang="en-US" sz="1600" dirty="0">
+              <a:rPr lang="ko-KR" altLang="en-US" sz="1400" dirty="0">
                 <a:latin typeface="D2Coding" panose="020B0609020101020101" pitchFamily="49" charset="-127"/>
                 <a:ea typeface="D2Coding" panose="020B0609020101020101" pitchFamily="49" charset="-127"/>
               </a:rPr>
               <a:t> (검색 실행) </a:t>
             </a:r>
             <a:r>
-              <a:rPr lang="en-US" altLang="ko-KR" sz="1600" dirty="0">
+              <a:rPr lang="en-US" altLang="ko-KR" sz="1400" dirty="0">
                 <a:latin typeface="D2Coding" panose="020B0609020101020101" pitchFamily="49" charset="-127"/>
                 <a:ea typeface="D2Coding" panose="020B0609020101020101" pitchFamily="49" charset="-127"/>
                 <a:sym typeface="Wingdings" panose="05000000000000000000" pitchFamily="2" charset="2"/>
@@ -5878,27 +5926,27 @@
               <a:t></a:t>
             </a:r>
             <a:r>
-              <a:rPr lang="ko-KR" altLang="en-US" sz="1600" dirty="0">
+              <a:rPr lang="ko-KR" altLang="en-US" sz="1400" dirty="0">
                 <a:latin typeface="D2Coding" panose="020B0609020101020101" pitchFamily="49" charset="-127"/>
                 <a:ea typeface="D2Coding" panose="020B0609020101020101" pitchFamily="49" charset="-127"/>
               </a:rPr>
               <a:t> </a:t>
             </a:r>
             <a:r>
-              <a:rPr lang="ko-KR" altLang="en-US" sz="1600" dirty="0" err="1">
+              <a:rPr lang="ko-KR" altLang="en-US" sz="1400" dirty="0" err="1">
                 <a:latin typeface="D2Coding" panose="020B0609020101020101" pitchFamily="49" charset="-127"/>
                 <a:ea typeface="D2Coding" panose="020B0609020101020101" pitchFamily="49" charset="-127"/>
               </a:rPr>
               <a:t>model</a:t>
             </a:r>
             <a:r>
-              <a:rPr lang="ko-KR" altLang="en-US" sz="1600" dirty="0">
+              <a:rPr lang="ko-KR" altLang="en-US" sz="1400" dirty="0">
                 <a:latin typeface="D2Coding" panose="020B0609020101020101" pitchFamily="49" charset="-127"/>
                 <a:ea typeface="D2Coding" panose="020B0609020101020101" pitchFamily="49" charset="-127"/>
               </a:rPr>
               <a:t> (LLM)</a:t>
             </a:r>
-            <a:endParaRPr lang="en-US" altLang="ko-KR" sz="1600" dirty="0">
+            <a:endParaRPr lang="en-US" altLang="ko-KR" sz="1400" dirty="0">
               <a:latin typeface="D2Coding" panose="020B0609020101020101" pitchFamily="49" charset="-127"/>
               <a:ea typeface="D2Coding" panose="020B0609020101020101" pitchFamily="49" charset="-127"/>
             </a:endParaRPr>
@@ -5912,62 +5960,62 @@
               <a:buChar char="v"/>
             </a:pPr>
             <a:r>
-              <a:rPr lang="ko-KR" altLang="en-US" sz="1400" dirty="0" err="1">
+              <a:rPr lang="ko-KR" altLang="en-US" sz="1200" dirty="0" err="1">
                 <a:latin typeface="D2Coding" panose="020B0609020101020101" pitchFamily="49" charset="-127"/>
                 <a:ea typeface="D2Coding" panose="020B0609020101020101" pitchFamily="49" charset="-127"/>
               </a:rPr>
               <a:t>LLM을</a:t>
             </a:r>
             <a:r>
-              <a:rPr lang="ko-KR" altLang="en-US" sz="1400" dirty="0">
+              <a:rPr lang="ko-KR" altLang="en-US" sz="1200" dirty="0">
                 <a:latin typeface="D2Coding" panose="020B0609020101020101" pitchFamily="49" charset="-127"/>
                 <a:ea typeface="D2Coding" panose="020B0609020101020101" pitchFamily="49" charset="-127"/>
               </a:rPr>
               <a:t> 거치지 않고 파이썬 코드가 질문 원문을 낚아채 무조건 </a:t>
             </a:r>
             <a:r>
-              <a:rPr lang="ko-KR" altLang="en-US" sz="1400" dirty="0" err="1">
+              <a:rPr lang="ko-KR" altLang="en-US" sz="1200" dirty="0" err="1">
                 <a:latin typeface="D2Coding" panose="020B0609020101020101" pitchFamily="49" charset="-127"/>
                 <a:ea typeface="D2Coding" panose="020B0609020101020101" pitchFamily="49" charset="-127"/>
               </a:rPr>
               <a:t>duckduckgo_search</a:t>
             </a:r>
             <a:r>
-              <a:rPr lang="ko-KR" altLang="en-US" sz="1400" dirty="0">
+              <a:rPr lang="ko-KR" altLang="en-US" sz="1200" dirty="0">
                 <a:latin typeface="D2Coding" panose="020B0609020101020101" pitchFamily="49" charset="-127"/>
                 <a:ea typeface="D2Coding" panose="020B0609020101020101" pitchFamily="49" charset="-127"/>
               </a:rPr>
               <a:t> 도구 호출(</a:t>
             </a:r>
             <a:r>
-              <a:rPr lang="ko-KR" altLang="en-US" sz="1400" dirty="0" err="1">
+              <a:rPr lang="ko-KR" altLang="en-US" sz="1200" dirty="0" err="1">
                 <a:latin typeface="D2Coding" panose="020B0609020101020101" pitchFamily="49" charset="-127"/>
                 <a:ea typeface="D2Coding" panose="020B0609020101020101" pitchFamily="49" charset="-127"/>
               </a:rPr>
               <a:t>ToolCall</a:t>
             </a:r>
             <a:r>
-              <a:rPr lang="ko-KR" altLang="en-US" sz="1400" dirty="0">
+              <a:rPr lang="ko-KR" altLang="en-US" sz="1200" dirty="0">
                 <a:latin typeface="D2Coding" panose="020B0609020101020101" pitchFamily="49" charset="-127"/>
                 <a:ea typeface="D2Coding" panose="020B0609020101020101" pitchFamily="49" charset="-127"/>
               </a:rPr>
               <a:t>) 객체를 인위적으로 만들어 </a:t>
             </a:r>
             <a:r>
-              <a:rPr lang="ko-KR" altLang="en-US" sz="1400" dirty="0" err="1">
+              <a:rPr lang="ko-KR" altLang="en-US" sz="1200" dirty="0" err="1">
                 <a:latin typeface="D2Coding" panose="020B0609020101020101" pitchFamily="49" charset="-127"/>
                 <a:ea typeface="D2Coding" panose="020B0609020101020101" pitchFamily="49" charset="-127"/>
               </a:rPr>
               <a:t>tools</a:t>
             </a:r>
             <a:r>
-              <a:rPr lang="ko-KR" altLang="en-US" sz="1400" dirty="0">
+              <a:rPr lang="ko-KR" altLang="en-US" sz="1200" dirty="0">
                 <a:latin typeface="D2Coding" panose="020B0609020101020101" pitchFamily="49" charset="-127"/>
                 <a:ea typeface="D2Coding" panose="020B0609020101020101" pitchFamily="49" charset="-127"/>
               </a:rPr>
               <a:t> 노드로 바로 수행</a:t>
             </a:r>
-            <a:endParaRPr lang="en-US" altLang="ko-KR" sz="1400" dirty="0">
+            <a:endParaRPr lang="en-US" altLang="ko-KR" sz="1200" dirty="0">
               <a:latin typeface="D2Coding" panose="020B0609020101020101" pitchFamily="49" charset="-127"/>
               <a:ea typeface="D2Coding" panose="020B0609020101020101" pitchFamily="49" charset="-127"/>
             </a:endParaRPr>
@@ -5981,14 +6029,14 @@
               <a:buChar char="v"/>
             </a:pPr>
             <a:r>
-              <a:rPr lang="ko-KR" altLang="en-US" sz="1400" dirty="0">
+              <a:rPr lang="ko-KR" altLang="en-US" sz="1200" dirty="0">
                 <a:latin typeface="D2Coding" panose="020B0609020101020101" pitchFamily="49" charset="-127"/>
                 <a:ea typeface="D2Coding" panose="020B0609020101020101" pitchFamily="49" charset="-127"/>
               </a:rPr>
               <a:t>이전 코드는 START </a:t>
             </a:r>
             <a:r>
-              <a:rPr lang="en-US" altLang="ko-KR" sz="1400" dirty="0">
+              <a:rPr lang="en-US" altLang="ko-KR" sz="1200" dirty="0">
                 <a:latin typeface="D2Coding" panose="020B0609020101020101" pitchFamily="49" charset="-127"/>
                 <a:ea typeface="D2Coding" panose="020B0609020101020101" pitchFamily="49" charset="-127"/>
                 <a:sym typeface="Wingdings" panose="05000000000000000000" pitchFamily="2" charset="2"/>
@@ -5996,21 +6044,21 @@
               <a:t> </a:t>
             </a:r>
             <a:r>
-              <a:rPr lang="ko-KR" altLang="en-US" sz="1400" dirty="0" err="1">
+              <a:rPr lang="ko-KR" altLang="en-US" sz="1200" dirty="0" err="1">
                 <a:latin typeface="D2Coding" panose="020B0609020101020101" pitchFamily="49" charset="-127"/>
                 <a:ea typeface="D2Coding" panose="020B0609020101020101" pitchFamily="49" charset="-127"/>
               </a:rPr>
               <a:t>model</a:t>
             </a:r>
             <a:r>
-              <a:rPr lang="ko-KR" altLang="en-US" sz="1400" dirty="0">
+              <a:rPr lang="ko-KR" altLang="en-US" sz="1200" dirty="0">
                 <a:latin typeface="D2Coding" panose="020B0609020101020101" pitchFamily="49" charset="-127"/>
                 <a:ea typeface="D2Coding" panose="020B0609020101020101" pitchFamily="49" charset="-127"/>
               </a:rPr>
               <a:t> (LLM 판단) </a:t>
             </a:r>
             <a:r>
-              <a:rPr lang="en-US" altLang="ko-KR" sz="1400" dirty="0">
+              <a:rPr lang="en-US" altLang="ko-KR" sz="1200" dirty="0">
                 <a:latin typeface="D2Coding" panose="020B0609020101020101" pitchFamily="49" charset="-127"/>
                 <a:ea typeface="D2Coding" panose="020B0609020101020101" pitchFamily="49" charset="-127"/>
                 <a:sym typeface="Wingdings" panose="05000000000000000000" pitchFamily="2" charset="2"/>
@@ -6018,28 +6066,28 @@
               <a:t></a:t>
             </a:r>
             <a:r>
-              <a:rPr lang="ko-KR" altLang="en-US" sz="1400" dirty="0">
+              <a:rPr lang="ko-KR" altLang="en-US" sz="1200" dirty="0">
                 <a:latin typeface="D2Coding" panose="020B0609020101020101" pitchFamily="49" charset="-127"/>
                 <a:ea typeface="D2Coding" panose="020B0609020101020101" pitchFamily="49" charset="-127"/>
               </a:rPr>
               <a:t> </a:t>
             </a:r>
             <a:r>
-              <a:rPr lang="ko-KR" altLang="en-US" sz="1400" dirty="0" err="1">
+              <a:rPr lang="ko-KR" altLang="en-US" sz="1200" dirty="0" err="1">
                 <a:latin typeface="D2Coding" panose="020B0609020101020101" pitchFamily="49" charset="-127"/>
                 <a:ea typeface="D2Coding" panose="020B0609020101020101" pitchFamily="49" charset="-127"/>
               </a:rPr>
               <a:t>tools_condition</a:t>
             </a:r>
             <a:r>
-              <a:rPr lang="ko-KR" altLang="en-US" sz="1400" dirty="0">
+              <a:rPr lang="ko-KR" altLang="en-US" sz="1200" dirty="0">
                 <a:latin typeface="D2Coding" panose="020B0609020101020101" pitchFamily="49" charset="-127"/>
                 <a:ea typeface="D2Coding" panose="020B0609020101020101" pitchFamily="49" charset="-127"/>
               </a:rPr>
               <a:t> </a:t>
             </a:r>
             <a:r>
-              <a:rPr lang="en-US" altLang="ko-KR" sz="1400" dirty="0">
+              <a:rPr lang="en-US" altLang="ko-KR" sz="1200" dirty="0">
                 <a:latin typeface="D2Coding" panose="020B0609020101020101" pitchFamily="49" charset="-127"/>
                 <a:ea typeface="D2Coding" panose="020B0609020101020101" pitchFamily="49" charset="-127"/>
                 <a:sym typeface="Wingdings" panose="05000000000000000000" pitchFamily="2" charset="2"/>
@@ -6047,41 +6095,41 @@
               <a:t></a:t>
             </a:r>
             <a:r>
-              <a:rPr lang="ko-KR" altLang="en-US" sz="1400" dirty="0">
+              <a:rPr lang="ko-KR" altLang="en-US" sz="1200" dirty="0">
                 <a:latin typeface="D2Coding" panose="020B0609020101020101" pitchFamily="49" charset="-127"/>
                 <a:ea typeface="D2Coding" panose="020B0609020101020101" pitchFamily="49" charset="-127"/>
               </a:rPr>
               <a:t> </a:t>
             </a:r>
             <a:r>
-              <a:rPr lang="ko-KR" altLang="en-US" sz="1400" dirty="0" err="1">
+              <a:rPr lang="ko-KR" altLang="en-US" sz="1200" dirty="0" err="1">
                 <a:latin typeface="D2Coding" panose="020B0609020101020101" pitchFamily="49" charset="-127"/>
                 <a:ea typeface="D2Coding" panose="020B0609020101020101" pitchFamily="49" charset="-127"/>
               </a:rPr>
               <a:t>tools</a:t>
             </a:r>
             <a:r>
-              <a:rPr lang="ko-KR" altLang="en-US" sz="1400" dirty="0">
+              <a:rPr lang="ko-KR" altLang="en-US" sz="1200" dirty="0">
                 <a:latin typeface="D2Coding" panose="020B0609020101020101" pitchFamily="49" charset="-127"/>
                 <a:ea typeface="D2Coding" panose="020B0609020101020101" pitchFamily="49" charset="-127"/>
               </a:rPr>
               <a:t> (검색)질문을 받자마자 </a:t>
             </a:r>
             <a:r>
-              <a:rPr lang="ko-KR" altLang="en-US" sz="1400" dirty="0" err="1">
+              <a:rPr lang="ko-KR" altLang="en-US" sz="1200" dirty="0" err="1">
                 <a:latin typeface="D2Coding" panose="020B0609020101020101" pitchFamily="49" charset="-127"/>
                 <a:ea typeface="D2Coding" panose="020B0609020101020101" pitchFamily="49" charset="-127"/>
               </a:rPr>
               <a:t>LLM이</a:t>
             </a:r>
             <a:r>
-              <a:rPr lang="ko-KR" altLang="en-US" sz="1400" dirty="0">
+              <a:rPr lang="ko-KR" altLang="en-US" sz="1200" dirty="0">
                 <a:latin typeface="D2Coding" panose="020B0609020101020101" pitchFamily="49" charset="-127"/>
                 <a:ea typeface="D2Coding" panose="020B0609020101020101" pitchFamily="49" charset="-127"/>
               </a:rPr>
               <a:t> 먼저 질문을 읽고 검색을 할지, 어떤 검색어로 검색할지 스스로 판단</a:t>
             </a:r>
-            <a:endParaRPr lang="en-US" altLang="ko-KR" sz="1400" dirty="0">
+            <a:endParaRPr lang="en-US" altLang="ko-KR" sz="1200" dirty="0">
               <a:latin typeface="D2Coding" panose="020B0609020101020101" pitchFamily="49" charset="-127"/>
               <a:ea typeface="D2Coding" panose="020B0609020101020101" pitchFamily="49" charset="-127"/>
             </a:endParaRPr>
@@ -6268,18 +6316,30 @@
           <a:p>
             <a:pPr algn="r"/>
             <a:r>
-              <a:rPr lang="en-US" altLang="ko-KR" sz="2000" dirty="0"/>
+              <a:rPr lang="en-US" altLang="ko-KR" sz="2000" dirty="0">
+                <a:latin typeface="D2Coding" panose="020B0609020101020101" pitchFamily="49" charset="-127"/>
+                <a:ea typeface="D2Coding" panose="020B0609020101020101" pitchFamily="49" charset="-127"/>
+              </a:rPr>
               <a:t>LLM </a:t>
             </a:r>
             <a:r>
-              <a:rPr lang="ko-KR" altLang="en-US" sz="2000" dirty="0"/>
+              <a:rPr lang="ko-KR" altLang="en-US" sz="2000" dirty="0">
+                <a:latin typeface="D2Coding" panose="020B0609020101020101" pitchFamily="49" charset="-127"/>
+                <a:ea typeface="D2Coding" panose="020B0609020101020101" pitchFamily="49" charset="-127"/>
+              </a:rPr>
               <a:t>기반 루프</a:t>
             </a:r>
             <a:r>
-              <a:rPr lang="en-US" altLang="ko-KR" sz="2000" dirty="0"/>
+              <a:rPr lang="en-US" altLang="ko-KR" sz="2000" dirty="0">
+                <a:latin typeface="D2Coding" panose="020B0609020101020101" pitchFamily="49" charset="-127"/>
+                <a:ea typeface="D2Coding" panose="020B0609020101020101" pitchFamily="49" charset="-127"/>
+              </a:rPr>
               <a:t>(LLM-driven Loop)</a:t>
             </a:r>
-            <a:endParaRPr lang="ko-KR" altLang="en-US" sz="2000" dirty="0"/>
+            <a:endParaRPr lang="ko-KR" altLang="en-US" sz="2000" dirty="0">
+              <a:latin typeface="D2Coding" panose="020B0609020101020101" pitchFamily="49" charset="-127"/>
+              <a:ea typeface="D2Coding" panose="020B0609020101020101" pitchFamily="49" charset="-127"/>
+            </a:endParaRPr>
           </a:p>
         </p:txBody>
       </p:sp>
@@ -6297,13 +6357,18 @@
         </p:nvSpPr>
         <p:spPr>
           <a:xfrm>
-            <a:off x="600194" y="1267472"/>
-            <a:ext cx="6727456" cy="5225148"/>
+            <a:off x="600194" y="1543697"/>
+            <a:ext cx="6727456" cy="4583627"/>
           </a:xfrm>
           <a:prstGeom prst="rect">
             <a:avLst/>
           </a:prstGeom>
           <a:noFill/>
+          <a:ln>
+            <a:solidFill>
+              <a:schemeClr val="tx1"/>
+            </a:solidFill>
+          </a:ln>
         </p:spPr>
         <p:txBody>
           <a:bodyPr wrap="square">
@@ -6524,7 +6589,7 @@
                 <a:latin typeface="D2Coding" panose="020B0609020101020101" pitchFamily="49" charset="-127"/>
                 <a:ea typeface="D2Coding" panose="020B0609020101020101" pitchFamily="49" charset="-127"/>
               </a:rPr>
-              <a:t>우아한 해결방법</a:t>
+              <a:t>해결방법</a:t>
             </a:r>
             <a:endParaRPr lang="en-US" altLang="ko-KR" sz="1600" dirty="0">
               <a:latin typeface="D2Coding" panose="020B0609020101020101" pitchFamily="49" charset="-127"/>
@@ -6540,69 +6605,76 @@
               <a:buChar char="v"/>
             </a:pPr>
             <a:r>
-              <a:rPr lang="ko-KR" altLang="en-US" sz="1600" dirty="0">
+              <a:rPr lang="ko-KR" altLang="en-US" sz="1400" b="1" dirty="0">
                 <a:latin typeface="D2Coding" panose="020B0609020101020101" pitchFamily="49" charset="-127"/>
                 <a:ea typeface="D2Coding" panose="020B0609020101020101" pitchFamily="49" charset="-127"/>
               </a:rPr>
               <a:t>도구 검색기 </a:t>
             </a:r>
             <a:r>
-              <a:rPr lang="en-US" altLang="ko-KR" sz="1600" dirty="0">
-                <a:latin typeface="D2Coding" panose="020B0609020101020101" pitchFamily="49" charset="-127"/>
-                <a:ea typeface="D2Coding" panose="020B0609020101020101" pitchFamily="49" charset="-127"/>
-              </a:rPr>
-              <a:t>(Tool Retriever):</a:t>
-            </a:r>
-            <a:r>
-              <a:rPr lang="ko-KR" altLang="en-US" sz="1600" dirty="0">
+              <a:rPr lang="en-US" altLang="ko-KR" sz="1400" b="1" dirty="0">
+                <a:latin typeface="D2Coding" panose="020B0609020101020101" pitchFamily="49" charset="-127"/>
+                <a:ea typeface="D2Coding" panose="020B0609020101020101" pitchFamily="49" charset="-127"/>
+              </a:rPr>
+              <a:t>(Tool Retriever)</a:t>
+            </a:r>
+            <a:r>
+              <a:rPr lang="en-US" altLang="ko-KR" sz="1400" dirty="0">
+                <a:latin typeface="D2Coding" panose="020B0609020101020101" pitchFamily="49" charset="-127"/>
+                <a:ea typeface="D2Coding" panose="020B0609020101020101" pitchFamily="49" charset="-127"/>
+              </a:rPr>
+              <a:t>:</a:t>
+            </a:r>
+            <a:r>
+              <a:rPr lang="ko-KR" altLang="en-US" sz="1400" dirty="0">
                 <a:latin typeface="D2Coding" panose="020B0609020101020101" pitchFamily="49" charset="-127"/>
                 <a:ea typeface="D2Coding" panose="020B0609020101020101" pitchFamily="49" charset="-127"/>
               </a:rPr>
               <a:t> 사용자의 질문이 들어오면 벡터 검색</a:t>
             </a:r>
             <a:r>
-              <a:rPr lang="en-US" altLang="ko-KR" sz="1600" dirty="0">
+              <a:rPr lang="en-US" altLang="ko-KR" sz="1400" dirty="0">
                 <a:latin typeface="D2Coding" panose="020B0609020101020101" pitchFamily="49" charset="-127"/>
                 <a:ea typeface="D2Coding" panose="020B0609020101020101" pitchFamily="49" charset="-127"/>
               </a:rPr>
               <a:t>(RAG)</a:t>
             </a:r>
             <a:r>
-              <a:rPr lang="ko-KR" altLang="en-US" sz="1600" dirty="0">
+              <a:rPr lang="ko-KR" altLang="en-US" sz="1400" dirty="0">
                 <a:latin typeface="D2Coding" panose="020B0609020101020101" pitchFamily="49" charset="-127"/>
                 <a:ea typeface="D2Coding" panose="020B0609020101020101" pitchFamily="49" charset="-127"/>
               </a:rPr>
               <a:t>을 통해 수백 개의 도구 중 관련된 </a:t>
             </a:r>
             <a:r>
-              <a:rPr lang="en-US" altLang="ko-KR" sz="1600" dirty="0">
+              <a:rPr lang="en-US" altLang="ko-KR" sz="1400" dirty="0">
                 <a:latin typeface="D2Coding" panose="020B0609020101020101" pitchFamily="49" charset="-127"/>
                 <a:ea typeface="D2Coding" panose="020B0609020101020101" pitchFamily="49" charset="-127"/>
               </a:rPr>
               <a:t>Top-K</a:t>
             </a:r>
             <a:r>
-              <a:rPr lang="ko-KR" altLang="en-US" sz="1600" dirty="0">
+              <a:rPr lang="ko-KR" altLang="en-US" sz="1400" dirty="0">
                 <a:latin typeface="D2Coding" panose="020B0609020101020101" pitchFamily="49" charset="-127"/>
                 <a:ea typeface="D2Coding" panose="020B0609020101020101" pitchFamily="49" charset="-127"/>
               </a:rPr>
               <a:t>개의 도구만 동적으로 추려 </a:t>
             </a:r>
             <a:r>
-              <a:rPr lang="en-US" altLang="ko-KR" sz="1600" dirty="0">
+              <a:rPr lang="en-US" altLang="ko-KR" sz="1400" dirty="0">
                 <a:latin typeface="D2Coding" panose="020B0609020101020101" pitchFamily="49" charset="-127"/>
                 <a:ea typeface="D2Coding" panose="020B0609020101020101" pitchFamily="49" charset="-127"/>
               </a:rPr>
               <a:t>LLM</a:t>
             </a:r>
             <a:r>
-              <a:rPr lang="ko-KR" altLang="en-US" sz="1600" dirty="0">
+              <a:rPr lang="ko-KR" altLang="en-US" sz="1400" dirty="0">
                 <a:latin typeface="D2Coding" panose="020B0609020101020101" pitchFamily="49" charset="-127"/>
                 <a:ea typeface="D2Coding" panose="020B0609020101020101" pitchFamily="49" charset="-127"/>
               </a:rPr>
               <a:t>에게 전달하는 방식</a:t>
             </a:r>
-            <a:endParaRPr lang="en-US" altLang="ko-KR" sz="1600" dirty="0">
+            <a:endParaRPr lang="en-US" altLang="ko-KR" sz="1400" dirty="0">
               <a:latin typeface="D2Coding" panose="020B0609020101020101" pitchFamily="49" charset="-127"/>
               <a:ea typeface="D2Coding" panose="020B0609020101020101" pitchFamily="49" charset="-127"/>
             </a:endParaRPr>
@@ -6616,105 +6688,105 @@
               <a:buChar char="v"/>
             </a:pPr>
             <a:r>
-              <a:rPr lang="ko-KR" altLang="en-US" sz="1600" dirty="0">
+              <a:rPr lang="ko-KR" altLang="en-US" sz="1400" b="1" dirty="0">
                 <a:latin typeface="D2Coding" panose="020B0609020101020101" pitchFamily="49" charset="-127"/>
                 <a:ea typeface="D2Coding" panose="020B0609020101020101" pitchFamily="49" charset="-127"/>
               </a:rPr>
               <a:t>라우터 에이전트 </a:t>
             </a:r>
             <a:r>
-              <a:rPr lang="en-US" altLang="ko-KR" sz="1600" dirty="0">
+              <a:rPr lang="en-US" altLang="ko-KR" sz="1400" b="1" dirty="0">
                 <a:latin typeface="D2Coding" panose="020B0609020101020101" pitchFamily="49" charset="-127"/>
                 <a:ea typeface="D2Coding" panose="020B0609020101020101" pitchFamily="49" charset="-127"/>
               </a:rPr>
               <a:t>(Router Agent / Hierarchical Architecture):</a:t>
             </a:r>
             <a:r>
-              <a:rPr lang="ko-KR" altLang="en-US" sz="1600" dirty="0">
+              <a:rPr lang="ko-KR" altLang="en-US" sz="1400" dirty="0">
                 <a:latin typeface="D2Coding" panose="020B0609020101020101" pitchFamily="49" charset="-127"/>
                 <a:ea typeface="D2Coding" panose="020B0609020101020101" pitchFamily="49" charset="-127"/>
               </a:rPr>
               <a:t> 도구를 영역별</a:t>
             </a:r>
             <a:r>
-              <a:rPr lang="en-US" altLang="ko-KR" sz="1600" dirty="0">
+              <a:rPr lang="en-US" altLang="ko-KR" sz="1400" dirty="0">
                 <a:latin typeface="D2Coding" panose="020B0609020101020101" pitchFamily="49" charset="-127"/>
                 <a:ea typeface="D2Coding" panose="020B0609020101020101" pitchFamily="49" charset="-127"/>
               </a:rPr>
               <a:t>(</a:t>
             </a:r>
             <a:r>
-              <a:rPr lang="ko-KR" altLang="en-US" sz="1600" dirty="0">
+              <a:rPr lang="ko-KR" altLang="en-US" sz="1400" dirty="0">
                 <a:latin typeface="D2Coding" panose="020B0609020101020101" pitchFamily="49" charset="-127"/>
                 <a:ea typeface="D2Coding" panose="020B0609020101020101" pitchFamily="49" charset="-127"/>
               </a:rPr>
               <a:t>예</a:t>
             </a:r>
             <a:r>
-              <a:rPr lang="en-US" altLang="ko-KR" sz="1600" dirty="0">
+              <a:rPr lang="en-US" altLang="ko-KR" sz="1400" dirty="0">
                 <a:latin typeface="D2Coding" panose="020B0609020101020101" pitchFamily="49" charset="-127"/>
                 <a:ea typeface="D2Coding" panose="020B0609020101020101" pitchFamily="49" charset="-127"/>
               </a:rPr>
               <a:t>: </a:t>
             </a:r>
             <a:r>
-              <a:rPr lang="ko-KR" altLang="en-US" sz="1600" dirty="0">
+              <a:rPr lang="ko-KR" altLang="en-US" sz="1400" dirty="0">
                 <a:latin typeface="D2Coding" panose="020B0609020101020101" pitchFamily="49" charset="-127"/>
                 <a:ea typeface="D2Coding" panose="020B0609020101020101" pitchFamily="49" charset="-127"/>
               </a:rPr>
               <a:t>금융 도구</a:t>
             </a:r>
             <a:r>
-              <a:rPr lang="en-US" altLang="ko-KR" sz="1600" dirty="0">
+              <a:rPr lang="en-US" altLang="ko-KR" sz="1400" dirty="0">
                 <a:latin typeface="D2Coding" panose="020B0609020101020101" pitchFamily="49" charset="-127"/>
                 <a:ea typeface="D2Coding" panose="020B0609020101020101" pitchFamily="49" charset="-127"/>
               </a:rPr>
               <a:t>, HR </a:t>
             </a:r>
             <a:r>
-              <a:rPr lang="ko-KR" altLang="en-US" sz="1600" dirty="0">
+              <a:rPr lang="ko-KR" altLang="en-US" sz="1400" dirty="0">
                 <a:latin typeface="D2Coding" panose="020B0609020101020101" pitchFamily="49" charset="-127"/>
                 <a:ea typeface="D2Coding" panose="020B0609020101020101" pitchFamily="49" charset="-127"/>
               </a:rPr>
               <a:t>도구</a:t>
             </a:r>
             <a:r>
-              <a:rPr lang="en-US" altLang="ko-KR" sz="1600" dirty="0">
+              <a:rPr lang="en-US" altLang="ko-KR" sz="1400" dirty="0">
                 <a:latin typeface="D2Coding" panose="020B0609020101020101" pitchFamily="49" charset="-127"/>
                 <a:ea typeface="D2Coding" panose="020B0609020101020101" pitchFamily="49" charset="-127"/>
               </a:rPr>
               <a:t>, IT </a:t>
             </a:r>
             <a:r>
-              <a:rPr lang="ko-KR" altLang="en-US" sz="1600" dirty="0">
+              <a:rPr lang="ko-KR" altLang="en-US" sz="1400" dirty="0">
                 <a:latin typeface="D2Coding" panose="020B0609020101020101" pitchFamily="49" charset="-127"/>
                 <a:ea typeface="D2Coding" panose="020B0609020101020101" pitchFamily="49" charset="-127"/>
               </a:rPr>
               <a:t>지원 도구</a:t>
             </a:r>
             <a:r>
-              <a:rPr lang="en-US" altLang="ko-KR" sz="1600" dirty="0">
+              <a:rPr lang="en-US" altLang="ko-KR" sz="1400" dirty="0">
                 <a:latin typeface="D2Coding" panose="020B0609020101020101" pitchFamily="49" charset="-127"/>
                 <a:ea typeface="D2Coding" panose="020B0609020101020101" pitchFamily="49" charset="-127"/>
               </a:rPr>
               <a:t>)</a:t>
             </a:r>
             <a:r>
-              <a:rPr lang="ko-KR" altLang="en-US" sz="1600" dirty="0">
+              <a:rPr lang="ko-KR" altLang="en-US" sz="1400" dirty="0">
                 <a:latin typeface="D2Coding" panose="020B0609020101020101" pitchFamily="49" charset="-127"/>
                 <a:ea typeface="D2Coding" panose="020B0609020101020101" pitchFamily="49" charset="-127"/>
               </a:rPr>
               <a:t>로 그룹화하고</a:t>
             </a:r>
             <a:r>
-              <a:rPr lang="en-US" altLang="ko-KR" sz="1600" dirty="0">
+              <a:rPr lang="en-US" altLang="ko-KR" sz="1400" dirty="0">
                 <a:latin typeface="D2Coding" panose="020B0609020101020101" pitchFamily="49" charset="-127"/>
                 <a:ea typeface="D2Coding" panose="020B0609020101020101" pitchFamily="49" charset="-127"/>
               </a:rPr>
               <a:t>, </a:t>
             </a:r>
             <a:r>
-              <a:rPr lang="ko-KR" altLang="en-US" sz="1600" dirty="0">
+              <a:rPr lang="ko-KR" altLang="en-US" sz="1400" dirty="0">
                 <a:latin typeface="D2Coding" panose="020B0609020101020101" pitchFamily="49" charset="-127"/>
                 <a:ea typeface="D2Coding" panose="020B0609020101020101" pitchFamily="49" charset="-127"/>
               </a:rPr>
@@ -6749,12 +6821,17 @@
         </p:blipFill>
         <p:spPr>
           <a:xfrm>
-            <a:off x="7905906" y="2325798"/>
-            <a:ext cx="3638999" cy="3153799"/>
+            <a:off x="7543461" y="1543697"/>
+            <a:ext cx="4201469" cy="3641273"/>
           </a:xfrm>
           <a:prstGeom prst="rect">
             <a:avLst/>
           </a:prstGeom>
+          <a:ln>
+            <a:solidFill>
+              <a:schemeClr val="tx1"/>
+            </a:solidFill>
+          </a:ln>
         </p:spPr>
       </p:pic>
       <p:sp>
@@ -6771,8 +6848,8 @@
         </p:nvSpPr>
         <p:spPr>
           <a:xfrm>
-            <a:off x="7938735" y="5687008"/>
-            <a:ext cx="3305175" cy="461665"/>
+            <a:off x="7524232" y="5314303"/>
+            <a:ext cx="4220698" cy="461665"/>
           </a:xfrm>
           <a:prstGeom prst="rect">
             <a:avLst/>
@@ -9830,8 +9907,8 @@
         </p:nvSpPr>
         <p:spPr>
           <a:xfrm>
-            <a:off x="580102" y="1224062"/>
-            <a:ext cx="10964803" cy="1162498"/>
+            <a:off x="656302" y="1557437"/>
+            <a:ext cx="10964803" cy="705642"/>
           </a:xfrm>
           <a:prstGeom prst="rect">
             <a:avLst/>
@@ -9857,112 +9934,112 @@
               <a:buChar char="v"/>
             </a:pPr>
             <a:r>
-              <a:rPr lang="en-US" altLang="ko-KR" sz="1600" dirty="0">
+              <a:rPr lang="en-US" altLang="ko-KR" sz="1400" dirty="0">
                 <a:latin typeface="D2Coding" panose="020B0609020101020101" pitchFamily="49" charset="-127"/>
                 <a:ea typeface="D2Coding" panose="020B0609020101020101" pitchFamily="49" charset="-127"/>
               </a:rPr>
               <a:t>Agentic LLM Application</a:t>
             </a:r>
             <a:r>
-              <a:rPr lang="ko-KR" altLang="en-US" sz="1600" dirty="0">
+              <a:rPr lang="ko-KR" altLang="en-US" sz="1400" dirty="0">
                 <a:latin typeface="D2Coding" panose="020B0609020101020101" pitchFamily="49" charset="-127"/>
                 <a:ea typeface="D2Coding" panose="020B0609020101020101" pitchFamily="49" charset="-127"/>
               </a:rPr>
               <a:t>이란 특정한 </a:t>
             </a:r>
             <a:r>
-              <a:rPr lang="ko-KR" altLang="en-US" sz="1600" b="1" dirty="0">
+              <a:rPr lang="ko-KR" altLang="en-US" sz="1400" b="1" dirty="0">
                 <a:latin typeface="D2Coding" panose="020B0609020101020101" pitchFamily="49" charset="-127"/>
                 <a:ea typeface="D2Coding" panose="020B0609020101020101" pitchFamily="49" charset="-127"/>
               </a:rPr>
               <a:t>목적</a:t>
             </a:r>
             <a:r>
-              <a:rPr lang="ko-KR" altLang="en-US" sz="1600" dirty="0">
+              <a:rPr lang="ko-KR" altLang="en-US" sz="1400" dirty="0">
                 <a:latin typeface="D2Coding" panose="020B0609020101020101" pitchFamily="49" charset="-127"/>
                 <a:ea typeface="D2Coding" panose="020B0609020101020101" pitchFamily="49" charset="-127"/>
               </a:rPr>
               <a:t>을 달성하기 위해 현재 상태나 도달하고자 하는 다음 상태에 대한 </a:t>
             </a:r>
             <a:r>
-              <a:rPr lang="ko-KR" altLang="en-US" sz="1600" b="1" dirty="0">
+              <a:rPr lang="ko-KR" altLang="en-US" sz="1400" b="1" dirty="0">
                 <a:latin typeface="D2Coding" panose="020B0609020101020101" pitchFamily="49" charset="-127"/>
                 <a:ea typeface="D2Coding" panose="020B0609020101020101" pitchFamily="49" charset="-127"/>
               </a:rPr>
               <a:t>맥락</a:t>
             </a:r>
             <a:r>
-              <a:rPr lang="en-US" altLang="ko-KR" sz="1600" b="1" dirty="0">
+              <a:rPr lang="en-US" altLang="ko-KR" sz="1400" b="1" dirty="0">
                 <a:latin typeface="D2Coding" panose="020B0609020101020101" pitchFamily="49" charset="-127"/>
                 <a:ea typeface="D2Coding" panose="020B0609020101020101" pitchFamily="49" charset="-127"/>
               </a:rPr>
               <a:t>(Context)</a:t>
             </a:r>
             <a:r>
-              <a:rPr lang="ko-KR" altLang="en-US" sz="1600" dirty="0">
+              <a:rPr lang="ko-KR" altLang="en-US" sz="1400" dirty="0">
                 <a:latin typeface="D2Coding" panose="020B0609020101020101" pitchFamily="49" charset="-127"/>
                 <a:ea typeface="D2Coding" panose="020B0609020101020101" pitchFamily="49" charset="-127"/>
               </a:rPr>
               <a:t>이 주어졌을 때</a:t>
             </a:r>
             <a:r>
-              <a:rPr lang="en-US" altLang="ko-KR" sz="1600" dirty="0">
+              <a:rPr lang="en-US" altLang="ko-KR" sz="1400" dirty="0">
                 <a:latin typeface="D2Coding" panose="020B0609020101020101" pitchFamily="49" charset="-127"/>
                 <a:ea typeface="D2Coding" panose="020B0609020101020101" pitchFamily="49" charset="-127"/>
               </a:rPr>
               <a:t>, LLM</a:t>
             </a:r>
             <a:r>
-              <a:rPr lang="ko-KR" altLang="en-US" sz="1600" dirty="0">
+              <a:rPr lang="ko-KR" altLang="en-US" sz="1400" dirty="0">
                 <a:latin typeface="D2Coding" panose="020B0609020101020101" pitchFamily="49" charset="-127"/>
                 <a:ea typeface="D2Coding" panose="020B0609020101020101" pitchFamily="49" charset="-127"/>
               </a:rPr>
               <a:t>을 사용해 가능한 복수의 행동을 </a:t>
             </a:r>
             <a:r>
-              <a:rPr lang="ko-KR" altLang="en-US" sz="1600" b="1" dirty="0">
+              <a:rPr lang="ko-KR" altLang="en-US" sz="1400" b="1" dirty="0">
                 <a:latin typeface="D2Coding" panose="020B0609020101020101" pitchFamily="49" charset="-127"/>
                 <a:ea typeface="D2Coding" panose="020B0609020101020101" pitchFamily="49" charset="-127"/>
               </a:rPr>
               <a:t>선택</a:t>
             </a:r>
             <a:r>
-              <a:rPr lang="ko-KR" altLang="en-US" sz="1600" dirty="0">
+              <a:rPr lang="ko-KR" altLang="en-US" sz="1400" dirty="0">
                 <a:latin typeface="D2Coding" panose="020B0609020101020101" pitchFamily="49" charset="-127"/>
                 <a:ea typeface="D2Coding" panose="020B0609020101020101" pitchFamily="49" charset="-127"/>
               </a:rPr>
               <a:t>하는 애플리케이션으로 아래 </a:t>
             </a:r>
             <a:r>
-              <a:rPr lang="en-US" altLang="ko-KR" sz="1600" dirty="0">
+              <a:rPr lang="en-US" altLang="ko-KR" sz="1400" dirty="0">
                 <a:latin typeface="D2Coding" panose="020B0609020101020101" pitchFamily="49" charset="-127"/>
                 <a:ea typeface="D2Coding" panose="020B0609020101020101" pitchFamily="49" charset="-127"/>
               </a:rPr>
               <a:t>2</a:t>
             </a:r>
             <a:r>
-              <a:rPr lang="ko-KR" altLang="en-US" sz="1600" dirty="0">
+              <a:rPr lang="ko-KR" altLang="en-US" sz="1400" dirty="0">
                 <a:latin typeface="D2Coding" panose="020B0609020101020101" pitchFamily="49" charset="-127"/>
                 <a:ea typeface="D2Coding" panose="020B0609020101020101" pitchFamily="49" charset="-127"/>
               </a:rPr>
               <a:t>가지 핵심 </a:t>
             </a:r>
             <a:r>
-              <a:rPr lang="en-US" altLang="ko-KR" sz="1600" b="1" dirty="0">
+              <a:rPr lang="en-US" altLang="ko-KR" sz="1400" b="1" dirty="0">
                 <a:latin typeface="D2Coding" panose="020B0609020101020101" pitchFamily="49" charset="-127"/>
                 <a:ea typeface="D2Coding" panose="020B0609020101020101" pitchFamily="49" charset="-127"/>
               </a:rPr>
               <a:t>prompt</a:t>
             </a:r>
             <a:r>
-              <a:rPr lang="ko-KR" altLang="en-US" sz="1600" b="1" dirty="0">
+              <a:rPr lang="ko-KR" altLang="en-US" sz="1400" b="1" dirty="0">
                 <a:latin typeface="D2Coding" panose="020B0609020101020101" pitchFamily="49" charset="-127"/>
                 <a:ea typeface="D2Coding" panose="020B0609020101020101" pitchFamily="49" charset="-127"/>
               </a:rPr>
               <a:t> 기법</a:t>
             </a:r>
             <a:r>
-              <a:rPr lang="ko-KR" altLang="en-US" sz="1600" dirty="0">
+              <a:rPr lang="ko-KR" altLang="en-US" sz="1400" dirty="0">
                 <a:latin typeface="D2Coding" panose="020B0609020101020101" pitchFamily="49" charset="-127"/>
                 <a:ea typeface="D2Coding" panose="020B0609020101020101" pitchFamily="49" charset="-127"/>
               </a:rPr>
@@ -9986,7 +10063,7 @@
         <p:spPr>
           <a:xfrm>
             <a:off x="1828799" y="3057525"/>
-            <a:ext cx="9548957" cy="1536639"/>
+            <a:ext cx="9548957" cy="1287404"/>
           </a:xfrm>
           <a:prstGeom prst="rect">
             <a:avLst/>
@@ -10011,27 +10088,27 @@
               </a:lnSpc>
             </a:pPr>
             <a:r>
-              <a:rPr lang="ko-KR" altLang="en-US" sz="1600" b="1" dirty="0">
+              <a:rPr lang="ko-KR" altLang="en-US" sz="1400" b="1" dirty="0">
                 <a:latin typeface="D2Coding" panose="020B0609020101020101" pitchFamily="49" charset="-127"/>
                 <a:ea typeface="D2Coding" panose="020B0609020101020101" pitchFamily="49" charset="-127"/>
               </a:rPr>
               <a:t>도구 호출 </a:t>
             </a:r>
             <a:r>
-              <a:rPr lang="en-US" altLang="ko-KR" sz="1600" b="1" dirty="0">
+              <a:rPr lang="en-US" altLang="ko-KR" sz="1400" b="1" dirty="0">
                 <a:latin typeface="D2Coding" panose="020B0609020101020101" pitchFamily="49" charset="-127"/>
                 <a:ea typeface="D2Coding" panose="020B0609020101020101" pitchFamily="49" charset="-127"/>
               </a:rPr>
               <a:t>(Tool calling)</a:t>
             </a:r>
             <a:r>
-              <a:rPr lang="ko-KR" altLang="en-US" sz="1600" dirty="0">
+              <a:rPr lang="ko-KR" altLang="en-US" sz="1400" dirty="0">
                 <a:latin typeface="D2Coding" panose="020B0609020101020101" pitchFamily="49" charset="-127"/>
                 <a:ea typeface="D2Coding" panose="020B0609020101020101" pitchFamily="49" charset="-127"/>
               </a:rPr>
               <a:t> </a:t>
             </a:r>
-            <a:endParaRPr lang="en-US" altLang="ko-KR" sz="1600" dirty="0">
+            <a:endParaRPr lang="en-US" altLang="ko-KR" sz="1400" dirty="0">
               <a:latin typeface="D2Coding" panose="020B0609020101020101" pitchFamily="49" charset="-127"/>
               <a:ea typeface="D2Coding" panose="020B0609020101020101" pitchFamily="49" charset="-127"/>
             </a:endParaRPr>
@@ -10042,7 +10119,7 @@
                 <a:spcPct val="150000"/>
               </a:lnSpc>
             </a:pPr>
-            <a:endParaRPr lang="en-US" altLang="ko-KR" sz="400" dirty="0">
+            <a:endParaRPr lang="en-US" altLang="ko-KR" sz="300" dirty="0">
               <a:latin typeface="D2Coding" panose="020B0609020101020101" pitchFamily="49" charset="-127"/>
               <a:ea typeface="D2Coding" panose="020B0609020101020101" pitchFamily="49" charset="-127"/>
             </a:endParaRPr>
@@ -10054,132 +10131,132 @@
               </a:lnSpc>
             </a:pPr>
             <a:r>
-              <a:rPr lang="ko-KR" altLang="en-US" sz="1400" dirty="0">
+              <a:rPr lang="ko-KR" altLang="en-US" sz="1200" dirty="0">
                 <a:latin typeface="D2Coding" panose="020B0609020101020101" pitchFamily="49" charset="-127"/>
                 <a:ea typeface="D2Coding" panose="020B0609020101020101" pitchFamily="49" charset="-127"/>
               </a:rPr>
               <a:t>프롬프트에 </a:t>
             </a:r>
             <a:r>
-              <a:rPr lang="en-US" altLang="ko-KR" sz="1400" dirty="0">
+              <a:rPr lang="en-US" altLang="ko-KR" sz="1200" dirty="0">
                 <a:latin typeface="D2Coding" panose="020B0609020101020101" pitchFamily="49" charset="-127"/>
                 <a:ea typeface="D2Coding" panose="020B0609020101020101" pitchFamily="49" charset="-127"/>
               </a:rPr>
               <a:t>LLM</a:t>
             </a:r>
             <a:r>
-              <a:rPr lang="ko-KR" altLang="en-US" sz="1400" dirty="0">
+              <a:rPr lang="ko-KR" altLang="en-US" sz="1200" dirty="0">
                 <a:latin typeface="D2Coding" panose="020B0609020101020101" pitchFamily="49" charset="-127"/>
                 <a:ea typeface="D2Coding" panose="020B0609020101020101" pitchFamily="49" charset="-127"/>
               </a:rPr>
               <a:t>이 활용할 수 있는 외부 함수 목록</a:t>
             </a:r>
             <a:r>
-              <a:rPr lang="en-US" altLang="ko-KR" sz="1400" dirty="0">
+              <a:rPr lang="en-US" altLang="ko-KR" sz="1200" dirty="0">
                 <a:latin typeface="D2Coding" panose="020B0609020101020101" pitchFamily="49" charset="-127"/>
                 <a:ea typeface="D2Coding" panose="020B0609020101020101" pitchFamily="49" charset="-127"/>
               </a:rPr>
               <a:t>(</a:t>
             </a:r>
             <a:r>
-              <a:rPr lang="ko-KR" altLang="en-US" sz="1400" dirty="0">
+              <a:rPr lang="ko-KR" altLang="en-US" sz="1200" dirty="0">
                 <a:latin typeface="D2Coding" panose="020B0609020101020101" pitchFamily="49" charset="-127"/>
                 <a:ea typeface="D2Coding" panose="020B0609020101020101" pitchFamily="49" charset="-127"/>
               </a:rPr>
               <a:t>즉</a:t>
             </a:r>
             <a:r>
-              <a:rPr lang="en-US" altLang="ko-KR" sz="1400" dirty="0">
+              <a:rPr lang="en-US" altLang="ko-KR" sz="1200" dirty="0">
                 <a:latin typeface="D2Coding" panose="020B0609020101020101" pitchFamily="49" charset="-127"/>
                 <a:ea typeface="D2Coding" panose="020B0609020101020101" pitchFamily="49" charset="-127"/>
               </a:rPr>
               <a:t>, LLM</a:t>
             </a:r>
             <a:r>
-              <a:rPr lang="ko-KR" altLang="en-US" sz="1400" dirty="0">
+              <a:rPr lang="ko-KR" altLang="en-US" sz="1200" dirty="0">
                 <a:latin typeface="D2Coding" panose="020B0609020101020101" pitchFamily="49" charset="-127"/>
                 <a:ea typeface="D2Coding" panose="020B0609020101020101" pitchFamily="49" charset="-127"/>
               </a:rPr>
               <a:t>이 취하기로 결정할 수 있는 행동들</a:t>
             </a:r>
             <a:r>
-              <a:rPr lang="en-US" altLang="ko-KR" sz="1400" dirty="0">
+              <a:rPr lang="en-US" altLang="ko-KR" sz="1200" dirty="0">
                 <a:latin typeface="D2Coding" panose="020B0609020101020101" pitchFamily="49" charset="-127"/>
                 <a:ea typeface="D2Coding" panose="020B0609020101020101" pitchFamily="49" charset="-127"/>
               </a:rPr>
               <a:t>)</a:t>
             </a:r>
             <a:r>
-              <a:rPr lang="ko-KR" altLang="en-US" sz="1400" dirty="0">
+              <a:rPr lang="ko-KR" altLang="en-US" sz="1200" dirty="0">
                 <a:latin typeface="D2Coding" panose="020B0609020101020101" pitchFamily="49" charset="-127"/>
                 <a:ea typeface="D2Coding" panose="020B0609020101020101" pitchFamily="49" charset="-127"/>
               </a:rPr>
               <a:t>을 포함하고</a:t>
             </a:r>
             <a:r>
-              <a:rPr lang="en-US" altLang="ko-KR" sz="1400" dirty="0">
+              <a:rPr lang="en-US" altLang="ko-KR" sz="1200" dirty="0">
                 <a:latin typeface="D2Coding" panose="020B0609020101020101" pitchFamily="49" charset="-127"/>
                 <a:ea typeface="D2Coding" panose="020B0609020101020101" pitchFamily="49" charset="-127"/>
               </a:rPr>
               <a:t>, </a:t>
             </a:r>
             <a:r>
-              <a:rPr lang="ko-KR" altLang="en-US" sz="1400" dirty="0">
+              <a:rPr lang="ko-KR" altLang="en-US" sz="1200" dirty="0">
                 <a:latin typeface="D2Coding" panose="020B0609020101020101" pitchFamily="49" charset="-127"/>
                 <a:ea typeface="D2Coding" panose="020B0609020101020101" pitchFamily="49" charset="-127"/>
               </a:rPr>
               <a:t>생성하는 출력에서 그 선택을 어떤 형식으로 작성할 지 지침을 제공하는 기법</a:t>
             </a:r>
             <a:r>
-              <a:rPr lang="en-US" altLang="ko-KR" sz="1400" dirty="0">
+              <a:rPr lang="en-US" altLang="ko-KR" sz="1200" dirty="0">
                 <a:latin typeface="D2Coding" panose="020B0609020101020101" pitchFamily="49" charset="-127"/>
                 <a:ea typeface="D2Coding" panose="020B0609020101020101" pitchFamily="49" charset="-127"/>
               </a:rPr>
               <a:t>(LM </a:t>
             </a:r>
             <a:r>
-              <a:rPr lang="ko-KR" altLang="en-US" sz="1400" dirty="0">
+              <a:rPr lang="ko-KR" altLang="en-US" sz="1200" dirty="0">
                 <a:latin typeface="D2Coding" panose="020B0609020101020101" pitchFamily="49" charset="-127"/>
                 <a:ea typeface="D2Coding" panose="020B0609020101020101" pitchFamily="49" charset="-127"/>
               </a:rPr>
               <a:t>자체는 텍스트만 생성할 수 있지</a:t>
             </a:r>
             <a:r>
-              <a:rPr lang="en-US" altLang="ko-KR" sz="1400" dirty="0">
+              <a:rPr lang="en-US" altLang="ko-KR" sz="1200" dirty="0">
                 <a:latin typeface="D2Coding" panose="020B0609020101020101" pitchFamily="49" charset="-127"/>
                 <a:ea typeface="D2Coding" panose="020B0609020101020101" pitchFamily="49" charset="-127"/>
               </a:rPr>
               <a:t>, </a:t>
             </a:r>
             <a:r>
-              <a:rPr lang="ko-KR" altLang="en-US" sz="1400" dirty="0">
+              <a:rPr lang="ko-KR" altLang="en-US" sz="1200" dirty="0">
                 <a:latin typeface="D2Coding" panose="020B0609020101020101" pitchFamily="49" charset="-127"/>
                 <a:ea typeface="D2Coding" panose="020B0609020101020101" pitchFamily="49" charset="-127"/>
               </a:rPr>
               <a:t>직접 코드를 실행하거나 외부 시스템을 작동시킬 수 없으나</a:t>
             </a:r>
             <a:r>
-              <a:rPr lang="en-US" altLang="ko-KR" sz="1400" dirty="0">
+              <a:rPr lang="en-US" altLang="ko-KR" sz="1200" dirty="0">
                 <a:latin typeface="D2Coding" panose="020B0609020101020101" pitchFamily="49" charset="-127"/>
                 <a:ea typeface="D2Coding" panose="020B0609020101020101" pitchFamily="49" charset="-127"/>
               </a:rPr>
               <a:t>  </a:t>
             </a:r>
             <a:r>
-              <a:rPr lang="ko-KR" altLang="en-US" sz="1400" dirty="0">
+              <a:rPr lang="ko-KR" altLang="en-US" sz="1200" dirty="0">
                 <a:latin typeface="D2Coding" panose="020B0609020101020101" pitchFamily="49" charset="-127"/>
                 <a:ea typeface="D2Coding" panose="020B0609020101020101" pitchFamily="49" charset="-127"/>
               </a:rPr>
               <a:t>도구 호출로 현실 세계와 상호작용</a:t>
             </a:r>
             <a:r>
-              <a:rPr lang="en-US" altLang="ko-KR" sz="1400" dirty="0">
+              <a:rPr lang="en-US" altLang="ko-KR" sz="1200" dirty="0">
                 <a:latin typeface="D2Coding" panose="020B0609020101020101" pitchFamily="49" charset="-127"/>
                 <a:ea typeface="D2Coding" panose="020B0609020101020101" pitchFamily="49" charset="-127"/>
               </a:rPr>
               <a:t>)</a:t>
             </a:r>
-            <a:endParaRPr lang="ko-KR" altLang="en-US" sz="1400" dirty="0">
+            <a:endParaRPr lang="ko-KR" altLang="en-US" sz="1200" dirty="0">
               <a:latin typeface="D2Coding" panose="020B0609020101020101" pitchFamily="49" charset="-127"/>
               <a:ea typeface="D2Coding" panose="020B0609020101020101" pitchFamily="49" charset="-127"/>
             </a:endParaRPr>
@@ -10201,7 +10278,7 @@
         <p:spPr>
           <a:xfrm>
             <a:off x="1828799" y="5015258"/>
-            <a:ext cx="9548956" cy="1467389"/>
+            <a:ext cx="9548956" cy="1264320"/>
           </a:xfrm>
           <a:prstGeom prst="rect">
             <a:avLst/>
@@ -10227,14 +10304,14 @@
               <a:buNone/>
             </a:pPr>
             <a:r>
-              <a:rPr lang="ko-KR" altLang="en-US" sz="1600" b="1" dirty="0">
+              <a:rPr lang="ko-KR" altLang="en-US" sz="1400" b="1" dirty="0">
                 <a:latin typeface="D2Coding" panose="020B0609020101020101" pitchFamily="49" charset="-127"/>
                 <a:ea typeface="D2Coding" panose="020B0609020101020101" pitchFamily="49" charset="-127"/>
               </a:rPr>
               <a:t>생각의 사슬 </a:t>
             </a:r>
             <a:r>
-              <a:rPr lang="en-US" altLang="ko-KR" sz="1600" b="1" dirty="0">
+              <a:rPr lang="en-US" altLang="ko-KR" sz="1400" b="1" dirty="0">
                 <a:latin typeface="D2Coding" panose="020B0609020101020101" pitchFamily="49" charset="-127"/>
                 <a:ea typeface="D2Coding" panose="020B0609020101020101" pitchFamily="49" charset="-127"/>
               </a:rPr>
@@ -10248,7 +10325,7 @@
               </a:lnSpc>
               <a:buNone/>
             </a:pPr>
-            <a:endParaRPr lang="en-US" altLang="ko-KR" sz="300" b="1" dirty="0">
+            <a:endParaRPr lang="en-US" altLang="ko-KR" sz="200" b="1" dirty="0">
               <a:latin typeface="D2Coding" panose="020B0609020101020101" pitchFamily="49" charset="-127"/>
               <a:ea typeface="D2Coding" panose="020B0609020101020101" pitchFamily="49" charset="-127"/>
             </a:endParaRPr>
@@ -10261,104 +10338,104 @@
               <a:buNone/>
             </a:pPr>
             <a:r>
-              <a:rPr lang="en-US" altLang="ko-KR" sz="1400" dirty="0">
+              <a:rPr lang="en-US" altLang="ko-KR" sz="1200" dirty="0">
                 <a:latin typeface="D2Coding" panose="020B0609020101020101" pitchFamily="49" charset="-127"/>
                 <a:ea typeface="D2Coding" panose="020B0609020101020101" pitchFamily="49" charset="-127"/>
               </a:rPr>
               <a:t>LLM</a:t>
             </a:r>
             <a:r>
-              <a:rPr lang="ko-KR" altLang="en-US" sz="1400" dirty="0">
+              <a:rPr lang="ko-KR" altLang="en-US" sz="1200" dirty="0">
                 <a:latin typeface="D2Coding" panose="020B0609020101020101" pitchFamily="49" charset="-127"/>
                 <a:ea typeface="D2Coding" panose="020B0609020101020101" pitchFamily="49" charset="-127"/>
               </a:rPr>
               <a:t>에게 복잡한 문제를 순차적으로 수행할 세부 단계로 나누어 추론하도록 지시할 때 </a:t>
             </a:r>
             <a:r>
-              <a:rPr lang="en-US" altLang="ko-KR" sz="1400" dirty="0">
+              <a:rPr lang="en-US" altLang="ko-KR" sz="1200" dirty="0">
                 <a:latin typeface="D2Coding" panose="020B0609020101020101" pitchFamily="49" charset="-127"/>
                 <a:ea typeface="D2Coding" panose="020B0609020101020101" pitchFamily="49" charset="-127"/>
               </a:rPr>
               <a:t>"</a:t>
             </a:r>
             <a:r>
-              <a:rPr lang="ko-KR" altLang="en-US" sz="1400" dirty="0">
+              <a:rPr lang="ko-KR" altLang="en-US" sz="1200" dirty="0">
                 <a:latin typeface="D2Coding" panose="020B0609020101020101" pitchFamily="49" charset="-127"/>
                 <a:ea typeface="D2Coding" panose="020B0609020101020101" pitchFamily="49" charset="-127"/>
               </a:rPr>
               <a:t>더 나은 결정</a:t>
             </a:r>
             <a:r>
-              <a:rPr lang="en-US" altLang="ko-KR" sz="1400" dirty="0">
+              <a:rPr lang="en-US" altLang="ko-KR" sz="1200" dirty="0">
                 <a:latin typeface="D2Coding" panose="020B0609020101020101" pitchFamily="49" charset="-127"/>
                 <a:ea typeface="D2Coding" panose="020B0609020101020101" pitchFamily="49" charset="-127"/>
               </a:rPr>
               <a:t>"</a:t>
             </a:r>
             <a:r>
-              <a:rPr lang="ko-KR" altLang="en-US" sz="1400" dirty="0">
+              <a:rPr lang="ko-KR" altLang="en-US" sz="1200" dirty="0">
                 <a:latin typeface="D2Coding" panose="020B0609020101020101" pitchFamily="49" charset="-127"/>
                 <a:ea typeface="D2Coding" panose="020B0609020101020101" pitchFamily="49" charset="-127"/>
               </a:rPr>
               <a:t>을 내린다는 사실을 발견하였고 이는 보통 </a:t>
             </a:r>
             <a:r>
-              <a:rPr lang="en-US" altLang="ko-KR" sz="1400" dirty="0">
+              <a:rPr lang="en-US" altLang="ko-KR" sz="1200" dirty="0">
                 <a:latin typeface="D2Coding" panose="020B0609020101020101" pitchFamily="49" charset="-127"/>
                 <a:ea typeface="D2Coding" panose="020B0609020101020101" pitchFamily="49" charset="-127"/>
               </a:rPr>
               <a:t>"</a:t>
             </a:r>
             <a:r>
-              <a:rPr lang="ko-KR" altLang="en-US" sz="1400" dirty="0">
+              <a:rPr lang="ko-KR" altLang="en-US" sz="1200" dirty="0">
                 <a:latin typeface="D2Coding" panose="020B0609020101020101" pitchFamily="49" charset="-127"/>
                 <a:ea typeface="D2Coding" panose="020B0609020101020101" pitchFamily="49" charset="-127"/>
               </a:rPr>
               <a:t>단계별로 생각하라</a:t>
             </a:r>
             <a:r>
-              <a:rPr lang="en-US" altLang="ko-KR" sz="1400" dirty="0">
+              <a:rPr lang="en-US" altLang="ko-KR" sz="1200" dirty="0">
                 <a:latin typeface="D2Coding" panose="020B0609020101020101" pitchFamily="49" charset="-127"/>
                 <a:ea typeface="D2Coding" panose="020B0609020101020101" pitchFamily="49" charset="-127"/>
               </a:rPr>
               <a:t>(think step by step)"</a:t>
             </a:r>
             <a:r>
-              <a:rPr lang="ko-KR" altLang="en-US" sz="1400" dirty="0">
+              <a:rPr lang="ko-KR" altLang="en-US" sz="1200" dirty="0">
                 <a:latin typeface="D2Coding" panose="020B0609020101020101" pitchFamily="49" charset="-127"/>
                 <a:ea typeface="D2Coding" panose="020B0609020101020101" pitchFamily="49" charset="-127"/>
               </a:rPr>
               <a:t>와 같은 지침을 추가하거나</a:t>
             </a:r>
             <a:r>
-              <a:rPr lang="en-US" altLang="ko-KR" sz="1400" dirty="0">
+              <a:rPr lang="en-US" altLang="ko-KR" sz="1200" dirty="0">
                 <a:latin typeface="D2Coding" panose="020B0609020101020101" pitchFamily="49" charset="-127"/>
                 <a:ea typeface="D2Coding" panose="020B0609020101020101" pitchFamily="49" charset="-127"/>
               </a:rPr>
               <a:t>, </a:t>
             </a:r>
             <a:r>
-              <a:rPr lang="ko-KR" altLang="en-US" sz="1400" dirty="0">
+              <a:rPr lang="ko-KR" altLang="en-US" sz="1200" dirty="0">
                 <a:latin typeface="D2Coding" panose="020B0609020101020101" pitchFamily="49" charset="-127"/>
                 <a:ea typeface="D2Coding" panose="020B0609020101020101" pitchFamily="49" charset="-127"/>
               </a:rPr>
               <a:t>질문과 이를 여러 단계</a:t>
             </a:r>
             <a:r>
-              <a:rPr lang="en-US" altLang="ko-KR" sz="1400" dirty="0">
+              <a:rPr lang="en-US" altLang="ko-KR" sz="1200" dirty="0">
                 <a:latin typeface="D2Coding" panose="020B0609020101020101" pitchFamily="49" charset="-127"/>
                 <a:ea typeface="D2Coding" panose="020B0609020101020101" pitchFamily="49" charset="-127"/>
               </a:rPr>
               <a:t>/</a:t>
             </a:r>
             <a:r>
-              <a:rPr lang="ko-KR" altLang="en-US" sz="1400" dirty="0">
+              <a:rPr lang="ko-KR" altLang="en-US" sz="1200" dirty="0">
                 <a:latin typeface="D2Coding" panose="020B0609020101020101" pitchFamily="49" charset="-127"/>
                 <a:ea typeface="D2Coding" panose="020B0609020101020101" pitchFamily="49" charset="-127"/>
               </a:rPr>
               <a:t>행동으로 분해한 예시를 포함하는 방식</a:t>
             </a:r>
-            <a:endParaRPr lang="en-US" altLang="ko-KR" sz="1400" dirty="0">
+            <a:endParaRPr lang="en-US" altLang="ko-KR" sz="1200" dirty="0">
               <a:latin typeface="D2Coding" panose="020B0609020101020101" pitchFamily="49" charset="-127"/>
               <a:ea typeface="D2Coding" panose="020B0609020101020101" pitchFamily="49" charset="-127"/>
             </a:endParaRPr>
@@ -10423,7 +10500,7 @@
         </p:nvSpPr>
         <p:spPr>
           <a:xfrm>
-            <a:off x="5025578" y="2433935"/>
+            <a:off x="5082728" y="2291060"/>
             <a:ext cx="6519327" cy="461665"/>
           </a:xfrm>
           <a:prstGeom prst="rect">
@@ -10511,12 +10588,12 @@
         </p:nvCxnSpPr>
         <p:spPr>
           <a:xfrm rot="10800000" flipH="1" flipV="1">
-            <a:off x="580102" y="1805310"/>
-            <a:ext cx="839122" cy="2915519"/>
+            <a:off x="656302" y="1910258"/>
+            <a:ext cx="762922" cy="2810572"/>
           </a:xfrm>
           <a:prstGeom prst="bentConnector3">
             <a:avLst>
-              <a:gd name="adj1" fmla="val -27243"/>
+              <a:gd name="adj1" fmla="val -29964"/>
             </a:avLst>
           </a:prstGeom>
           <a:ln>
@@ -10744,7 +10821,7 @@
         <p:spPr>
           <a:xfrm>
             <a:off x="1679504" y="2280486"/>
-            <a:ext cx="9497548" cy="4278094"/>
+            <a:ext cx="9497548" cy="3754874"/>
           </a:xfrm>
           <a:prstGeom prst="rect">
             <a:avLst/>
@@ -10760,42 +10837,42 @@
           <a:lstStyle/>
           <a:p>
             <a:r>
-              <a:rPr lang="ko-KR" altLang="en-US" sz="1600" dirty="0" err="1">
+              <a:rPr lang="ko-KR" altLang="en-US" sz="1400" dirty="0" err="1">
                 <a:latin typeface="D2Coding" panose="020B0609020101020101" pitchFamily="49" charset="-127"/>
                 <a:ea typeface="D2Coding" panose="020B0609020101020101" pitchFamily="49" charset="-127"/>
               </a:rPr>
               <a:t>def</a:t>
             </a:r>
             <a:r>
-              <a:rPr lang="ko-KR" altLang="en-US" sz="1600" dirty="0">
+              <a:rPr lang="ko-KR" altLang="en-US" sz="1400" dirty="0">
                 <a:latin typeface="D2Coding" panose="020B0609020101020101" pitchFamily="49" charset="-127"/>
                 <a:ea typeface="D2Coding" panose="020B0609020101020101" pitchFamily="49" charset="-127"/>
               </a:rPr>
               <a:t> </a:t>
             </a:r>
             <a:r>
-              <a:rPr lang="ko-KR" altLang="en-US" sz="1600" dirty="0" err="1">
+              <a:rPr lang="ko-KR" altLang="en-US" sz="1400" dirty="0" err="1">
                 <a:latin typeface="D2Coding" panose="020B0609020101020101" pitchFamily="49" charset="-127"/>
                 <a:ea typeface="D2Coding" panose="020B0609020101020101" pitchFamily="49" charset="-127"/>
               </a:rPr>
               <a:t>run_static_cot_pipeline</a:t>
             </a:r>
             <a:r>
-              <a:rPr lang="ko-KR" altLang="en-US" sz="1600" dirty="0">
+              <a:rPr lang="ko-KR" altLang="en-US" sz="1400" dirty="0">
                 <a:latin typeface="D2Coding" panose="020B0609020101020101" pitchFamily="49" charset="-127"/>
                 <a:ea typeface="D2Coding" panose="020B0609020101020101" pitchFamily="49" charset="-127"/>
               </a:rPr>
               <a:t>(</a:t>
             </a:r>
             <a:r>
-              <a:rPr lang="ko-KR" altLang="en-US" sz="1600" dirty="0" err="1">
+              <a:rPr lang="ko-KR" altLang="en-US" sz="1400" dirty="0" err="1">
                 <a:latin typeface="D2Coding" panose="020B0609020101020101" pitchFamily="49" charset="-127"/>
                 <a:ea typeface="D2Coding" panose="020B0609020101020101" pitchFamily="49" charset="-127"/>
               </a:rPr>
               <a:t>user_query</a:t>
             </a:r>
             <a:r>
-              <a:rPr lang="ko-KR" altLang="en-US" sz="1600" dirty="0">
+              <a:rPr lang="ko-KR" altLang="en-US" sz="1400" dirty="0">
                 <a:latin typeface="D2Coding" panose="020B0609020101020101" pitchFamily="49" charset="-127"/>
                 <a:ea typeface="D2Coding" panose="020B0609020101020101" pitchFamily="49" charset="-127"/>
               </a:rPr>
@@ -10804,7 +10881,7 @@
           </a:p>
           <a:p>
             <a:r>
-              <a:rPr lang="ko-KR" altLang="en-US" sz="1600" dirty="0">
+              <a:rPr lang="ko-KR" altLang="en-US" sz="1400" dirty="0">
                 <a:latin typeface="D2Coding" panose="020B0609020101020101" pitchFamily="49" charset="-127"/>
                 <a:ea typeface="D2Coding" panose="020B0609020101020101" pitchFamily="49" charset="-127"/>
               </a:rPr>
@@ -10813,49 +10890,49 @@
           </a:p>
           <a:p>
             <a:r>
-              <a:rPr lang="ko-KR" altLang="en-US" sz="1600" dirty="0">
+              <a:rPr lang="ko-KR" altLang="en-US" sz="1400" dirty="0">
                 <a:latin typeface="D2Coding" panose="020B0609020101020101" pitchFamily="49" charset="-127"/>
                 <a:ea typeface="D2Coding" panose="020B0609020101020101" pitchFamily="49" charset="-127"/>
               </a:rPr>
               <a:t>    prompt_1 = </a:t>
             </a:r>
             <a:r>
-              <a:rPr lang="ko-KR" altLang="en-US" sz="1600" dirty="0" err="1">
+              <a:rPr lang="ko-KR" altLang="en-US" sz="1400" dirty="0" err="1">
                 <a:latin typeface="D2Coding" panose="020B0609020101020101" pitchFamily="49" charset="-127"/>
                 <a:ea typeface="D2Coding" panose="020B0609020101020101" pitchFamily="49" charset="-127"/>
               </a:rPr>
               <a:t>f"질문</a:t>
             </a:r>
             <a:r>
-              <a:rPr lang="ko-KR" altLang="en-US" sz="1600" dirty="0">
+              <a:rPr lang="ko-KR" altLang="en-US" sz="1400" dirty="0">
                 <a:latin typeface="D2Coding" panose="020B0609020101020101" pitchFamily="49" charset="-127"/>
                 <a:ea typeface="D2Coding" panose="020B0609020101020101" pitchFamily="49" charset="-127"/>
               </a:rPr>
               <a:t>: {</a:t>
             </a:r>
             <a:r>
-              <a:rPr lang="ko-KR" altLang="en-US" sz="1600" dirty="0" err="1">
+              <a:rPr lang="ko-KR" altLang="en-US" sz="1400" dirty="0" err="1">
                 <a:latin typeface="D2Coding" panose="020B0609020101020101" pitchFamily="49" charset="-127"/>
                 <a:ea typeface="D2Coding" panose="020B0609020101020101" pitchFamily="49" charset="-127"/>
               </a:rPr>
               <a:t>user_query</a:t>
             </a:r>
             <a:r>
-              <a:rPr lang="ko-KR" altLang="en-US" sz="1600" dirty="0">
+              <a:rPr lang="ko-KR" altLang="en-US" sz="1400" dirty="0">
                 <a:latin typeface="D2Coding" panose="020B0609020101020101" pitchFamily="49" charset="-127"/>
                 <a:ea typeface="D2Coding" panose="020B0609020101020101" pitchFamily="49" charset="-127"/>
               </a:rPr>
               <a:t>}\</a:t>
             </a:r>
             <a:r>
-              <a:rPr lang="ko-KR" altLang="en-US" sz="1600" dirty="0" err="1">
+              <a:rPr lang="ko-KR" altLang="en-US" sz="1400" dirty="0" err="1">
                 <a:latin typeface="D2Coding" panose="020B0609020101020101" pitchFamily="49" charset="-127"/>
                 <a:ea typeface="D2Coding" panose="020B0609020101020101" pitchFamily="49" charset="-127"/>
               </a:rPr>
               <a:t>n단계별로</a:t>
             </a:r>
             <a:r>
-              <a:rPr lang="ko-KR" altLang="en-US" sz="1600" dirty="0">
+              <a:rPr lang="ko-KR" altLang="en-US" sz="1400" dirty="0">
                 <a:latin typeface="D2Coding" panose="020B0609020101020101" pitchFamily="49" charset="-127"/>
                 <a:ea typeface="D2Coding" panose="020B0609020101020101" pitchFamily="49" charset="-127"/>
               </a:rPr>
@@ -10864,49 +10941,49 @@
           </a:p>
           <a:p>
             <a:r>
-              <a:rPr lang="ko-KR" altLang="en-US" sz="1600" dirty="0">
+              <a:rPr lang="ko-KR" altLang="en-US" sz="1400" dirty="0">
                 <a:latin typeface="D2Coding" panose="020B0609020101020101" pitchFamily="49" charset="-127"/>
                 <a:ea typeface="D2Coding" panose="020B0609020101020101" pitchFamily="49" charset="-127"/>
               </a:rPr>
               <a:t>    action_1 = </a:t>
             </a:r>
             <a:r>
-              <a:rPr lang="ko-KR" altLang="en-US" sz="1600" dirty="0" err="1">
+              <a:rPr lang="ko-KR" altLang="en-US" sz="1400" dirty="0" err="1">
                 <a:latin typeface="D2Coding" panose="020B0609020101020101" pitchFamily="49" charset="-127"/>
                 <a:ea typeface="D2Coding" panose="020B0609020101020101" pitchFamily="49" charset="-127"/>
               </a:rPr>
               <a:t>llm.generate</a:t>
             </a:r>
             <a:r>
-              <a:rPr lang="ko-KR" altLang="en-US" sz="1600" dirty="0">
+              <a:rPr lang="ko-KR" altLang="en-US" sz="1400" dirty="0">
                 <a:latin typeface="D2Coding" panose="020B0609020101020101" pitchFamily="49" charset="-127"/>
                 <a:ea typeface="D2Coding" panose="020B0609020101020101" pitchFamily="49" charset="-127"/>
               </a:rPr>
               <a:t>(prompt_1)  # 예: "</a:t>
             </a:r>
             <a:r>
-              <a:rPr lang="ko-KR" altLang="en-US" sz="1600" dirty="0" err="1">
+              <a:rPr lang="ko-KR" altLang="en-US" sz="1400" dirty="0" err="1">
                 <a:latin typeface="D2Coding" panose="020B0609020101020101" pitchFamily="49" charset="-127"/>
                 <a:ea typeface="D2Coding" panose="020B0609020101020101" pitchFamily="49" charset="-127"/>
               </a:rPr>
               <a:t>search</a:t>
             </a:r>
             <a:r>
-              <a:rPr lang="ko-KR" altLang="en-US" sz="1600" dirty="0">
+              <a:rPr lang="ko-KR" altLang="en-US" sz="1400" dirty="0">
                 <a:latin typeface="D2Coding" panose="020B0609020101020101" pitchFamily="49" charset="-127"/>
                 <a:ea typeface="D2Coding" panose="020B0609020101020101" pitchFamily="49" charset="-127"/>
               </a:rPr>
               <a:t>, 30th </a:t>
             </a:r>
             <a:r>
-              <a:rPr lang="ko-KR" altLang="en-US" sz="1600" dirty="0" err="1">
+              <a:rPr lang="ko-KR" altLang="en-US" sz="1400" dirty="0" err="1">
                 <a:latin typeface="D2Coding" panose="020B0609020101020101" pitchFamily="49" charset="-127"/>
                 <a:ea typeface="D2Coding" panose="020B0609020101020101" pitchFamily="49" charset="-127"/>
               </a:rPr>
               <a:t>president</a:t>
             </a:r>
             <a:r>
-              <a:rPr lang="ko-KR" altLang="en-US" sz="1600" dirty="0">
+              <a:rPr lang="ko-KR" altLang="en-US" sz="1400" dirty="0">
                 <a:latin typeface="D2Coding" panose="020B0609020101020101" pitchFamily="49" charset="-127"/>
                 <a:ea typeface="D2Coding" panose="020B0609020101020101" pitchFamily="49" charset="-127"/>
               </a:rPr>
@@ -10915,21 +10992,21 @@
           </a:p>
           <a:p>
             <a:r>
-              <a:rPr lang="ko-KR" altLang="en-US" sz="1600" dirty="0">
+              <a:rPr lang="ko-KR" altLang="en-US" sz="1400" dirty="0">
                 <a:latin typeface="D2Coding" panose="020B0609020101020101" pitchFamily="49" charset="-127"/>
                 <a:ea typeface="D2Coding" panose="020B0609020101020101" pitchFamily="49" charset="-127"/>
               </a:rPr>
               <a:t>    result_1 = </a:t>
             </a:r>
             <a:r>
-              <a:rPr lang="ko-KR" altLang="en-US" sz="1600" dirty="0" err="1">
+              <a:rPr lang="ko-KR" altLang="en-US" sz="1400" dirty="0" err="1">
                 <a:latin typeface="D2Coding" panose="020B0609020101020101" pitchFamily="49" charset="-127"/>
                 <a:ea typeface="D2Coding" panose="020B0609020101020101" pitchFamily="49" charset="-127"/>
               </a:rPr>
               <a:t>execute_tool</a:t>
             </a:r>
             <a:r>
-              <a:rPr lang="ko-KR" altLang="en-US" sz="1600" dirty="0">
+              <a:rPr lang="ko-KR" altLang="en-US" sz="1400" dirty="0">
                 <a:latin typeface="D2Coding" panose="020B0609020101020101" pitchFamily="49" charset="-127"/>
                 <a:ea typeface="D2Coding" panose="020B0609020101020101" pitchFamily="49" charset="-127"/>
               </a:rPr>
@@ -10938,7 +11015,7 @@
           </a:p>
           <a:p>
             <a:r>
-              <a:rPr lang="ko-KR" altLang="en-US" sz="1600" dirty="0">
+              <a:rPr lang="ko-KR" altLang="en-US" sz="1400" dirty="0">
                 <a:latin typeface="D2Coding" panose="020B0609020101020101" pitchFamily="49" charset="-127"/>
                 <a:ea typeface="D2Coding" panose="020B0609020101020101" pitchFamily="49" charset="-127"/>
               </a:rPr>
@@ -10947,7 +11024,7 @@
           </a:p>
           <a:p>
             <a:r>
-              <a:rPr lang="ko-KR" altLang="en-US" sz="1600" dirty="0">
+              <a:rPr lang="ko-KR" altLang="en-US" sz="1400" dirty="0">
                 <a:latin typeface="D2Coding" panose="020B0609020101020101" pitchFamily="49" charset="-127"/>
                 <a:ea typeface="D2Coding" panose="020B0609020101020101" pitchFamily="49" charset="-127"/>
               </a:rPr>
@@ -10956,7 +11033,7 @@
           </a:p>
           <a:p>
             <a:r>
-              <a:rPr lang="ko-KR" altLang="en-US" sz="1600" dirty="0">
+              <a:rPr lang="ko-KR" altLang="en-US" sz="1400" dirty="0">
                 <a:latin typeface="D2Coding" panose="020B0609020101020101" pitchFamily="49" charset="-127"/>
                 <a:ea typeface="D2Coding" panose="020B0609020101020101" pitchFamily="49" charset="-127"/>
               </a:rPr>
@@ -10965,49 +11042,49 @@
           </a:p>
           <a:p>
             <a:r>
-              <a:rPr lang="ko-KR" altLang="en-US" sz="1600" dirty="0">
+              <a:rPr lang="ko-KR" altLang="en-US" sz="1400" dirty="0">
                 <a:latin typeface="D2Coding" panose="020B0609020101020101" pitchFamily="49" charset="-127"/>
                 <a:ea typeface="D2Coding" panose="020B0609020101020101" pitchFamily="49" charset="-127"/>
               </a:rPr>
               <a:t>    prompt_2 = </a:t>
             </a:r>
             <a:r>
-              <a:rPr lang="ko-KR" altLang="en-US" sz="1600" dirty="0" err="1">
+              <a:rPr lang="ko-KR" altLang="en-US" sz="1400" dirty="0" err="1">
                 <a:latin typeface="D2Coding" panose="020B0609020101020101" pitchFamily="49" charset="-127"/>
                 <a:ea typeface="D2Coding" panose="020B0609020101020101" pitchFamily="49" charset="-127"/>
               </a:rPr>
               <a:t>f</a:t>
             </a:r>
             <a:r>
-              <a:rPr lang="ko-KR" altLang="en-US" sz="1600" dirty="0">
+              <a:rPr lang="ko-KR" altLang="en-US" sz="1400" dirty="0">
                 <a:latin typeface="D2Coding" panose="020B0609020101020101" pitchFamily="49" charset="-127"/>
                 <a:ea typeface="D2Coding" panose="020B0609020101020101" pitchFamily="49" charset="-127"/>
               </a:rPr>
               <a:t>"{prompt_1}\</a:t>
             </a:r>
             <a:r>
-              <a:rPr lang="ko-KR" altLang="en-US" sz="1600" dirty="0" err="1">
+              <a:rPr lang="ko-KR" altLang="en-US" sz="1400" dirty="0" err="1">
                 <a:latin typeface="D2Coding" panose="020B0609020101020101" pitchFamily="49" charset="-127"/>
                 <a:ea typeface="D2Coding" panose="020B0609020101020101" pitchFamily="49" charset="-127"/>
               </a:rPr>
               <a:t>n결과</a:t>
             </a:r>
             <a:r>
-              <a:rPr lang="ko-KR" altLang="en-US" sz="1600" dirty="0">
+              <a:rPr lang="ko-KR" altLang="en-US" sz="1400" dirty="0">
                 <a:latin typeface="D2Coding" panose="020B0609020101020101" pitchFamily="49" charset="-127"/>
                 <a:ea typeface="D2Coding" panose="020B0609020101020101" pitchFamily="49" charset="-127"/>
               </a:rPr>
               <a:t>: {result_1}\</a:t>
             </a:r>
             <a:r>
-              <a:rPr lang="ko-KR" altLang="en-US" sz="1600" dirty="0" err="1">
+              <a:rPr lang="ko-KR" altLang="en-US" sz="1400" dirty="0" err="1">
                 <a:latin typeface="D2Coding" panose="020B0609020101020101" pitchFamily="49" charset="-127"/>
                 <a:ea typeface="D2Coding" panose="020B0609020101020101" pitchFamily="49" charset="-127"/>
               </a:rPr>
               <a:t>n다음</a:t>
             </a:r>
             <a:r>
-              <a:rPr lang="ko-KR" altLang="en-US" sz="1600" dirty="0">
+              <a:rPr lang="ko-KR" altLang="en-US" sz="1400" dirty="0">
                 <a:latin typeface="D2Coding" panose="020B0609020101020101" pitchFamily="49" charset="-127"/>
                 <a:ea typeface="D2Coding" panose="020B0609020101020101" pitchFamily="49" charset="-127"/>
               </a:rPr>
@@ -11016,35 +11093,35 @@
           </a:p>
           <a:p>
             <a:r>
-              <a:rPr lang="ko-KR" altLang="en-US" sz="1600" dirty="0">
+              <a:rPr lang="ko-KR" altLang="en-US" sz="1400" dirty="0">
                 <a:latin typeface="D2Coding" panose="020B0609020101020101" pitchFamily="49" charset="-127"/>
                 <a:ea typeface="D2Coding" panose="020B0609020101020101" pitchFamily="49" charset="-127"/>
               </a:rPr>
               <a:t>    action_2 = </a:t>
             </a:r>
             <a:r>
-              <a:rPr lang="ko-KR" altLang="en-US" sz="1600" dirty="0" err="1">
+              <a:rPr lang="ko-KR" altLang="en-US" sz="1400" dirty="0" err="1">
                 <a:latin typeface="D2Coding" panose="020B0609020101020101" pitchFamily="49" charset="-127"/>
                 <a:ea typeface="D2Coding" panose="020B0609020101020101" pitchFamily="49" charset="-127"/>
               </a:rPr>
               <a:t>llm.generate</a:t>
             </a:r>
             <a:r>
-              <a:rPr lang="ko-KR" altLang="en-US" sz="1600" dirty="0">
+              <a:rPr lang="ko-KR" altLang="en-US" sz="1400" dirty="0">
                 <a:latin typeface="D2Coding" panose="020B0609020101020101" pitchFamily="49" charset="-127"/>
                 <a:ea typeface="D2Coding" panose="020B0609020101020101" pitchFamily="49" charset="-127"/>
               </a:rPr>
               <a:t>(prompt_2)  # 예: "</a:t>
             </a:r>
             <a:r>
-              <a:rPr lang="ko-KR" altLang="en-US" sz="1600" dirty="0" err="1">
+              <a:rPr lang="ko-KR" altLang="en-US" sz="1400" dirty="0" err="1">
                 <a:latin typeface="D2Coding" panose="020B0609020101020101" pitchFamily="49" charset="-127"/>
                 <a:ea typeface="D2Coding" panose="020B0609020101020101" pitchFamily="49" charset="-127"/>
               </a:rPr>
               <a:t>calculator</a:t>
             </a:r>
             <a:r>
-              <a:rPr lang="ko-KR" altLang="en-US" sz="1600" dirty="0">
+              <a:rPr lang="ko-KR" altLang="en-US" sz="1400" dirty="0">
                 <a:latin typeface="D2Coding" panose="020B0609020101020101" pitchFamily="49" charset="-127"/>
                 <a:ea typeface="D2Coding" panose="020B0609020101020101" pitchFamily="49" charset="-127"/>
               </a:rPr>
@@ -11053,21 +11130,21 @@
           </a:p>
           <a:p>
             <a:r>
-              <a:rPr lang="ko-KR" altLang="en-US" sz="1600" dirty="0">
+              <a:rPr lang="ko-KR" altLang="en-US" sz="1400" dirty="0">
                 <a:latin typeface="D2Coding" panose="020B0609020101020101" pitchFamily="49" charset="-127"/>
                 <a:ea typeface="D2Coding" panose="020B0609020101020101" pitchFamily="49" charset="-127"/>
               </a:rPr>
               <a:t>    result_2 = </a:t>
             </a:r>
             <a:r>
-              <a:rPr lang="ko-KR" altLang="en-US" sz="1600" dirty="0" err="1">
+              <a:rPr lang="ko-KR" altLang="en-US" sz="1400" dirty="0" err="1">
                 <a:latin typeface="D2Coding" panose="020B0609020101020101" pitchFamily="49" charset="-127"/>
                 <a:ea typeface="D2Coding" panose="020B0609020101020101" pitchFamily="49" charset="-127"/>
               </a:rPr>
               <a:t>execute_tool</a:t>
             </a:r>
             <a:r>
-              <a:rPr lang="ko-KR" altLang="en-US" sz="1600" dirty="0">
+              <a:rPr lang="ko-KR" altLang="en-US" sz="1400" dirty="0">
                 <a:latin typeface="D2Coding" panose="020B0609020101020101" pitchFamily="49" charset="-127"/>
                 <a:ea typeface="D2Coding" panose="020B0609020101020101" pitchFamily="49" charset="-127"/>
               </a:rPr>
@@ -11076,7 +11153,7 @@
           </a:p>
           <a:p>
             <a:r>
-              <a:rPr lang="ko-KR" altLang="en-US" sz="1600" dirty="0">
+              <a:rPr lang="ko-KR" altLang="en-US" sz="1400" dirty="0">
                 <a:latin typeface="D2Coding" panose="020B0609020101020101" pitchFamily="49" charset="-127"/>
                 <a:ea typeface="D2Coding" panose="020B0609020101020101" pitchFamily="49" charset="-127"/>
               </a:rPr>
@@ -11085,7 +11162,7 @@
           </a:p>
           <a:p>
             <a:r>
-              <a:rPr lang="ko-KR" altLang="en-US" sz="1600" dirty="0">
+              <a:rPr lang="ko-KR" altLang="en-US" sz="1400" dirty="0">
                 <a:latin typeface="D2Coding" panose="020B0609020101020101" pitchFamily="49" charset="-127"/>
                 <a:ea typeface="D2Coding" panose="020B0609020101020101" pitchFamily="49" charset="-127"/>
               </a:rPr>
@@ -11094,35 +11171,35 @@
           </a:p>
           <a:p>
             <a:r>
-              <a:rPr lang="ko-KR" altLang="en-US" sz="1600" dirty="0">
+              <a:rPr lang="ko-KR" altLang="en-US" sz="1400" dirty="0">
                 <a:latin typeface="D2Coding" panose="020B0609020101020101" pitchFamily="49" charset="-127"/>
                 <a:ea typeface="D2Coding" panose="020B0609020101020101" pitchFamily="49" charset="-127"/>
               </a:rPr>
               <a:t>    </a:t>
             </a:r>
             <a:r>
-              <a:rPr lang="ko-KR" altLang="en-US" sz="1600" dirty="0" err="1">
+              <a:rPr lang="ko-KR" altLang="en-US" sz="1400" dirty="0" err="1">
                 <a:latin typeface="D2Coding" panose="020B0609020101020101" pitchFamily="49" charset="-127"/>
                 <a:ea typeface="D2Coding" panose="020B0609020101020101" pitchFamily="49" charset="-127"/>
               </a:rPr>
               <a:t>final_prompt</a:t>
             </a:r>
             <a:r>
-              <a:rPr lang="ko-KR" altLang="en-US" sz="1600" dirty="0">
+              <a:rPr lang="ko-KR" altLang="en-US" sz="1400" dirty="0">
                 <a:latin typeface="D2Coding" panose="020B0609020101020101" pitchFamily="49" charset="-127"/>
                 <a:ea typeface="D2Coding" panose="020B0609020101020101" pitchFamily="49" charset="-127"/>
               </a:rPr>
               <a:t> = </a:t>
             </a:r>
             <a:r>
-              <a:rPr lang="ko-KR" altLang="en-US" sz="1600" dirty="0" err="1">
+              <a:rPr lang="ko-KR" altLang="en-US" sz="1400" dirty="0" err="1">
                 <a:latin typeface="D2Coding" panose="020B0609020101020101" pitchFamily="49" charset="-127"/>
                 <a:ea typeface="D2Coding" panose="020B0609020101020101" pitchFamily="49" charset="-127"/>
               </a:rPr>
               <a:t>f"계산</a:t>
             </a:r>
             <a:r>
-              <a:rPr lang="ko-KR" altLang="en-US" sz="1600" dirty="0">
+              <a:rPr lang="ko-KR" altLang="en-US" sz="1400" dirty="0">
                 <a:latin typeface="D2Coding" panose="020B0609020101020101" pitchFamily="49" charset="-127"/>
                 <a:ea typeface="D2Coding" panose="020B0609020101020101" pitchFamily="49" charset="-127"/>
               </a:rPr>
@@ -11131,49 +11208,49 @@
           </a:p>
           <a:p>
             <a:r>
-              <a:rPr lang="ko-KR" altLang="en-US" sz="1600" dirty="0">
+              <a:rPr lang="ko-KR" altLang="en-US" sz="1400" dirty="0">
                 <a:latin typeface="D2Coding" panose="020B0609020101020101" pitchFamily="49" charset="-127"/>
                 <a:ea typeface="D2Coding" panose="020B0609020101020101" pitchFamily="49" charset="-127"/>
               </a:rPr>
               <a:t>    </a:t>
             </a:r>
             <a:r>
-              <a:rPr lang="ko-KR" altLang="en-US" sz="1600" dirty="0" err="1">
+              <a:rPr lang="ko-KR" altLang="en-US" sz="1400" dirty="0" err="1">
                 <a:latin typeface="D2Coding" panose="020B0609020101020101" pitchFamily="49" charset="-127"/>
                 <a:ea typeface="D2Coding" panose="020B0609020101020101" pitchFamily="49" charset="-127"/>
               </a:rPr>
               <a:t>final_response</a:t>
             </a:r>
             <a:r>
-              <a:rPr lang="ko-KR" altLang="en-US" sz="1600" dirty="0">
+              <a:rPr lang="ko-KR" altLang="en-US" sz="1400" dirty="0">
                 <a:latin typeface="D2Coding" panose="020B0609020101020101" pitchFamily="49" charset="-127"/>
                 <a:ea typeface="D2Coding" panose="020B0609020101020101" pitchFamily="49" charset="-127"/>
               </a:rPr>
               <a:t> = </a:t>
             </a:r>
             <a:r>
-              <a:rPr lang="ko-KR" altLang="en-US" sz="1600" dirty="0" err="1">
+              <a:rPr lang="ko-KR" altLang="en-US" sz="1400" dirty="0" err="1">
                 <a:latin typeface="D2Coding" panose="020B0609020101020101" pitchFamily="49" charset="-127"/>
                 <a:ea typeface="D2Coding" panose="020B0609020101020101" pitchFamily="49" charset="-127"/>
               </a:rPr>
               <a:t>llm.generate</a:t>
             </a:r>
             <a:r>
-              <a:rPr lang="ko-KR" altLang="en-US" sz="1600" dirty="0">
+              <a:rPr lang="ko-KR" altLang="en-US" sz="1400" dirty="0">
                 <a:latin typeface="D2Coding" panose="020B0609020101020101" pitchFamily="49" charset="-127"/>
                 <a:ea typeface="D2Coding" panose="020B0609020101020101" pitchFamily="49" charset="-127"/>
               </a:rPr>
               <a:t>(</a:t>
             </a:r>
             <a:r>
-              <a:rPr lang="ko-KR" altLang="en-US" sz="1600" dirty="0" err="1">
+              <a:rPr lang="ko-KR" altLang="en-US" sz="1400" dirty="0" err="1">
                 <a:latin typeface="D2Coding" panose="020B0609020101020101" pitchFamily="49" charset="-127"/>
                 <a:ea typeface="D2Coding" panose="020B0609020101020101" pitchFamily="49" charset="-127"/>
               </a:rPr>
               <a:t>final_prompt</a:t>
             </a:r>
             <a:r>
-              <a:rPr lang="ko-KR" altLang="en-US" sz="1600" dirty="0">
+              <a:rPr lang="ko-KR" altLang="en-US" sz="1400" dirty="0">
                 <a:latin typeface="D2Coding" panose="020B0609020101020101" pitchFamily="49" charset="-127"/>
                 <a:ea typeface="D2Coding" panose="020B0609020101020101" pitchFamily="49" charset="-127"/>
               </a:rPr>
@@ -11182,7 +11259,7 @@
           </a:p>
           <a:p>
             <a:r>
-              <a:rPr lang="ko-KR" altLang="en-US" sz="1600" dirty="0">
+              <a:rPr lang="ko-KR" altLang="en-US" sz="1400" dirty="0">
                 <a:latin typeface="D2Coding" panose="020B0609020101020101" pitchFamily="49" charset="-127"/>
                 <a:ea typeface="D2Coding" panose="020B0609020101020101" pitchFamily="49" charset="-127"/>
               </a:rPr>
@@ -11191,34 +11268,34 @@
           </a:p>
           <a:p>
             <a:r>
-              <a:rPr lang="ko-KR" altLang="en-US" sz="1600" dirty="0">
+              <a:rPr lang="ko-KR" altLang="en-US" sz="1400" dirty="0">
                 <a:latin typeface="D2Coding" panose="020B0609020101020101" pitchFamily="49" charset="-127"/>
                 <a:ea typeface="D2Coding" panose="020B0609020101020101" pitchFamily="49" charset="-127"/>
               </a:rPr>
               <a:t>    </a:t>
             </a:r>
             <a:r>
-              <a:rPr lang="ko-KR" altLang="en-US" sz="1600" dirty="0" err="1">
+              <a:rPr lang="ko-KR" altLang="en-US" sz="1400" dirty="0" err="1">
                 <a:latin typeface="D2Coding" panose="020B0609020101020101" pitchFamily="49" charset="-127"/>
                 <a:ea typeface="D2Coding" panose="020B0609020101020101" pitchFamily="49" charset="-127"/>
               </a:rPr>
               <a:t>return</a:t>
             </a:r>
             <a:r>
-              <a:rPr lang="ko-KR" altLang="en-US" sz="1600" dirty="0">
+              <a:rPr lang="ko-KR" altLang="en-US" sz="1400" dirty="0">
                 <a:latin typeface="D2Coding" panose="020B0609020101020101" pitchFamily="49" charset="-127"/>
                 <a:ea typeface="D2Coding" panose="020B0609020101020101" pitchFamily="49" charset="-127"/>
               </a:rPr>
               <a:t> </a:t>
             </a:r>
             <a:r>
-              <a:rPr lang="ko-KR" altLang="en-US" sz="1600" dirty="0" err="1">
+              <a:rPr lang="ko-KR" altLang="en-US" sz="1400" dirty="0" err="1">
                 <a:latin typeface="D2Coding" panose="020B0609020101020101" pitchFamily="49" charset="-127"/>
                 <a:ea typeface="D2Coding" panose="020B0609020101020101" pitchFamily="49" charset="-127"/>
               </a:rPr>
               <a:t>final_response</a:t>
             </a:r>
-            <a:endParaRPr lang="ko-KR" altLang="en-US" sz="1600" dirty="0">
+            <a:endParaRPr lang="ko-KR" altLang="en-US" sz="1400" dirty="0">
               <a:latin typeface="D2Coding" panose="020B0609020101020101" pitchFamily="49" charset="-127"/>
               <a:ea typeface="D2Coding" panose="020B0609020101020101" pitchFamily="49" charset="-127"/>
             </a:endParaRPr>
@@ -11571,14 +11648,14 @@
           <p:nvPr>
             <p:extLst>
               <p:ext uri="{D42A27DB-BD31-4B8C-83A1-F6EECF244321}">
-                <p14:modId xmlns:p14="http://schemas.microsoft.com/office/powerpoint/2010/main" val="3296845013"/>
+                <p14:modId xmlns:p14="http://schemas.microsoft.com/office/powerpoint/2010/main" val="1120596065"/>
               </p:ext>
             </p:extLst>
           </p:nvPr>
         </p:nvGraphicFramePr>
         <p:xfrm>
-          <a:off x="713466" y="2533154"/>
-          <a:ext cx="10868934" cy="4025424"/>
+          <a:off x="713466" y="2533153"/>
+          <a:ext cx="10868934" cy="3683944"/>
         </p:xfrm>
         <a:graphic>
           <a:graphicData uri="http://schemas.openxmlformats.org/drawingml/2006/table">
@@ -11614,7 +11691,7 @@
                   </a:extLst>
                 </a:gridCol>
               </a:tblGrid>
-              <a:tr h="224781">
+              <a:tr h="205712">
                 <a:tc>
                   <a:txBody>
                     <a:bodyPr/>
@@ -11624,7 +11701,7 @@
                         <a:buNone/>
                       </a:pPr>
                       <a:r>
-                        <a:rPr lang="ko-KR" altLang="en-US" sz="1200" dirty="0" err="1">
+                        <a:rPr lang="ko-KR" altLang="en-US" sz="1100" dirty="0" err="1">
                           <a:solidFill>
                             <a:schemeClr val="bg1"/>
                           </a:solidFill>
@@ -11634,7 +11711,7 @@
                         </a:rPr>
                         <a:t>기법명</a:t>
                       </a:r>
-                      <a:endParaRPr lang="ko-KR" altLang="en-US" sz="1200" dirty="0">
+                      <a:endParaRPr lang="ko-KR" altLang="en-US" sz="1100" dirty="0">
                         <a:solidFill>
                           <a:schemeClr val="bg1"/>
                         </a:solidFill>
@@ -11695,7 +11772,7 @@
                         <a:buNone/>
                       </a:pPr>
                       <a:r>
-                        <a:rPr lang="ko-KR" altLang="en-US" sz="1200" dirty="0">
+                        <a:rPr lang="ko-KR" altLang="en-US" sz="1100" dirty="0">
                           <a:solidFill>
                             <a:schemeClr val="bg1"/>
                           </a:solidFill>
@@ -11760,7 +11837,7 @@
                         <a:buNone/>
                       </a:pPr>
                       <a:r>
-                        <a:rPr lang="ko-KR" altLang="en-US" sz="1200" dirty="0">
+                        <a:rPr lang="ko-KR" altLang="en-US" sz="1100" dirty="0">
                           <a:solidFill>
                             <a:schemeClr val="bg1"/>
                           </a:solidFill>
@@ -11827,7 +11904,7 @@
                         <a:buNone/>
                       </a:pPr>
                       <a:r>
-                        <a:rPr lang="ko-KR" altLang="en-US" sz="1200" dirty="0">
+                        <a:rPr lang="ko-KR" altLang="en-US" sz="1100" dirty="0">
                           <a:solidFill>
                             <a:schemeClr val="bg1"/>
                           </a:solidFill>
@@ -11889,7 +11966,7 @@
                   </a:ext>
                 </a:extLst>
               </a:tr>
-              <a:tr h="449981">
+              <a:tr h="411809">
                 <a:tc>
                   <a:txBody>
                     <a:bodyPr/>
@@ -11899,14 +11976,14 @@
                         <a:buNone/>
                       </a:pPr>
                       <a:r>
-                        <a:rPr lang="ko-KR" altLang="en-US" sz="1200" dirty="0">
+                        <a:rPr lang="ko-KR" altLang="en-US" sz="1100" dirty="0">
                           <a:effectLst/>
                           <a:latin typeface="D2Coding" panose="020B0609020101020101" pitchFamily="49" charset="-127"/>
                           <a:ea typeface="D2Coding" panose="020B0609020101020101" pitchFamily="49" charset="-127"/>
                         </a:rPr>
                         <a:t>도구 호출</a:t>
                       </a:r>
-                      <a:endParaRPr lang="en-US" altLang="ko-KR" sz="1200" dirty="0">
+                      <a:endParaRPr lang="en-US" altLang="ko-KR" sz="1100" dirty="0">
                         <a:effectLst/>
                         <a:latin typeface="D2Coding" panose="020B0609020101020101" pitchFamily="49" charset="-127"/>
                         <a:ea typeface="D2Coding" panose="020B0609020101020101" pitchFamily="49" charset="-127"/>
@@ -11917,7 +11994,7 @@
                         <a:buNone/>
                       </a:pPr>
                       <a:r>
-                        <a:rPr lang="en-US" altLang="ko-KR" sz="1200" dirty="0">
+                        <a:rPr lang="en-US" altLang="ko-KR" sz="1100" dirty="0">
                           <a:effectLst/>
                           <a:latin typeface="D2Coding" panose="020B0609020101020101" pitchFamily="49" charset="-127"/>
                           <a:ea typeface="D2Coding" panose="020B0609020101020101" pitchFamily="49" charset="-127"/>
@@ -11925,7 +12002,7 @@
                         <a:t>(</a:t>
                       </a:r>
                       <a:r>
-                        <a:rPr lang="en-US" sz="1200" dirty="0">
+                        <a:rPr lang="en-US" sz="1100" dirty="0">
                           <a:effectLst/>
                           <a:latin typeface="D2Coding" panose="020B0609020101020101" pitchFamily="49" charset="-127"/>
                           <a:ea typeface="D2Coding" panose="020B0609020101020101" pitchFamily="49" charset="-127"/>
@@ -11990,7 +12067,7 @@
                         <a:buNone/>
                       </a:pPr>
                       <a:r>
-                        <a:rPr lang="ko-KR" altLang="en-US" sz="1200" dirty="0">
+                        <a:rPr lang="ko-KR" altLang="en-US" sz="1100" dirty="0">
                           <a:effectLst/>
                           <a:latin typeface="D2Coding" panose="020B0609020101020101" pitchFamily="49" charset="-127"/>
                           <a:ea typeface="D2Coding" panose="020B0609020101020101" pitchFamily="49" charset="-127"/>
@@ -11998,7 +12075,7 @@
                         <a:t>행동 </a:t>
                       </a:r>
                       <a:r>
-                        <a:rPr lang="en-US" altLang="ko-KR" sz="1200" dirty="0">
+                        <a:rPr lang="en-US" altLang="ko-KR" sz="1100" dirty="0">
                           <a:effectLst/>
                           <a:latin typeface="D2Coding" panose="020B0609020101020101" pitchFamily="49" charset="-127"/>
                           <a:ea typeface="D2Coding" panose="020B0609020101020101" pitchFamily="49" charset="-127"/>
@@ -12006,7 +12083,7 @@
                         <a:t>(</a:t>
                       </a:r>
                       <a:r>
-                        <a:rPr lang="en-US" sz="1200" dirty="0">
+                        <a:rPr lang="en-US" sz="1100" dirty="0">
                           <a:effectLst/>
                           <a:latin typeface="D2Coding" panose="020B0609020101020101" pitchFamily="49" charset="-127"/>
                           <a:ea typeface="D2Coding" panose="020B0609020101020101" pitchFamily="49" charset="-127"/>
@@ -12073,7 +12150,7 @@
                         <a:buNone/>
                       </a:pPr>
                       <a:r>
-                        <a:rPr lang="ko-KR" altLang="en-US" sz="1200" dirty="0">
+                        <a:rPr lang="ko-KR" altLang="en-US" sz="1100" dirty="0">
                           <a:effectLst/>
                           <a:latin typeface="D2Coding" panose="020B0609020101020101" pitchFamily="49" charset="-127"/>
                           <a:ea typeface="D2Coding" panose="020B0609020101020101" pitchFamily="49" charset="-127"/>
@@ -12081,7 +12158,7 @@
                         <a:t>외부 </a:t>
                       </a:r>
                       <a:r>
-                        <a:rPr lang="en-US" altLang="ko-KR" sz="1200" dirty="0">
+                        <a:rPr lang="en-US" altLang="ko-KR" sz="1100" dirty="0">
                           <a:effectLst/>
                           <a:latin typeface="D2Coding" panose="020B0609020101020101" pitchFamily="49" charset="-127"/>
                           <a:ea typeface="D2Coding" panose="020B0609020101020101" pitchFamily="49" charset="-127"/>
@@ -12089,7 +12166,7 @@
                         <a:t>API, </a:t>
                       </a:r>
                       <a:r>
-                        <a:rPr lang="ko-KR" altLang="en-US" sz="1200" dirty="0">
+                        <a:rPr lang="ko-KR" altLang="en-US" sz="1100" dirty="0">
                           <a:effectLst/>
                           <a:latin typeface="D2Coding" panose="020B0609020101020101" pitchFamily="49" charset="-127"/>
                           <a:ea typeface="D2Coding" panose="020B0609020101020101" pitchFamily="49" charset="-127"/>
@@ -12097,7 +12174,7 @@
                         <a:t>계산기</a:t>
                       </a:r>
                       <a:r>
-                        <a:rPr lang="en-US" altLang="ko-KR" sz="1200" dirty="0">
+                        <a:rPr lang="en-US" altLang="ko-KR" sz="1100" dirty="0">
                           <a:effectLst/>
                           <a:latin typeface="D2Coding" panose="020B0609020101020101" pitchFamily="49" charset="-127"/>
                           <a:ea typeface="D2Coding" panose="020B0609020101020101" pitchFamily="49" charset="-127"/>
@@ -12105,7 +12182,7 @@
                         <a:t>, DB </a:t>
                       </a:r>
                       <a:r>
-                        <a:rPr lang="ko-KR" altLang="en-US" sz="1200" dirty="0">
+                        <a:rPr lang="ko-KR" altLang="en-US" sz="1100" dirty="0">
                           <a:effectLst/>
                           <a:latin typeface="D2Coding" panose="020B0609020101020101" pitchFamily="49" charset="-127"/>
                           <a:ea typeface="D2Coding" panose="020B0609020101020101" pitchFamily="49" charset="-127"/>
@@ -12172,7 +12249,7 @@
                         <a:buNone/>
                       </a:pPr>
                       <a:r>
-                        <a:rPr lang="ko-KR" altLang="en-US" sz="1200" dirty="0">
+                        <a:rPr lang="ko-KR" altLang="en-US" sz="1100" dirty="0">
                           <a:effectLst/>
                           <a:latin typeface="D2Coding" panose="020B0609020101020101" pitchFamily="49" charset="-127"/>
                           <a:ea typeface="D2Coding" panose="020B0609020101020101" pitchFamily="49" charset="-127"/>
@@ -12180,7 +12257,7 @@
                         <a:t>현실 세계와 상호작용하는 </a:t>
                       </a:r>
                       <a:r>
-                        <a:rPr lang="en-US" altLang="ko-KR" sz="1200" dirty="0">
+                        <a:rPr lang="en-US" altLang="ko-KR" sz="1100" dirty="0">
                           <a:effectLst/>
                           <a:latin typeface="D2Coding" panose="020B0609020101020101" pitchFamily="49" charset="-127"/>
                           <a:ea typeface="D2Coding" panose="020B0609020101020101" pitchFamily="49" charset="-127"/>
@@ -12188,7 +12265,7 @@
                         <a:t>'</a:t>
                       </a:r>
                       <a:r>
-                        <a:rPr lang="ko-KR" altLang="en-US" sz="1200" dirty="0">
+                        <a:rPr lang="ko-KR" altLang="en-US" sz="1100" dirty="0">
                           <a:effectLst/>
                           <a:latin typeface="D2Coding" panose="020B0609020101020101" pitchFamily="49" charset="-127"/>
                           <a:ea typeface="D2Coding" panose="020B0609020101020101" pitchFamily="49" charset="-127"/>
@@ -12196,7 +12273,7 @@
                         <a:t>손과 발</a:t>
                       </a:r>
                       <a:r>
-                        <a:rPr lang="en-US" altLang="ko-KR" sz="1200" dirty="0">
+                        <a:rPr lang="en-US" altLang="ko-KR" sz="1100" dirty="0">
                           <a:effectLst/>
                           <a:latin typeface="D2Coding" panose="020B0609020101020101" pitchFamily="49" charset="-127"/>
                           <a:ea typeface="D2Coding" panose="020B0609020101020101" pitchFamily="49" charset="-127"/>
@@ -12258,7 +12335,7 @@
                   </a:ext>
                 </a:extLst>
               </a:tr>
-              <a:tr h="444854">
+              <a:tr h="407117">
                 <a:tc>
                   <a:txBody>
                     <a:bodyPr/>
@@ -12268,14 +12345,14 @@
                         <a:buNone/>
                       </a:pPr>
                       <a:r>
-                        <a:rPr lang="ko-KR" altLang="en-US" sz="1200" dirty="0">
+                        <a:rPr lang="ko-KR" altLang="en-US" sz="1100" dirty="0">
                           <a:effectLst/>
                           <a:latin typeface="D2Coding" panose="020B0609020101020101" pitchFamily="49" charset="-127"/>
                           <a:ea typeface="D2Coding" panose="020B0609020101020101" pitchFamily="49" charset="-127"/>
                         </a:rPr>
                         <a:t>생각의 사슬</a:t>
                       </a:r>
-                      <a:endParaRPr lang="en-US" altLang="ko-KR" sz="1200" dirty="0">
+                      <a:endParaRPr lang="en-US" altLang="ko-KR" sz="1100" dirty="0">
                         <a:effectLst/>
                         <a:latin typeface="D2Coding" panose="020B0609020101020101" pitchFamily="49" charset="-127"/>
                         <a:ea typeface="D2Coding" panose="020B0609020101020101" pitchFamily="49" charset="-127"/>
@@ -12286,7 +12363,7 @@
                         <a:buNone/>
                       </a:pPr>
                       <a:r>
-                        <a:rPr lang="en-US" altLang="ko-KR" sz="1200" dirty="0">
+                        <a:rPr lang="en-US" altLang="ko-KR" sz="1100" dirty="0">
                           <a:effectLst/>
                           <a:latin typeface="D2Coding" panose="020B0609020101020101" pitchFamily="49" charset="-127"/>
                           <a:ea typeface="D2Coding" panose="020B0609020101020101" pitchFamily="49" charset="-127"/>
@@ -12294,7 +12371,7 @@
                         <a:t>(</a:t>
                       </a:r>
                       <a:r>
-                        <a:rPr lang="en-US" sz="1200" dirty="0">
+                        <a:rPr lang="en-US" sz="1100" dirty="0">
                           <a:effectLst/>
                           <a:latin typeface="D2Coding" panose="020B0609020101020101" pitchFamily="49" charset="-127"/>
                           <a:ea typeface="D2Coding" panose="020B0609020101020101" pitchFamily="49" charset="-127"/>
@@ -12359,14 +12436,14 @@
                         <a:buNone/>
                       </a:pPr>
                       <a:r>
-                        <a:rPr lang="ko-KR" altLang="en-US" sz="1200" dirty="0">
+                        <a:rPr lang="ko-KR" altLang="en-US" sz="1100" dirty="0">
                           <a:effectLst/>
                           <a:latin typeface="D2Coding" panose="020B0609020101020101" pitchFamily="49" charset="-127"/>
                           <a:ea typeface="D2Coding" panose="020B0609020101020101" pitchFamily="49" charset="-127"/>
                         </a:rPr>
                         <a:t>선형 추론 </a:t>
                       </a:r>
-                      <a:endParaRPr lang="en-US" altLang="ko-KR" sz="1200" dirty="0">
+                      <a:endParaRPr lang="en-US" altLang="ko-KR" sz="1100" dirty="0">
                         <a:effectLst/>
                         <a:latin typeface="D2Coding" panose="020B0609020101020101" pitchFamily="49" charset="-127"/>
                         <a:ea typeface="D2Coding" panose="020B0609020101020101" pitchFamily="49" charset="-127"/>
@@ -12377,7 +12454,7 @@
                         <a:buNone/>
                       </a:pPr>
                       <a:r>
-                        <a:rPr lang="en-US" altLang="ko-KR" sz="1200" dirty="0">
+                        <a:rPr lang="en-US" altLang="ko-KR" sz="1100" dirty="0">
                           <a:effectLst/>
                           <a:latin typeface="D2Coding" panose="020B0609020101020101" pitchFamily="49" charset="-127"/>
                           <a:ea typeface="D2Coding" panose="020B0609020101020101" pitchFamily="49" charset="-127"/>
@@ -12385,7 +12462,7 @@
                         <a:t>(</a:t>
                       </a:r>
                       <a:r>
-                        <a:rPr lang="en-US" sz="1200" dirty="0">
+                        <a:rPr lang="en-US" sz="1100" dirty="0">
                           <a:effectLst/>
                           <a:latin typeface="D2Coding" panose="020B0609020101020101" pitchFamily="49" charset="-127"/>
                           <a:ea typeface="D2Coding" panose="020B0609020101020101" pitchFamily="49" charset="-127"/>
@@ -12452,7 +12529,7 @@
                         <a:buNone/>
                       </a:pPr>
                       <a:r>
-                        <a:rPr lang="ko-KR" altLang="en-US" sz="1200" dirty="0">
+                        <a:rPr lang="ko-KR" altLang="en-US" sz="1100" dirty="0">
                           <a:effectLst/>
                           <a:latin typeface="D2Coding" panose="020B0609020101020101" pitchFamily="49" charset="-127"/>
                           <a:ea typeface="D2Coding" panose="020B0609020101020101" pitchFamily="49" charset="-127"/>
@@ -12460,7 +12537,7 @@
                         <a:t>복잡한 문제를 단번에 풀지 않고</a:t>
                       </a:r>
                       <a:r>
-                        <a:rPr lang="en-US" altLang="ko-KR" sz="1200" dirty="0">
+                        <a:rPr lang="en-US" altLang="ko-KR" sz="1100" dirty="0">
                           <a:effectLst/>
                           <a:latin typeface="D2Coding" panose="020B0609020101020101" pitchFamily="49" charset="-127"/>
                           <a:ea typeface="D2Coding" panose="020B0609020101020101" pitchFamily="49" charset="-127"/>
@@ -12468,7 +12545,7 @@
                         <a:t>, </a:t>
                       </a:r>
                       <a:r>
-                        <a:rPr lang="ko-KR" altLang="en-US" sz="1200" dirty="0">
+                        <a:rPr lang="ko-KR" altLang="en-US" sz="1100" dirty="0">
                           <a:effectLst/>
                           <a:latin typeface="D2Coding" panose="020B0609020101020101" pitchFamily="49" charset="-127"/>
                           <a:ea typeface="D2Coding" panose="020B0609020101020101" pitchFamily="49" charset="-127"/>
@@ -12535,7 +12612,7 @@
                         <a:buNone/>
                       </a:pPr>
                       <a:r>
-                        <a:rPr lang="ko-KR" altLang="en-US" sz="1200" dirty="0">
+                        <a:rPr lang="ko-KR" altLang="en-US" sz="1100" dirty="0">
                           <a:effectLst/>
                           <a:latin typeface="D2Coding" panose="020B0609020101020101" pitchFamily="49" charset="-127"/>
                           <a:ea typeface="D2Coding" panose="020B0609020101020101" pitchFamily="49" charset="-127"/>
@@ -12543,7 +12620,7 @@
                         <a:t>풀이 과정을 차근차근 적는 </a:t>
                       </a:r>
                       <a:r>
-                        <a:rPr lang="en-US" altLang="ko-KR" sz="1200" dirty="0">
+                        <a:rPr lang="en-US" altLang="ko-KR" sz="1100" dirty="0">
                           <a:effectLst/>
                           <a:latin typeface="D2Coding" panose="020B0609020101020101" pitchFamily="49" charset="-127"/>
                           <a:ea typeface="D2Coding" panose="020B0609020101020101" pitchFamily="49" charset="-127"/>
@@ -12551,7 +12628,7 @@
                         <a:t>'</a:t>
                       </a:r>
                       <a:r>
-                        <a:rPr lang="ko-KR" altLang="en-US" sz="1200" dirty="0">
+                        <a:rPr lang="ko-KR" altLang="en-US" sz="1100" dirty="0">
                           <a:effectLst/>
                           <a:latin typeface="D2Coding" panose="020B0609020101020101" pitchFamily="49" charset="-127"/>
                           <a:ea typeface="D2Coding" panose="020B0609020101020101" pitchFamily="49" charset="-127"/>
@@ -12559,7 +12636,7 @@
                         <a:t>단계별 </a:t>
                       </a:r>
                       <a:r>
-                        <a:rPr lang="ko-KR" altLang="en-US" sz="1200" dirty="0" err="1">
+                        <a:rPr lang="ko-KR" altLang="en-US" sz="1100" dirty="0" err="1">
                           <a:effectLst/>
                           <a:latin typeface="D2Coding" panose="020B0609020101020101" pitchFamily="49" charset="-127"/>
                           <a:ea typeface="D2Coding" panose="020B0609020101020101" pitchFamily="49" charset="-127"/>
@@ -12567,7 +12644,7 @@
                         <a:t>서술식</a:t>
                       </a:r>
                       <a:r>
-                        <a:rPr lang="ko-KR" altLang="en-US" sz="1200" dirty="0">
+                        <a:rPr lang="ko-KR" altLang="en-US" sz="1100" dirty="0">
                           <a:effectLst/>
                           <a:latin typeface="D2Coding" panose="020B0609020101020101" pitchFamily="49" charset="-127"/>
                           <a:ea typeface="D2Coding" panose="020B0609020101020101" pitchFamily="49" charset="-127"/>
@@ -12575,7 +12652,7 @@
                         <a:t> 사고</a:t>
                       </a:r>
                       <a:r>
-                        <a:rPr lang="en-US" altLang="ko-KR" sz="1200" dirty="0">
+                        <a:rPr lang="en-US" altLang="ko-KR" sz="1100" dirty="0">
                           <a:effectLst/>
                           <a:latin typeface="D2Coding" panose="020B0609020101020101" pitchFamily="49" charset="-127"/>
                           <a:ea typeface="D2Coding" panose="020B0609020101020101" pitchFamily="49" charset="-127"/>
@@ -12637,7 +12714,7 @@
                   </a:ext>
                 </a:extLst>
               </a:tr>
-              <a:tr h="484301">
+              <a:tr h="443218">
                 <a:tc>
                   <a:txBody>
                     <a:bodyPr/>
@@ -12647,14 +12724,14 @@
                         <a:buNone/>
                       </a:pPr>
                       <a:r>
-                        <a:rPr lang="ko-KR" altLang="en-US" sz="1200" dirty="0">
+                        <a:rPr lang="ko-KR" altLang="en-US" sz="1100" dirty="0">
                           <a:effectLst/>
                           <a:latin typeface="D2Coding" panose="020B0609020101020101" pitchFamily="49" charset="-127"/>
                           <a:ea typeface="D2Coding" panose="020B0609020101020101" pitchFamily="49" charset="-127"/>
                         </a:rPr>
                         <a:t>메모리 시스템</a:t>
                       </a:r>
-                      <a:endParaRPr lang="en-US" altLang="ko-KR" sz="1200" dirty="0">
+                      <a:endParaRPr lang="en-US" altLang="ko-KR" sz="1100" dirty="0">
                         <a:effectLst/>
                         <a:latin typeface="D2Coding" panose="020B0609020101020101" pitchFamily="49" charset="-127"/>
                         <a:ea typeface="D2Coding" panose="020B0609020101020101" pitchFamily="49" charset="-127"/>
@@ -12665,7 +12742,7 @@
                         <a:buNone/>
                       </a:pPr>
                       <a:r>
-                        <a:rPr lang="en-US" altLang="ko-KR" sz="1200" dirty="0">
+                        <a:rPr lang="en-US" altLang="ko-KR" sz="1100" dirty="0">
                           <a:effectLst/>
                           <a:latin typeface="D2Coding" panose="020B0609020101020101" pitchFamily="49" charset="-127"/>
                           <a:ea typeface="D2Coding" panose="020B0609020101020101" pitchFamily="49" charset="-127"/>
@@ -12673,7 +12750,7 @@
                         <a:t>(</a:t>
                       </a:r>
                       <a:r>
-                        <a:rPr lang="en-US" sz="1200" dirty="0">
+                        <a:rPr lang="en-US" sz="1100" dirty="0">
                           <a:effectLst/>
                           <a:latin typeface="D2Coding" panose="020B0609020101020101" pitchFamily="49" charset="-127"/>
                           <a:ea typeface="D2Coding" panose="020B0609020101020101" pitchFamily="49" charset="-127"/>
@@ -12738,14 +12815,14 @@
                         <a:buNone/>
                       </a:pPr>
                       <a:r>
-                        <a:rPr lang="ko-KR" altLang="en-US" sz="1200" dirty="0">
+                        <a:rPr lang="ko-KR" altLang="en-US" sz="1100" dirty="0">
                           <a:effectLst/>
                           <a:latin typeface="D2Coding" panose="020B0609020101020101" pitchFamily="49" charset="-127"/>
                           <a:ea typeface="D2Coding" panose="020B0609020101020101" pitchFamily="49" charset="-127"/>
                         </a:rPr>
                         <a:t>기억 및 </a:t>
                       </a:r>
-                      <a:endParaRPr lang="en-US" altLang="ko-KR" sz="1200" dirty="0">
+                      <a:endParaRPr lang="en-US" altLang="ko-KR" sz="1100" dirty="0">
                         <a:effectLst/>
                         <a:latin typeface="D2Coding" panose="020B0609020101020101" pitchFamily="49" charset="-127"/>
                         <a:ea typeface="D2Coding" panose="020B0609020101020101" pitchFamily="49" charset="-127"/>
@@ -12756,7 +12833,7 @@
                         <a:buNone/>
                       </a:pPr>
                       <a:r>
-                        <a:rPr lang="ko-KR" altLang="en-US" sz="1200" dirty="0">
+                        <a:rPr lang="ko-KR" altLang="en-US" sz="1100" dirty="0">
                           <a:effectLst/>
                           <a:latin typeface="D2Coding" panose="020B0609020101020101" pitchFamily="49" charset="-127"/>
                           <a:ea typeface="D2Coding" panose="020B0609020101020101" pitchFamily="49" charset="-127"/>
@@ -12823,7 +12900,7 @@
                         <a:buNone/>
                       </a:pPr>
                       <a:r>
-                        <a:rPr lang="ko-KR" altLang="en-US" sz="1200" dirty="0">
+                        <a:rPr lang="ko-KR" altLang="en-US" sz="1100" dirty="0">
                           <a:effectLst/>
                           <a:latin typeface="D2Coding" panose="020B0609020101020101" pitchFamily="49" charset="-127"/>
                           <a:ea typeface="D2Coding" panose="020B0609020101020101" pitchFamily="49" charset="-127"/>
@@ -12831,7 +12908,7 @@
                         <a:t>대화 세션이 끝난 후에도 벡터</a:t>
                       </a:r>
                       <a:r>
-                        <a:rPr lang="en-US" altLang="ko-KR" sz="1200" dirty="0">
+                        <a:rPr lang="en-US" altLang="ko-KR" sz="1100" dirty="0">
                           <a:effectLst/>
                           <a:latin typeface="D2Coding" panose="020B0609020101020101" pitchFamily="49" charset="-127"/>
                           <a:ea typeface="D2Coding" panose="020B0609020101020101" pitchFamily="49" charset="-127"/>
@@ -12839,7 +12916,7 @@
                         <a:t>/</a:t>
                       </a:r>
                       <a:r>
-                        <a:rPr lang="ko-KR" altLang="en-US" sz="1200" dirty="0">
+                        <a:rPr lang="ko-KR" altLang="en-US" sz="1100" dirty="0">
                           <a:effectLst/>
                           <a:latin typeface="D2Coding" panose="020B0609020101020101" pitchFamily="49" charset="-127"/>
                           <a:ea typeface="D2Coding" panose="020B0609020101020101" pitchFamily="49" charset="-127"/>
@@ -12847,7 +12924,7 @@
                         <a:t>그래프 </a:t>
                       </a:r>
                       <a:r>
-                        <a:rPr lang="en-US" altLang="ko-KR" sz="1200" dirty="0">
+                        <a:rPr lang="en-US" altLang="ko-KR" sz="1100" dirty="0">
                           <a:effectLst/>
                           <a:latin typeface="D2Coding" panose="020B0609020101020101" pitchFamily="49" charset="-127"/>
                           <a:ea typeface="D2Coding" panose="020B0609020101020101" pitchFamily="49" charset="-127"/>
@@ -12855,7 +12932,7 @@
                         <a:t>DB</a:t>
                       </a:r>
                       <a:r>
-                        <a:rPr lang="ko-KR" altLang="en-US" sz="1200" dirty="0">
+                        <a:rPr lang="ko-KR" altLang="en-US" sz="1100" dirty="0">
                           <a:effectLst/>
                           <a:latin typeface="D2Coding" panose="020B0609020101020101" pitchFamily="49" charset="-127"/>
                           <a:ea typeface="D2Coding" panose="020B0609020101020101" pitchFamily="49" charset="-127"/>
@@ -12863,7 +12940,7 @@
                         <a:t>에 장기 기억</a:t>
                       </a:r>
                       <a:r>
-                        <a:rPr lang="en-US" altLang="ko-KR" sz="1200" dirty="0">
+                        <a:rPr lang="en-US" altLang="ko-KR" sz="1100" dirty="0">
                           <a:effectLst/>
                           <a:latin typeface="D2Coding" panose="020B0609020101020101" pitchFamily="49" charset="-127"/>
                           <a:ea typeface="D2Coding" panose="020B0609020101020101" pitchFamily="49" charset="-127"/>
@@ -12871,7 +12948,7 @@
                         <a:t>·</a:t>
                       </a:r>
                       <a:r>
-                        <a:rPr lang="ko-KR" altLang="en-US" sz="1200" dirty="0">
+                        <a:rPr lang="ko-KR" altLang="en-US" sz="1100" dirty="0">
                           <a:effectLst/>
                           <a:latin typeface="D2Coding" panose="020B0609020101020101" pitchFamily="49" charset="-127"/>
                           <a:ea typeface="D2Coding" panose="020B0609020101020101" pitchFamily="49" charset="-127"/>
@@ -12938,7 +13015,7 @@
                         <a:buNone/>
                       </a:pPr>
                       <a:r>
-                        <a:rPr lang="ko-KR" altLang="en-US" sz="1200" dirty="0">
+                        <a:rPr lang="ko-KR" altLang="en-US" sz="1100" dirty="0">
                           <a:effectLst/>
                           <a:latin typeface="D2Coding" panose="020B0609020101020101" pitchFamily="49" charset="-127"/>
                           <a:ea typeface="D2Coding" panose="020B0609020101020101" pitchFamily="49" charset="-127"/>
@@ -12946,7 +13023,7 @@
                         <a:t>에이전트의 </a:t>
                       </a:r>
                       <a:r>
-                        <a:rPr lang="en-US" altLang="ko-KR" sz="1200" dirty="0">
+                        <a:rPr lang="en-US" altLang="ko-KR" sz="1100" dirty="0">
                           <a:effectLst/>
                           <a:latin typeface="D2Coding" panose="020B0609020101020101" pitchFamily="49" charset="-127"/>
                           <a:ea typeface="D2Coding" panose="020B0609020101020101" pitchFamily="49" charset="-127"/>
@@ -12954,7 +13031,7 @@
                         <a:t>'</a:t>
                       </a:r>
                       <a:r>
-                        <a:rPr lang="ko-KR" altLang="en-US" sz="1200" dirty="0">
+                        <a:rPr lang="ko-KR" altLang="en-US" sz="1100" dirty="0">
                           <a:effectLst/>
                           <a:latin typeface="D2Coding" panose="020B0609020101020101" pitchFamily="49" charset="-127"/>
                           <a:ea typeface="D2Coding" panose="020B0609020101020101" pitchFamily="49" charset="-127"/>
@@ -12962,7 +13039,7 @@
                         <a:t>장</a:t>
                       </a:r>
                       <a:r>
-                        <a:rPr lang="en-US" altLang="ko-KR" sz="1200" dirty="0">
+                        <a:rPr lang="en-US" altLang="ko-KR" sz="1100" dirty="0">
                           <a:effectLst/>
                           <a:latin typeface="D2Coding" panose="020B0609020101020101" pitchFamily="49" charset="-127"/>
                           <a:ea typeface="D2Coding" panose="020B0609020101020101" pitchFamily="49" charset="-127"/>
@@ -12970,7 +13047,7 @@
                         <a:t>·</a:t>
                       </a:r>
                       <a:r>
-                        <a:rPr lang="ko-KR" altLang="en-US" sz="1200" dirty="0">
+                        <a:rPr lang="ko-KR" altLang="en-US" sz="1100" dirty="0">
                           <a:effectLst/>
                           <a:latin typeface="D2Coding" panose="020B0609020101020101" pitchFamily="49" charset="-127"/>
                           <a:ea typeface="D2Coding" panose="020B0609020101020101" pitchFamily="49" charset="-127"/>
@@ -12978,7 +13055,7 @@
                         <a:t>단기 기억 뇌</a:t>
                       </a:r>
                       <a:r>
-                        <a:rPr lang="en-US" altLang="ko-KR" sz="1200" dirty="0">
+                        <a:rPr lang="en-US" altLang="ko-KR" sz="1100" dirty="0">
                           <a:effectLst/>
                           <a:latin typeface="D2Coding" panose="020B0609020101020101" pitchFamily="49" charset="-127"/>
                           <a:ea typeface="D2Coding" panose="020B0609020101020101" pitchFamily="49" charset="-127"/>
@@ -13040,7 +13117,7 @@
                   </a:ext>
                 </a:extLst>
               </a:tr>
-              <a:tr h="484301">
+              <a:tr h="443218">
                 <a:tc>
                   <a:txBody>
                     <a:bodyPr/>
@@ -13050,14 +13127,14 @@
                         <a:buNone/>
                       </a:pPr>
                       <a:r>
-                        <a:rPr lang="ko-KR" altLang="en-US" sz="1200" dirty="0">
+                        <a:rPr lang="ko-KR" altLang="en-US" sz="1100" dirty="0">
                           <a:effectLst/>
                           <a:latin typeface="D2Coding" panose="020B0609020101020101" pitchFamily="49" charset="-127"/>
                           <a:ea typeface="D2Coding" panose="020B0609020101020101" pitchFamily="49" charset="-127"/>
                         </a:rPr>
                         <a:t>자기 성찰 및 수정</a:t>
                       </a:r>
-                      <a:endParaRPr lang="en-US" altLang="ko-KR" sz="1200" dirty="0">
+                      <a:endParaRPr lang="en-US" altLang="ko-KR" sz="1100" dirty="0">
                         <a:effectLst/>
                         <a:latin typeface="D2Coding" panose="020B0609020101020101" pitchFamily="49" charset="-127"/>
                         <a:ea typeface="D2Coding" panose="020B0609020101020101" pitchFamily="49" charset="-127"/>
@@ -13068,7 +13145,7 @@
                         <a:buNone/>
                       </a:pPr>
                       <a:r>
-                        <a:rPr lang="en-US" altLang="ko-KR" sz="1200" dirty="0">
+                        <a:rPr lang="en-US" altLang="ko-KR" sz="1100" dirty="0">
                           <a:effectLst/>
                           <a:latin typeface="D2Coding" panose="020B0609020101020101" pitchFamily="49" charset="-127"/>
                           <a:ea typeface="D2Coding" panose="020B0609020101020101" pitchFamily="49" charset="-127"/>
@@ -13076,7 +13153,7 @@
                         <a:t>(</a:t>
                       </a:r>
                       <a:r>
-                        <a:rPr lang="en-US" sz="1200" dirty="0">
+                        <a:rPr lang="en-US" sz="1100" dirty="0">
                           <a:effectLst/>
                           <a:latin typeface="D2Coding" panose="020B0609020101020101" pitchFamily="49" charset="-127"/>
                           <a:ea typeface="D2Coding" panose="020B0609020101020101" pitchFamily="49" charset="-127"/>
@@ -13141,14 +13218,14 @@
                         <a:buNone/>
                       </a:pPr>
                       <a:r>
-                        <a:rPr lang="ko-KR" altLang="en-US" sz="1200" dirty="0">
+                        <a:rPr lang="ko-KR" altLang="en-US" sz="1100" dirty="0">
                           <a:effectLst/>
                           <a:latin typeface="D2Coding" panose="020B0609020101020101" pitchFamily="49" charset="-127"/>
                           <a:ea typeface="D2Coding" panose="020B0609020101020101" pitchFamily="49" charset="-127"/>
                         </a:rPr>
                         <a:t>오류 검증 및 </a:t>
                       </a:r>
-                      <a:endParaRPr lang="en-US" altLang="ko-KR" sz="1200" dirty="0">
+                      <a:endParaRPr lang="en-US" altLang="ko-KR" sz="1100" dirty="0">
                         <a:effectLst/>
                         <a:latin typeface="D2Coding" panose="020B0609020101020101" pitchFamily="49" charset="-127"/>
                         <a:ea typeface="D2Coding" panose="020B0609020101020101" pitchFamily="49" charset="-127"/>
@@ -13159,7 +13236,7 @@
                         <a:buNone/>
                       </a:pPr>
                       <a:r>
-                        <a:rPr lang="ko-KR" altLang="en-US" sz="1200" dirty="0">
+                        <a:rPr lang="ko-KR" altLang="en-US" sz="1100" dirty="0">
                           <a:effectLst/>
                           <a:latin typeface="D2Coding" panose="020B0609020101020101" pitchFamily="49" charset="-127"/>
                           <a:ea typeface="D2Coding" panose="020B0609020101020101" pitchFamily="49" charset="-127"/>
@@ -13226,7 +13303,7 @@
                         <a:buNone/>
                       </a:pPr>
                       <a:r>
-                        <a:rPr lang="ko-KR" altLang="en-US" sz="1200" dirty="0">
+                        <a:rPr lang="ko-KR" altLang="en-US" sz="1100" dirty="0">
                           <a:effectLst/>
                           <a:latin typeface="D2Coding" panose="020B0609020101020101" pitchFamily="49" charset="-127"/>
                           <a:ea typeface="D2Coding" panose="020B0609020101020101" pitchFamily="49" charset="-127"/>
@@ -13234,7 +13311,7 @@
                         <a:t>도구 실행 결과나 에러를 스스로 분석하여 정답이 나올 때까지 코드를 수정</a:t>
                       </a:r>
                       <a:r>
-                        <a:rPr lang="en-US" altLang="ko-KR" sz="1200" dirty="0">
+                        <a:rPr lang="en-US" altLang="ko-KR" sz="1100" dirty="0">
                           <a:effectLst/>
                           <a:latin typeface="D2Coding" panose="020B0609020101020101" pitchFamily="49" charset="-127"/>
                           <a:ea typeface="D2Coding" panose="020B0609020101020101" pitchFamily="49" charset="-127"/>
@@ -13242,7 +13319,7 @@
                         <a:t>·</a:t>
                       </a:r>
                       <a:r>
-                        <a:rPr lang="ko-KR" altLang="en-US" sz="1200" dirty="0">
+                        <a:rPr lang="ko-KR" altLang="en-US" sz="1100" dirty="0">
                           <a:effectLst/>
                           <a:latin typeface="D2Coding" panose="020B0609020101020101" pitchFamily="49" charset="-127"/>
                           <a:ea typeface="D2Coding" panose="020B0609020101020101" pitchFamily="49" charset="-127"/>
@@ -13309,7 +13386,7 @@
                         <a:buNone/>
                       </a:pPr>
                       <a:r>
-                        <a:rPr lang="ko-KR" altLang="en-US" sz="1200" dirty="0">
+                        <a:rPr lang="ko-KR" altLang="en-US" sz="1100" dirty="0">
                           <a:effectLst/>
                           <a:latin typeface="D2Coding" panose="020B0609020101020101" pitchFamily="49" charset="-127"/>
                           <a:ea typeface="D2Coding" panose="020B0609020101020101" pitchFamily="49" charset="-127"/>
@@ -13317,7 +13394,7 @@
                         <a:t>스스로 채점하고 수정하는 </a:t>
                       </a:r>
                       <a:r>
-                        <a:rPr lang="en-US" altLang="ko-KR" sz="1200" dirty="0">
+                        <a:rPr lang="en-US" altLang="ko-KR" sz="1100" dirty="0">
                           <a:effectLst/>
                           <a:latin typeface="D2Coding" panose="020B0609020101020101" pitchFamily="49" charset="-127"/>
                           <a:ea typeface="D2Coding" panose="020B0609020101020101" pitchFamily="49" charset="-127"/>
@@ -13325,7 +13402,7 @@
                         <a:t>'</a:t>
                       </a:r>
                       <a:r>
-                        <a:rPr lang="ko-KR" altLang="en-US" sz="1200" dirty="0">
+                        <a:rPr lang="ko-KR" altLang="en-US" sz="1100" dirty="0">
                           <a:effectLst/>
                           <a:latin typeface="D2Coding" panose="020B0609020101020101" pitchFamily="49" charset="-127"/>
                           <a:ea typeface="D2Coding" panose="020B0609020101020101" pitchFamily="49" charset="-127"/>
@@ -13333,7 +13410,7 @@
                         <a:t>오답 노트</a:t>
                       </a:r>
                       <a:r>
-                        <a:rPr lang="en-US" altLang="ko-KR" sz="1200" dirty="0">
+                        <a:rPr lang="en-US" altLang="ko-KR" sz="1100" dirty="0">
                           <a:effectLst/>
                           <a:latin typeface="D2Coding" panose="020B0609020101020101" pitchFamily="49" charset="-127"/>
                           <a:ea typeface="D2Coding" panose="020B0609020101020101" pitchFamily="49" charset="-127"/>
@@ -13395,7 +13472,7 @@
                   </a:ext>
                 </a:extLst>
               </a:tr>
-              <a:tr h="449981">
+              <a:tr h="411809">
                 <a:tc>
                   <a:txBody>
                     <a:bodyPr/>
@@ -13405,14 +13482,14 @@
                         <a:buNone/>
                       </a:pPr>
                       <a:r>
-                        <a:rPr lang="ko-KR" altLang="en-US" sz="1200" dirty="0">
+                        <a:rPr lang="ko-KR" altLang="en-US" sz="1100" dirty="0">
                           <a:effectLst/>
                           <a:latin typeface="D2Coding" panose="020B0609020101020101" pitchFamily="49" charset="-127"/>
                           <a:ea typeface="D2Coding" panose="020B0609020101020101" pitchFamily="49" charset="-127"/>
                         </a:rPr>
                         <a:t>멀티 에이전트 협업</a:t>
                       </a:r>
-                      <a:endParaRPr lang="en-US" altLang="ko-KR" sz="1200" dirty="0">
+                      <a:endParaRPr lang="en-US" altLang="ko-KR" sz="1100" dirty="0">
                         <a:effectLst/>
                         <a:latin typeface="D2Coding" panose="020B0609020101020101" pitchFamily="49" charset="-127"/>
                         <a:ea typeface="D2Coding" panose="020B0609020101020101" pitchFamily="49" charset="-127"/>
@@ -13423,7 +13500,7 @@
                         <a:buNone/>
                       </a:pPr>
                       <a:r>
-                        <a:rPr lang="en-US" altLang="ko-KR" sz="1200" dirty="0">
+                        <a:rPr lang="en-US" altLang="ko-KR" sz="1100" dirty="0">
                           <a:effectLst/>
                           <a:latin typeface="D2Coding" panose="020B0609020101020101" pitchFamily="49" charset="-127"/>
                           <a:ea typeface="D2Coding" panose="020B0609020101020101" pitchFamily="49" charset="-127"/>
@@ -13488,14 +13565,14 @@
                         <a:buNone/>
                       </a:pPr>
                       <a:r>
-                        <a:rPr lang="ko-KR" altLang="en-US" sz="1200" dirty="0">
+                        <a:rPr lang="ko-KR" altLang="en-US" sz="1100" dirty="0">
                           <a:effectLst/>
                           <a:latin typeface="D2Coding" panose="020B0609020101020101" pitchFamily="49" charset="-127"/>
                           <a:ea typeface="D2Coding" panose="020B0609020101020101" pitchFamily="49" charset="-127"/>
                         </a:rPr>
                         <a:t>역할 분담 및 </a:t>
                       </a:r>
-                      <a:endParaRPr lang="en-US" altLang="ko-KR" sz="1200" dirty="0">
+                      <a:endParaRPr lang="en-US" altLang="ko-KR" sz="1100" dirty="0">
                         <a:effectLst/>
                         <a:latin typeface="D2Coding" panose="020B0609020101020101" pitchFamily="49" charset="-127"/>
                         <a:ea typeface="D2Coding" panose="020B0609020101020101" pitchFamily="49" charset="-127"/>
@@ -13506,7 +13583,7 @@
                         <a:buNone/>
                       </a:pPr>
                       <a:r>
-                        <a:rPr lang="ko-KR" altLang="en-US" sz="1200" dirty="0">
+                        <a:rPr lang="ko-KR" altLang="en-US" sz="1100" dirty="0">
                           <a:effectLst/>
                           <a:latin typeface="D2Coding" panose="020B0609020101020101" pitchFamily="49" charset="-127"/>
                           <a:ea typeface="D2Coding" panose="020B0609020101020101" pitchFamily="49" charset="-127"/>
@@ -13573,7 +13650,7 @@
                         <a:buNone/>
                       </a:pPr>
                       <a:r>
-                        <a:rPr lang="ko-KR" altLang="en-US" sz="1200" dirty="0">
+                        <a:rPr lang="ko-KR" altLang="en-US" sz="1100" dirty="0">
                           <a:effectLst/>
                           <a:latin typeface="D2Coding" panose="020B0609020101020101" pitchFamily="49" charset="-127"/>
                           <a:ea typeface="D2Coding" panose="020B0609020101020101" pitchFamily="49" charset="-127"/>
@@ -13581,7 +13658,7 @@
                         <a:t>기획자</a:t>
                       </a:r>
                       <a:r>
-                        <a:rPr lang="en-US" altLang="ko-KR" sz="1200" dirty="0">
+                        <a:rPr lang="en-US" altLang="ko-KR" sz="1100" dirty="0">
                           <a:effectLst/>
                           <a:latin typeface="D2Coding" panose="020B0609020101020101" pitchFamily="49" charset="-127"/>
                           <a:ea typeface="D2Coding" panose="020B0609020101020101" pitchFamily="49" charset="-127"/>
@@ -13589,7 +13666,7 @@
                         <a:t>, </a:t>
                       </a:r>
                       <a:r>
-                        <a:rPr lang="ko-KR" altLang="en-US" sz="1200" dirty="0">
+                        <a:rPr lang="ko-KR" altLang="en-US" sz="1100" dirty="0">
                           <a:effectLst/>
                           <a:latin typeface="D2Coding" panose="020B0609020101020101" pitchFamily="49" charset="-127"/>
                           <a:ea typeface="D2Coding" panose="020B0609020101020101" pitchFamily="49" charset="-127"/>
@@ -13597,7 +13674,7 @@
                         <a:t>개발자</a:t>
                       </a:r>
                       <a:r>
-                        <a:rPr lang="en-US" altLang="ko-KR" sz="1200" dirty="0">
+                        <a:rPr lang="en-US" altLang="ko-KR" sz="1100" dirty="0">
                           <a:effectLst/>
                           <a:latin typeface="D2Coding" panose="020B0609020101020101" pitchFamily="49" charset="-127"/>
                           <a:ea typeface="D2Coding" panose="020B0609020101020101" pitchFamily="49" charset="-127"/>
@@ -13605,7 +13682,7 @@
                         <a:t>, </a:t>
                       </a:r>
                       <a:r>
-                        <a:rPr lang="ko-KR" altLang="en-US" sz="1200" dirty="0" err="1">
+                        <a:rPr lang="ko-KR" altLang="en-US" sz="1100" dirty="0" err="1">
                           <a:effectLst/>
                           <a:latin typeface="D2Coding" panose="020B0609020101020101" pitchFamily="49" charset="-127"/>
                           <a:ea typeface="D2Coding" panose="020B0609020101020101" pitchFamily="49" charset="-127"/>
@@ -13613,7 +13690,7 @@
                         <a:t>검수자</a:t>
                       </a:r>
                       <a:r>
-                        <a:rPr lang="ko-KR" altLang="en-US" sz="1200" dirty="0">
+                        <a:rPr lang="ko-KR" altLang="en-US" sz="1100" dirty="0">
                           <a:effectLst/>
                           <a:latin typeface="D2Coding" panose="020B0609020101020101" pitchFamily="49" charset="-127"/>
                           <a:ea typeface="D2Coding" panose="020B0609020101020101" pitchFamily="49" charset="-127"/>
@@ -13680,7 +13757,7 @@
                         <a:buNone/>
                       </a:pPr>
                       <a:r>
-                        <a:rPr lang="ko-KR" altLang="en-US" sz="1200" dirty="0">
+                        <a:rPr lang="ko-KR" altLang="en-US" sz="1100" dirty="0">
                           <a:effectLst/>
                           <a:latin typeface="D2Coding" panose="020B0609020101020101" pitchFamily="49" charset="-127"/>
                           <a:ea typeface="D2Coding" panose="020B0609020101020101" pitchFamily="49" charset="-127"/>
@@ -13688,7 +13765,7 @@
                         <a:t>각 분야 전문가들이 모인 </a:t>
                       </a:r>
                       <a:r>
-                        <a:rPr lang="en-US" altLang="ko-KR" sz="1200" dirty="0">
+                        <a:rPr lang="en-US" altLang="ko-KR" sz="1100" dirty="0">
                           <a:effectLst/>
                           <a:latin typeface="D2Coding" panose="020B0609020101020101" pitchFamily="49" charset="-127"/>
                           <a:ea typeface="D2Coding" panose="020B0609020101020101" pitchFamily="49" charset="-127"/>
@@ -13696,7 +13773,7 @@
                         <a:t>'</a:t>
                       </a:r>
                       <a:r>
-                        <a:rPr lang="ko-KR" altLang="en-US" sz="1200" dirty="0">
+                        <a:rPr lang="ko-KR" altLang="en-US" sz="1100" dirty="0">
                           <a:effectLst/>
                           <a:latin typeface="D2Coding" panose="020B0609020101020101" pitchFamily="49" charset="-127"/>
                           <a:ea typeface="D2Coding" panose="020B0609020101020101" pitchFamily="49" charset="-127"/>
@@ -13704,7 +13781,7 @@
                         <a:t>프로젝트 팀</a:t>
                       </a:r>
                       <a:r>
-                        <a:rPr lang="en-US" altLang="ko-KR" sz="1200" dirty="0">
+                        <a:rPr lang="en-US" altLang="ko-KR" sz="1100" dirty="0">
                           <a:effectLst/>
                           <a:latin typeface="D2Coding" panose="020B0609020101020101" pitchFamily="49" charset="-127"/>
                           <a:ea typeface="D2Coding" panose="020B0609020101020101" pitchFamily="49" charset="-127"/>
@@ -13766,7 +13843,7 @@
                   </a:ext>
                 </a:extLst>
               </a:tr>
-              <a:tr h="518622">
+              <a:tr h="474626">
                 <a:tc>
                   <a:txBody>
                     <a:bodyPr/>
@@ -13776,14 +13853,14 @@
                         <a:buNone/>
                       </a:pPr>
                       <a:r>
-                        <a:rPr lang="ko-KR" altLang="en-US" sz="1200" dirty="0">
+                        <a:rPr lang="ko-KR" altLang="en-US" sz="1100" dirty="0">
                           <a:effectLst/>
                           <a:latin typeface="D2Coding" panose="020B0609020101020101" pitchFamily="49" charset="-127"/>
                           <a:ea typeface="D2Coding" panose="020B0609020101020101" pitchFamily="49" charset="-127"/>
                         </a:rPr>
                         <a:t>고급 탐색 계획</a:t>
                       </a:r>
-                      <a:endParaRPr lang="en-US" altLang="ko-KR" sz="1200" dirty="0">
+                      <a:endParaRPr lang="en-US" altLang="ko-KR" sz="1100" dirty="0">
                         <a:effectLst/>
                         <a:latin typeface="D2Coding" panose="020B0609020101020101" pitchFamily="49" charset="-127"/>
                         <a:ea typeface="D2Coding" panose="020B0609020101020101" pitchFamily="49" charset="-127"/>
@@ -13794,7 +13871,7 @@
                         <a:buNone/>
                       </a:pPr>
                       <a:r>
-                        <a:rPr lang="en-US" altLang="ko-KR" sz="1200" dirty="0">
+                        <a:rPr lang="en-US" altLang="ko-KR" sz="1100" dirty="0">
                           <a:effectLst/>
                           <a:latin typeface="D2Coding" panose="020B0609020101020101" pitchFamily="49" charset="-127"/>
                           <a:ea typeface="D2Coding" panose="020B0609020101020101" pitchFamily="49" charset="-127"/>
@@ -13802,7 +13879,7 @@
                         <a:t>(</a:t>
                       </a:r>
                       <a:r>
-                        <a:rPr lang="en-US" sz="1200" dirty="0" err="1">
+                        <a:rPr lang="en-US" sz="1100" dirty="0" err="1">
                           <a:effectLst/>
                           <a:latin typeface="D2Coding" panose="020B0609020101020101" pitchFamily="49" charset="-127"/>
                           <a:ea typeface="D2Coding" panose="020B0609020101020101" pitchFamily="49" charset="-127"/>
@@ -13810,7 +13887,7 @@
                         <a:t>ToT</a:t>
                       </a:r>
                       <a:r>
-                        <a:rPr lang="en-US" sz="1200" dirty="0">
+                        <a:rPr lang="en-US" sz="1100" dirty="0">
                           <a:effectLst/>
                           <a:latin typeface="D2Coding" panose="020B0609020101020101" pitchFamily="49" charset="-127"/>
                           <a:ea typeface="D2Coding" panose="020B0609020101020101" pitchFamily="49" charset="-127"/>
@@ -13818,7 +13895,7 @@
                         <a:t> / </a:t>
                       </a:r>
                       <a:r>
-                        <a:rPr lang="en-US" sz="1200" dirty="0" err="1">
+                        <a:rPr lang="en-US" sz="1100" dirty="0" err="1">
                           <a:effectLst/>
                           <a:latin typeface="D2Coding" panose="020B0609020101020101" pitchFamily="49" charset="-127"/>
                           <a:ea typeface="D2Coding" panose="020B0609020101020101" pitchFamily="49" charset="-127"/>
@@ -13826,7 +13903,7 @@
                         <a:t>GoT</a:t>
                       </a:r>
                       <a:r>
-                        <a:rPr lang="en-US" sz="1200" dirty="0">
+                        <a:rPr lang="en-US" sz="1100" dirty="0">
                           <a:effectLst/>
                           <a:latin typeface="D2Coding" panose="020B0609020101020101" pitchFamily="49" charset="-127"/>
                           <a:ea typeface="D2Coding" panose="020B0609020101020101" pitchFamily="49" charset="-127"/>
@@ -13891,14 +13968,14 @@
                         <a:buNone/>
                       </a:pPr>
                       <a:r>
-                        <a:rPr lang="ko-KR" altLang="en-US" sz="1200" dirty="0">
+                        <a:rPr lang="ko-KR" altLang="en-US" sz="1100" dirty="0">
                           <a:effectLst/>
                           <a:latin typeface="D2Coding" panose="020B0609020101020101" pitchFamily="49" charset="-127"/>
                           <a:ea typeface="D2Coding" panose="020B0609020101020101" pitchFamily="49" charset="-127"/>
                         </a:rPr>
                         <a:t>비선형 탐색 및 </a:t>
                       </a:r>
-                      <a:endParaRPr lang="en-US" altLang="ko-KR" sz="1200" dirty="0">
+                      <a:endParaRPr lang="en-US" altLang="ko-KR" sz="1100" dirty="0">
                         <a:effectLst/>
                         <a:latin typeface="D2Coding" panose="020B0609020101020101" pitchFamily="49" charset="-127"/>
                         <a:ea typeface="D2Coding" panose="020B0609020101020101" pitchFamily="49" charset="-127"/>
@@ -13909,7 +13986,7 @@
                         <a:buNone/>
                       </a:pPr>
                       <a:r>
-                        <a:rPr lang="ko-KR" altLang="en-US" sz="1200" dirty="0">
+                        <a:rPr lang="ko-KR" altLang="en-US" sz="1100" dirty="0">
                           <a:effectLst/>
                           <a:latin typeface="D2Coding" panose="020B0609020101020101" pitchFamily="49" charset="-127"/>
                           <a:ea typeface="D2Coding" panose="020B0609020101020101" pitchFamily="49" charset="-127"/>
@@ -13976,7 +14053,7 @@
                         <a:buNone/>
                       </a:pPr>
                       <a:r>
-                        <a:rPr lang="ko-KR" altLang="en-US" sz="1200" dirty="0">
+                        <a:rPr lang="ko-KR" altLang="en-US" sz="1100" dirty="0">
                           <a:effectLst/>
                           <a:latin typeface="D2Coding" panose="020B0609020101020101" pitchFamily="49" charset="-127"/>
                           <a:ea typeface="D2Coding" panose="020B0609020101020101" pitchFamily="49" charset="-127"/>
@@ -13984,7 +14061,7 @@
                         <a:t>단선적 추론을 넘어 트리</a:t>
                       </a:r>
                       <a:r>
-                        <a:rPr lang="en-US" altLang="ko-KR" sz="1200" dirty="0">
+                        <a:rPr lang="en-US" altLang="ko-KR" sz="1100" dirty="0">
                           <a:effectLst/>
                           <a:latin typeface="D2Coding" panose="020B0609020101020101" pitchFamily="49" charset="-127"/>
                           <a:ea typeface="D2Coding" panose="020B0609020101020101" pitchFamily="49" charset="-127"/>
@@ -13992,7 +14069,7 @@
                         <a:t>/</a:t>
                       </a:r>
                       <a:r>
-                        <a:rPr lang="ko-KR" altLang="en-US" sz="1200" dirty="0">
+                        <a:rPr lang="ko-KR" altLang="en-US" sz="1100" dirty="0">
                           <a:effectLst/>
                           <a:latin typeface="D2Coding" panose="020B0609020101020101" pitchFamily="49" charset="-127"/>
                           <a:ea typeface="D2Coding" panose="020B0609020101020101" pitchFamily="49" charset="-127"/>
@@ -14059,7 +14136,7 @@
                         <a:buNone/>
                       </a:pPr>
                       <a:r>
-                        <a:rPr lang="ko-KR" altLang="en-US" sz="1200" dirty="0">
+                        <a:rPr lang="ko-KR" altLang="en-US" sz="1100" dirty="0">
                           <a:effectLst/>
                           <a:latin typeface="D2Coding" panose="020B0609020101020101" pitchFamily="49" charset="-127"/>
                           <a:ea typeface="D2Coding" panose="020B0609020101020101" pitchFamily="49" charset="-127"/>
@@ -14067,7 +14144,7 @@
                         <a:t>체스나 바둑을 둘 때 </a:t>
                       </a:r>
                       <a:r>
-                        <a:rPr lang="en-US" altLang="ko-KR" sz="1200" dirty="0">
+                        <a:rPr lang="en-US" altLang="ko-KR" sz="1100" dirty="0">
                           <a:effectLst/>
                           <a:latin typeface="D2Coding" panose="020B0609020101020101" pitchFamily="49" charset="-127"/>
                           <a:ea typeface="D2Coding" panose="020B0609020101020101" pitchFamily="49" charset="-127"/>
@@ -14075,7 +14152,7 @@
                         <a:t>'</a:t>
                       </a:r>
                       <a:r>
-                        <a:rPr lang="ko-KR" altLang="en-US" sz="1200" dirty="0">
+                        <a:rPr lang="ko-KR" altLang="en-US" sz="1100" dirty="0">
                           <a:effectLst/>
                           <a:latin typeface="D2Coding" panose="020B0609020101020101" pitchFamily="49" charset="-127"/>
                           <a:ea typeface="D2Coding" panose="020B0609020101020101" pitchFamily="49" charset="-127"/>
@@ -14083,7 +14160,7 @@
                         <a:t>몇 수 앞을 미리 보는 전략</a:t>
                       </a:r>
                       <a:r>
-                        <a:rPr lang="en-US" altLang="ko-KR" sz="1200" dirty="0">
+                        <a:rPr lang="en-US" altLang="ko-KR" sz="1100" dirty="0">
                           <a:effectLst/>
                           <a:latin typeface="D2Coding" panose="020B0609020101020101" pitchFamily="49" charset="-127"/>
                           <a:ea typeface="D2Coding" panose="020B0609020101020101" pitchFamily="49" charset="-127"/>
@@ -14145,7 +14222,7 @@
                   </a:ext>
                 </a:extLst>
               </a:tr>
-              <a:tr h="518622">
+              <a:tr h="474626">
                 <a:tc>
                   <a:txBody>
                     <a:bodyPr/>
@@ -14155,14 +14232,14 @@
                         <a:buNone/>
                       </a:pPr>
                       <a:r>
-                        <a:rPr lang="ko-KR" altLang="en-US" sz="1200" dirty="0">
+                        <a:rPr lang="ko-KR" altLang="en-US" sz="1100" dirty="0">
                           <a:effectLst/>
                           <a:latin typeface="D2Coding" panose="020B0609020101020101" pitchFamily="49" charset="-127"/>
                           <a:ea typeface="D2Coding" panose="020B0609020101020101" pitchFamily="49" charset="-127"/>
                         </a:rPr>
                         <a:t>컴퓨터 조작</a:t>
                       </a:r>
-                      <a:endParaRPr lang="en-US" altLang="ko-KR" sz="1200" dirty="0">
+                      <a:endParaRPr lang="en-US" altLang="ko-KR" sz="1100" dirty="0">
                         <a:effectLst/>
                         <a:latin typeface="D2Coding" panose="020B0609020101020101" pitchFamily="49" charset="-127"/>
                         <a:ea typeface="D2Coding" panose="020B0609020101020101" pitchFamily="49" charset="-127"/>
@@ -14173,7 +14250,7 @@
                         <a:buNone/>
                       </a:pPr>
                       <a:r>
-                        <a:rPr lang="en-US" altLang="ko-KR" sz="1200" dirty="0">
+                        <a:rPr lang="en-US" altLang="ko-KR" sz="1100" dirty="0">
                           <a:effectLst/>
                           <a:latin typeface="D2Coding" panose="020B0609020101020101" pitchFamily="49" charset="-127"/>
                           <a:ea typeface="D2Coding" panose="020B0609020101020101" pitchFamily="49" charset="-127"/>
@@ -14181,7 +14258,7 @@
                         <a:t>(</a:t>
                       </a:r>
                       <a:r>
-                        <a:rPr lang="en-US" sz="1200" dirty="0">
+                        <a:rPr lang="en-US" sz="1100" dirty="0">
                           <a:effectLst/>
                           <a:latin typeface="D2Coding" panose="020B0609020101020101" pitchFamily="49" charset="-127"/>
                           <a:ea typeface="D2Coding" panose="020B0609020101020101" pitchFamily="49" charset="-127"/>
@@ -14246,7 +14323,7 @@
                         <a:buNone/>
                       </a:pPr>
                       <a:r>
-                        <a:rPr lang="en-US" sz="1200" dirty="0">
+                        <a:rPr lang="en-US" sz="1100" dirty="0">
                           <a:effectLst/>
                           <a:latin typeface="D2Coding" panose="020B0609020101020101" pitchFamily="49" charset="-127"/>
                           <a:ea typeface="D2Coding" panose="020B0609020101020101" pitchFamily="49" charset="-127"/>
@@ -14254,7 +14331,7 @@
                         <a:t>GUI </a:t>
                       </a:r>
                       <a:r>
-                        <a:rPr lang="ko-KR" altLang="en-US" sz="1200" dirty="0">
+                        <a:rPr lang="ko-KR" altLang="en-US" sz="1100" dirty="0">
                           <a:effectLst/>
                           <a:latin typeface="D2Coding" panose="020B0609020101020101" pitchFamily="49" charset="-127"/>
                           <a:ea typeface="D2Coding" panose="020B0609020101020101" pitchFamily="49" charset="-127"/>
@@ -14321,7 +14398,7 @@
                         <a:buNone/>
                       </a:pPr>
                       <a:r>
-                        <a:rPr lang="ko-KR" altLang="en-US" sz="1200" dirty="0">
+                        <a:rPr lang="ko-KR" altLang="en-US" sz="1100" dirty="0">
                           <a:effectLst/>
                           <a:latin typeface="D2Coding" panose="020B0609020101020101" pitchFamily="49" charset="-127"/>
                           <a:ea typeface="D2Coding" panose="020B0609020101020101" pitchFamily="49" charset="-127"/>
@@ -14329,7 +14406,7 @@
                         <a:t>화면 스크린샷을 시각적으로 인식해 </a:t>
                       </a:r>
                       <a:r>
-                        <a:rPr lang="en-US" altLang="ko-KR" sz="1200" dirty="0">
+                        <a:rPr lang="en-US" altLang="ko-KR" sz="1100" dirty="0">
                           <a:effectLst/>
                           <a:latin typeface="D2Coding" panose="020B0609020101020101" pitchFamily="49" charset="-127"/>
                           <a:ea typeface="D2Coding" panose="020B0609020101020101" pitchFamily="49" charset="-127"/>
@@ -14337,7 +14414,7 @@
                         <a:t>API</a:t>
                       </a:r>
                       <a:r>
-                        <a:rPr lang="ko-KR" altLang="en-US" sz="1200" dirty="0">
+                        <a:rPr lang="ko-KR" altLang="en-US" sz="1100" dirty="0">
                           <a:effectLst/>
                           <a:latin typeface="D2Coding" panose="020B0609020101020101" pitchFamily="49" charset="-127"/>
                           <a:ea typeface="D2Coding" panose="020B0609020101020101" pitchFamily="49" charset="-127"/>
@@ -14345,7 +14422,7 @@
                         <a:t>가 없는 프로그램의 마우스</a:t>
                       </a:r>
                       <a:r>
-                        <a:rPr lang="en-US" altLang="ko-KR" sz="1200" dirty="0">
+                        <a:rPr lang="en-US" altLang="ko-KR" sz="1100" dirty="0">
                           <a:effectLst/>
                           <a:latin typeface="D2Coding" panose="020B0609020101020101" pitchFamily="49" charset="-127"/>
                           <a:ea typeface="D2Coding" panose="020B0609020101020101" pitchFamily="49" charset="-127"/>
@@ -14353,7 +14430,7 @@
                         <a:t>·</a:t>
                       </a:r>
                       <a:r>
-                        <a:rPr lang="ko-KR" altLang="en-US" sz="1200" dirty="0">
+                        <a:rPr lang="ko-KR" altLang="en-US" sz="1100" dirty="0">
                           <a:effectLst/>
                           <a:latin typeface="D2Coding" panose="020B0609020101020101" pitchFamily="49" charset="-127"/>
                           <a:ea typeface="D2Coding" panose="020B0609020101020101" pitchFamily="49" charset="-127"/>
@@ -14420,7 +14497,7 @@
                         <a:buNone/>
                       </a:pPr>
                       <a:r>
-                        <a:rPr lang="ko-KR" altLang="en-US" sz="1200" dirty="0">
+                        <a:rPr lang="ko-KR" altLang="en-US" sz="1100" dirty="0">
                           <a:effectLst/>
                           <a:latin typeface="D2Coding" panose="020B0609020101020101" pitchFamily="49" charset="-127"/>
                           <a:ea typeface="D2Coding" panose="020B0609020101020101" pitchFamily="49" charset="-127"/>
@@ -14428,7 +14505,7 @@
                         <a:t>모니터를 보며 마우스를 잡은 </a:t>
                       </a:r>
                       <a:r>
-                        <a:rPr lang="en-US" altLang="ko-KR" sz="1200" dirty="0">
+                        <a:rPr lang="en-US" altLang="ko-KR" sz="1100" dirty="0">
                           <a:effectLst/>
                           <a:latin typeface="D2Coding" panose="020B0609020101020101" pitchFamily="49" charset="-127"/>
                           <a:ea typeface="D2Coding" panose="020B0609020101020101" pitchFamily="49" charset="-127"/>
@@ -14436,7 +14513,7 @@
                         <a:t>'</a:t>
                       </a:r>
                       <a:r>
-                        <a:rPr lang="ko-KR" altLang="en-US" sz="1200" dirty="0">
+                        <a:rPr lang="ko-KR" altLang="en-US" sz="1100" dirty="0">
                           <a:effectLst/>
                           <a:latin typeface="D2Coding" panose="020B0609020101020101" pitchFamily="49" charset="-127"/>
                           <a:ea typeface="D2Coding" panose="020B0609020101020101" pitchFamily="49" charset="-127"/>
@@ -14444,7 +14521,7 @@
                         <a:t>사람의 신체</a:t>
                       </a:r>
                       <a:r>
-                        <a:rPr lang="en-US" altLang="ko-KR" sz="1200" dirty="0">
+                        <a:rPr lang="en-US" altLang="ko-KR" sz="1100" dirty="0">
                           <a:effectLst/>
                           <a:latin typeface="D2Coding" panose="020B0609020101020101" pitchFamily="49" charset="-127"/>
                           <a:ea typeface="D2Coding" panose="020B0609020101020101" pitchFamily="49" charset="-127"/>
@@ -14506,7 +14583,7 @@
                   </a:ext>
                 </a:extLst>
               </a:tr>
-              <a:tr h="449981">
+              <a:tr h="411809">
                 <a:tc>
                   <a:txBody>
                     <a:bodyPr/>
@@ -14516,7 +14593,7 @@
                         <a:buNone/>
                       </a:pPr>
                       <a:r>
-                        <a:rPr lang="ko-KR" altLang="en-US" sz="1200" dirty="0" err="1">
+                        <a:rPr lang="ko-KR" altLang="en-US" sz="1100" dirty="0" err="1">
                           <a:effectLst/>
                           <a:latin typeface="D2Coding" panose="020B0609020101020101" pitchFamily="49" charset="-127"/>
                           <a:ea typeface="D2Coding" panose="020B0609020101020101" pitchFamily="49" charset="-127"/>
@@ -14524,7 +14601,7 @@
                         <a:t>에이전틱</a:t>
                       </a:r>
                       <a:r>
-                        <a:rPr lang="ko-KR" altLang="en-US" sz="1200" dirty="0">
+                        <a:rPr lang="ko-KR" altLang="en-US" sz="1100" dirty="0">
                           <a:effectLst/>
                           <a:latin typeface="D2Coding" panose="020B0609020101020101" pitchFamily="49" charset="-127"/>
                           <a:ea typeface="D2Coding" panose="020B0609020101020101" pitchFamily="49" charset="-127"/>
@@ -14532,7 +14609,7 @@
                         <a:t> </a:t>
                       </a:r>
                       <a:r>
-                        <a:rPr lang="en-US" sz="1200" dirty="0">
+                        <a:rPr lang="en-US" sz="1100" dirty="0">
                           <a:effectLst/>
                           <a:latin typeface="D2Coding" panose="020B0609020101020101" pitchFamily="49" charset="-127"/>
                           <a:ea typeface="D2Coding" panose="020B0609020101020101" pitchFamily="49" charset="-127"/>
@@ -14545,7 +14622,7 @@
                         <a:buNone/>
                       </a:pPr>
                       <a:r>
-                        <a:rPr lang="en-US" sz="1200" dirty="0">
+                        <a:rPr lang="en-US" sz="1100" dirty="0">
                           <a:effectLst/>
                           <a:latin typeface="D2Coding" panose="020B0609020101020101" pitchFamily="49" charset="-127"/>
                           <a:ea typeface="D2Coding" panose="020B0609020101020101" pitchFamily="49" charset="-127"/>
@@ -14610,7 +14687,7 @@
                         <a:buNone/>
                       </a:pPr>
                       <a:r>
-                        <a:rPr lang="ko-KR" altLang="en-US" sz="1200" dirty="0">
+                        <a:rPr lang="ko-KR" altLang="en-US" sz="1100" dirty="0">
                           <a:effectLst/>
                           <a:latin typeface="D2Coding" panose="020B0609020101020101" pitchFamily="49" charset="-127"/>
                           <a:ea typeface="D2Coding" panose="020B0609020101020101" pitchFamily="49" charset="-127"/>
@@ -14677,7 +14754,7 @@
                         <a:buNone/>
                       </a:pPr>
                       <a:r>
-                        <a:rPr lang="ko-KR" altLang="en-US" sz="1200" dirty="0">
+                        <a:rPr lang="ko-KR" altLang="en-US" sz="1100" dirty="0">
                           <a:effectLst/>
                           <a:latin typeface="D2Coding" panose="020B0609020101020101" pitchFamily="49" charset="-127"/>
                           <a:ea typeface="D2Coding" panose="020B0609020101020101" pitchFamily="49" charset="-127"/>
@@ -14685,7 +14762,7 @@
                         <a:t>단발성 검색에 그치지 않고</a:t>
                       </a:r>
                       <a:r>
-                        <a:rPr lang="en-US" altLang="ko-KR" sz="1200" dirty="0">
+                        <a:rPr lang="en-US" altLang="ko-KR" sz="1100" dirty="0">
                           <a:effectLst/>
                           <a:latin typeface="D2Coding" panose="020B0609020101020101" pitchFamily="49" charset="-127"/>
                           <a:ea typeface="D2Coding" panose="020B0609020101020101" pitchFamily="49" charset="-127"/>
@@ -14693,7 +14770,7 @@
                         <a:t>, </a:t>
                       </a:r>
                       <a:r>
-                        <a:rPr lang="ko-KR" altLang="en-US" sz="1200" dirty="0">
+                        <a:rPr lang="ko-KR" altLang="en-US" sz="1100" dirty="0">
                           <a:effectLst/>
                           <a:latin typeface="D2Coding" panose="020B0609020101020101" pitchFamily="49" charset="-127"/>
                           <a:ea typeface="D2Coding" panose="020B0609020101020101" pitchFamily="49" charset="-127"/>
@@ -14760,7 +14837,7 @@
                         <a:buNone/>
                       </a:pPr>
                       <a:r>
-                        <a:rPr lang="ko-KR" altLang="en-US" sz="1200" dirty="0">
+                        <a:rPr lang="ko-KR" altLang="en-US" sz="1100" dirty="0">
                           <a:effectLst/>
                           <a:latin typeface="D2Coding" panose="020B0609020101020101" pitchFamily="49" charset="-127"/>
                           <a:ea typeface="D2Coding" panose="020B0609020101020101" pitchFamily="49" charset="-127"/>
@@ -14768,7 +14845,7 @@
                         <a:t>도서관에서 관련 자료를 계속 찾아 읽는 </a:t>
                       </a:r>
                       <a:r>
-                        <a:rPr lang="en-US" altLang="ko-KR" sz="1200" dirty="0">
+                        <a:rPr lang="en-US" altLang="ko-KR" sz="1100" dirty="0">
                           <a:effectLst/>
                           <a:latin typeface="D2Coding" panose="020B0609020101020101" pitchFamily="49" charset="-127"/>
                           <a:ea typeface="D2Coding" panose="020B0609020101020101" pitchFamily="49" charset="-127"/>
@@ -14776,7 +14853,7 @@
                         <a:t>'</a:t>
                       </a:r>
                       <a:r>
-                        <a:rPr lang="ko-KR" altLang="en-US" sz="1200" dirty="0">
+                        <a:rPr lang="ko-KR" altLang="en-US" sz="1100" dirty="0">
                           <a:effectLst/>
                           <a:latin typeface="D2Coding" panose="020B0609020101020101" pitchFamily="49" charset="-127"/>
                           <a:ea typeface="D2Coding" panose="020B0609020101020101" pitchFamily="49" charset="-127"/>
@@ -14784,7 +14861,7 @@
                         <a:t>연구원</a:t>
                       </a:r>
                       <a:r>
-                        <a:rPr lang="en-US" altLang="ko-KR" sz="1200" dirty="0">
+                        <a:rPr lang="en-US" altLang="ko-KR" sz="1100" dirty="0">
                           <a:effectLst/>
                           <a:latin typeface="D2Coding" panose="020B0609020101020101" pitchFamily="49" charset="-127"/>
                           <a:ea typeface="D2Coding" panose="020B0609020101020101" pitchFamily="49" charset="-127"/>
@@ -14865,7 +14942,7 @@
         <p:spPr>
           <a:xfrm>
             <a:off x="484564" y="1205833"/>
-            <a:ext cx="11069260" cy="1162498"/>
+            <a:ext cx="11069260" cy="1028808"/>
           </a:xfrm>
           <a:prstGeom prst="rect">
             <a:avLst/>
@@ -14884,49 +14961,49 @@
               </a:lnSpc>
             </a:pPr>
             <a:r>
-              <a:rPr lang="ko-KR" altLang="en-US" sz="1600" dirty="0">
+              <a:rPr lang="ko-KR" altLang="en-US" sz="1400" dirty="0">
                 <a:latin typeface="D2Coding" panose="020B0609020101020101" pitchFamily="49" charset="-127"/>
                 <a:ea typeface="D2Coding" panose="020B0609020101020101" pitchFamily="49" charset="-127"/>
               </a:rPr>
               <a:t>[도구 호출 + </a:t>
             </a:r>
             <a:r>
-              <a:rPr lang="ko-KR" altLang="en-US" sz="1600" dirty="0" err="1">
+              <a:rPr lang="ko-KR" altLang="en-US" sz="1400" dirty="0" err="1">
                 <a:latin typeface="D2Coding" panose="020B0609020101020101" pitchFamily="49" charset="-127"/>
                 <a:ea typeface="D2Coding" panose="020B0609020101020101" pitchFamily="49" charset="-127"/>
               </a:rPr>
               <a:t>CoT</a:t>
             </a:r>
             <a:r>
-              <a:rPr lang="ko-KR" altLang="en-US" sz="1600" dirty="0">
+              <a:rPr lang="ko-KR" altLang="en-US" sz="1400" dirty="0">
                 <a:latin typeface="D2Coding" panose="020B0609020101020101" pitchFamily="49" charset="-127"/>
                 <a:ea typeface="D2Coding" panose="020B0609020101020101" pitchFamily="49" charset="-127"/>
               </a:rPr>
               <a:t>]가 에이전트의 가장 기본인 "생각하고 </a:t>
             </a:r>
             <a:r>
-              <a:rPr lang="ko-KR" altLang="en-US" sz="1600" dirty="0" err="1">
+              <a:rPr lang="ko-KR" altLang="en-US" sz="1400" dirty="0" err="1">
                 <a:latin typeface="D2Coding" panose="020B0609020101020101" pitchFamily="49" charset="-127"/>
                 <a:ea typeface="D2Coding" panose="020B0609020101020101" pitchFamily="49" charset="-127"/>
               </a:rPr>
               <a:t>실행한다"의</a:t>
             </a:r>
             <a:r>
-              <a:rPr lang="ko-KR" altLang="en-US" sz="1600" dirty="0">
+              <a:rPr lang="ko-KR" altLang="en-US" sz="1400" dirty="0">
                 <a:latin typeface="D2Coding" panose="020B0609020101020101" pitchFamily="49" charset="-127"/>
                 <a:ea typeface="D2Coding" panose="020B0609020101020101" pitchFamily="49" charset="-127"/>
               </a:rPr>
               <a:t> 루프를 형성하고 [메모리, 자기성찰, 탐색계획, </a:t>
             </a:r>
             <a:r>
-              <a:rPr lang="ko-KR" altLang="en-US" sz="1600" dirty="0" err="1">
+              <a:rPr lang="ko-KR" altLang="en-US" sz="1400" dirty="0" err="1">
                 <a:latin typeface="D2Coding" panose="020B0609020101020101" pitchFamily="49" charset="-127"/>
                 <a:ea typeface="D2Coding" panose="020B0609020101020101" pitchFamily="49" charset="-127"/>
               </a:rPr>
               <a:t>에이전틱</a:t>
             </a:r>
             <a:r>
-              <a:rPr lang="ko-KR" altLang="en-US" sz="1600" dirty="0">
+              <a:rPr lang="ko-KR" altLang="en-US" sz="1400" dirty="0">
                 <a:latin typeface="D2Coding" panose="020B0609020101020101" pitchFamily="49" charset="-127"/>
                 <a:ea typeface="D2Coding" panose="020B0609020101020101" pitchFamily="49" charset="-127"/>
               </a:rPr>
@@ -15297,7 +15374,7 @@
           <p:nvPr>
             <p:extLst>
               <p:ext uri="{D42A27DB-BD31-4B8C-83A1-F6EECF244321}">
-                <p14:modId xmlns:p14="http://schemas.microsoft.com/office/powerpoint/2010/main" val="742369643"/>
+                <p14:modId xmlns:p14="http://schemas.microsoft.com/office/powerpoint/2010/main" val="2804487611"/>
               </p:ext>
             </p:extLst>
           </p:nvPr>
@@ -15343,7 +15420,7 @@
                         <a:buNone/>
                       </a:pPr>
                       <a:r>
-                        <a:rPr lang="ko-KR" altLang="en-US" sz="1600" dirty="0">
+                        <a:rPr lang="ko-KR" altLang="en-US" sz="1400" dirty="0">
                           <a:effectLst/>
                           <a:latin typeface="D2Coding" panose="020B0609020101020101" pitchFamily="49" charset="-127"/>
                           <a:ea typeface="D2Coding" panose="020B0609020101020101" pitchFamily="49" charset="-127"/>
@@ -15409,7 +15486,7 @@
                         <a:buNone/>
                       </a:pPr>
                       <a:r>
-                        <a:rPr lang="ko-KR" altLang="en-US" sz="1600" dirty="0">
+                        <a:rPr lang="ko-KR" altLang="en-US" sz="1400" dirty="0">
                           <a:effectLst/>
                           <a:latin typeface="D2Coding" panose="020B0609020101020101" pitchFamily="49" charset="-127"/>
                           <a:ea typeface="D2Coding" panose="020B0609020101020101" pitchFamily="49" charset="-127"/>
@@ -15477,7 +15554,7 @@
                         <a:buNone/>
                       </a:pPr>
                       <a:r>
-                        <a:rPr lang="ko-KR" altLang="en-US" sz="1600" dirty="0">
+                        <a:rPr lang="ko-KR" altLang="en-US" sz="1400" dirty="0">
                           <a:effectLst/>
                           <a:latin typeface="D2Coding" panose="020B0609020101020101" pitchFamily="49" charset="-127"/>
                           <a:ea typeface="D2Coding" panose="020B0609020101020101" pitchFamily="49" charset="-127"/>
@@ -15550,7 +15627,7 @@
                         <a:buNone/>
                       </a:pPr>
                       <a:r>
-                        <a:rPr lang="ko-KR" altLang="en-US" sz="1600" dirty="0">
+                        <a:rPr lang="ko-KR" altLang="en-US" sz="1400" dirty="0">
                           <a:effectLst/>
                           <a:latin typeface="D2Coding" panose="020B0609020101020101" pitchFamily="49" charset="-127"/>
                           <a:ea typeface="D2Coding" panose="020B0609020101020101" pitchFamily="49" charset="-127"/>
@@ -15612,7 +15689,7 @@
                         <a:buNone/>
                       </a:pPr>
                       <a:r>
-                        <a:rPr lang="en-US" sz="1600" dirty="0" err="1">
+                        <a:rPr lang="en-US" sz="1400" dirty="0" err="1">
                           <a:effectLst/>
                           <a:latin typeface="D2Coding" panose="020B0609020101020101" pitchFamily="49" charset="-127"/>
                           <a:ea typeface="D2Coding" panose="020B0609020101020101" pitchFamily="49" charset="-127"/>
@@ -15620,7 +15697,7 @@
                         <a:t>CoT</a:t>
                       </a:r>
                       <a:r>
-                        <a:rPr lang="en-US" sz="1600" dirty="0">
+                        <a:rPr lang="en-US" sz="1400" dirty="0">
                           <a:effectLst/>
                           <a:latin typeface="D2Coding" panose="020B0609020101020101" pitchFamily="49" charset="-127"/>
                           <a:ea typeface="D2Coding" panose="020B0609020101020101" pitchFamily="49" charset="-127"/>
@@ -15628,7 +15705,7 @@
                         <a:t>, </a:t>
                       </a:r>
                       <a:r>
-                        <a:rPr lang="en-US" sz="1600" dirty="0" err="1">
+                        <a:rPr lang="en-US" sz="1400" dirty="0" err="1">
                           <a:effectLst/>
                           <a:latin typeface="D2Coding" panose="020B0609020101020101" pitchFamily="49" charset="-127"/>
                           <a:ea typeface="D2Coding" panose="020B0609020101020101" pitchFamily="49" charset="-127"/>
@@ -15636,7 +15713,7 @@
                         <a:t>ToT</a:t>
                       </a:r>
                       <a:r>
-                        <a:rPr lang="en-US" sz="1600" dirty="0">
+                        <a:rPr lang="en-US" sz="1400" dirty="0">
                           <a:effectLst/>
                           <a:latin typeface="D2Coding" panose="020B0609020101020101" pitchFamily="49" charset="-127"/>
                           <a:ea typeface="D2Coding" panose="020B0609020101020101" pitchFamily="49" charset="-127"/>
@@ -15644,7 +15721,7 @@
                         <a:t>/</a:t>
                       </a:r>
                       <a:r>
-                        <a:rPr lang="en-US" sz="1600" dirty="0" err="1">
+                        <a:rPr lang="en-US" sz="1400" dirty="0" err="1">
                           <a:effectLst/>
                           <a:latin typeface="D2Coding" panose="020B0609020101020101" pitchFamily="49" charset="-127"/>
                           <a:ea typeface="D2Coding" panose="020B0609020101020101" pitchFamily="49" charset="-127"/>
@@ -15652,7 +15729,7 @@
                         <a:t>GoT</a:t>
                       </a:r>
                       <a:r>
-                        <a:rPr lang="en-US" sz="1600" dirty="0">
+                        <a:rPr lang="en-US" sz="1400" dirty="0">
                           <a:effectLst/>
                           <a:latin typeface="D2Coding" panose="020B0609020101020101" pitchFamily="49" charset="-127"/>
                           <a:ea typeface="D2Coding" panose="020B0609020101020101" pitchFamily="49" charset="-127"/>
@@ -15716,7 +15793,7 @@
                         <a:buNone/>
                       </a:pPr>
                       <a:r>
-                        <a:rPr lang="en-US" sz="1600" dirty="0">
+                        <a:rPr lang="en-US" sz="1400" dirty="0">
                           <a:effectLst/>
                           <a:latin typeface="D2Coding" panose="020B0609020101020101" pitchFamily="49" charset="-127"/>
                           <a:ea typeface="D2Coding" panose="020B0609020101020101" pitchFamily="49" charset="-127"/>
@@ -15729,7 +15806,7 @@
                         <a:buNone/>
                       </a:pPr>
                       <a:r>
-                        <a:rPr lang="en-US" sz="1600" dirty="0">
+                        <a:rPr lang="en-US" sz="1400" dirty="0">
                           <a:effectLst/>
                           <a:latin typeface="D2Coding" panose="020B0609020101020101" pitchFamily="49" charset="-127"/>
                           <a:ea typeface="D2Coding" panose="020B0609020101020101" pitchFamily="49" charset="-127"/>
@@ -15798,7 +15875,7 @@
                         <a:buNone/>
                       </a:pPr>
                       <a:r>
-                        <a:rPr lang="ko-KR" altLang="en-US" sz="1600" dirty="0">
+                        <a:rPr lang="ko-KR" altLang="en-US" sz="1400" dirty="0">
                           <a:effectLst/>
                           <a:latin typeface="D2Coding" panose="020B0609020101020101" pitchFamily="49" charset="-127"/>
                           <a:ea typeface="D2Coding" panose="020B0609020101020101" pitchFamily="49" charset="-127"/>
@@ -15858,7 +15935,7 @@
                         <a:buNone/>
                       </a:pPr>
                       <a:r>
-                        <a:rPr lang="ko-KR" altLang="en-US" sz="1600" dirty="0">
+                        <a:rPr lang="ko-KR" altLang="en-US" sz="1400" dirty="0">
                           <a:effectLst/>
                           <a:latin typeface="D2Coding" panose="020B0609020101020101" pitchFamily="49" charset="-127"/>
                           <a:ea typeface="D2Coding" panose="020B0609020101020101" pitchFamily="49" charset="-127"/>
@@ -15866,14 +15943,14 @@
                         <a:t>잘 작성된 텍스트 </a:t>
                       </a:r>
                       <a:r>
-                        <a:rPr lang="ko-KR" altLang="en-US" sz="1600" dirty="0" err="1">
+                        <a:rPr lang="ko-KR" altLang="en-US" sz="1400" dirty="0" err="1">
                           <a:effectLst/>
                           <a:latin typeface="D2Coding" panose="020B0609020101020101" pitchFamily="49" charset="-127"/>
                           <a:ea typeface="D2Coding" panose="020B0609020101020101" pitchFamily="49" charset="-127"/>
                         </a:rPr>
                         <a:t>지시문</a:t>
                       </a:r>
-                      <a:endParaRPr lang="ko-KR" altLang="en-US" sz="1600" dirty="0">
+                      <a:endParaRPr lang="ko-KR" altLang="en-US" sz="1400" dirty="0">
                         <a:effectLst/>
                         <a:latin typeface="D2Coding" panose="020B0609020101020101" pitchFamily="49" charset="-127"/>
                         <a:ea typeface="D2Coding" panose="020B0609020101020101" pitchFamily="49" charset="-127"/>
@@ -15933,7 +16010,7 @@
                         <a:buNone/>
                       </a:pPr>
                       <a:r>
-                        <a:rPr lang="ko-KR" altLang="en-US" sz="1600" dirty="0">
+                        <a:rPr lang="ko-KR" altLang="en-US" sz="1400" dirty="0">
                           <a:effectLst/>
                           <a:latin typeface="D2Coding" panose="020B0609020101020101" pitchFamily="49" charset="-127"/>
                           <a:ea typeface="D2Coding" panose="020B0609020101020101" pitchFamily="49" charset="-127"/>
@@ -15941,7 +16018,7 @@
                         <a:t>프롬프트 </a:t>
                       </a:r>
                       <a:r>
-                        <a:rPr lang="en-US" altLang="ko-KR" sz="1600" dirty="0">
+                        <a:rPr lang="en-US" altLang="ko-KR" sz="1400" dirty="0">
                           <a:effectLst/>
                           <a:latin typeface="D2Coding" panose="020B0609020101020101" pitchFamily="49" charset="-127"/>
                           <a:ea typeface="D2Coding" panose="020B0609020101020101" pitchFamily="49" charset="-127"/>
@@ -15949,14 +16026,14 @@
                         <a:t>+ </a:t>
                       </a:r>
                       <a:r>
-                        <a:rPr lang="ko-KR" altLang="en-US" sz="1600" dirty="0">
+                        <a:rPr lang="ko-KR" altLang="en-US" sz="1400" dirty="0">
                           <a:effectLst/>
                           <a:latin typeface="D2Coding" panose="020B0609020101020101" pitchFamily="49" charset="-127"/>
                           <a:ea typeface="D2Coding" panose="020B0609020101020101" pitchFamily="49" charset="-127"/>
                         </a:rPr>
                         <a:t>파이썬</a:t>
                       </a:r>
-                      <a:endParaRPr lang="en-US" altLang="ko-KR" sz="1600" dirty="0">
+                      <a:endParaRPr lang="en-US" altLang="ko-KR" sz="1400" dirty="0">
                         <a:effectLst/>
                         <a:latin typeface="D2Coding" panose="020B0609020101020101" pitchFamily="49" charset="-127"/>
                         <a:ea typeface="D2Coding" panose="020B0609020101020101" pitchFamily="49" charset="-127"/>
@@ -15967,7 +16044,7 @@
                         <a:buNone/>
                       </a:pPr>
                       <a:r>
-                        <a:rPr lang="ko-KR" altLang="en-US" sz="1600" dirty="0" err="1">
+                        <a:rPr lang="ko-KR" altLang="en-US" sz="1400" dirty="0" err="1">
                           <a:effectLst/>
                           <a:latin typeface="D2Coding" panose="020B0609020101020101" pitchFamily="49" charset="-127"/>
                           <a:ea typeface="D2Coding" panose="020B0609020101020101" pitchFamily="49" charset="-127"/>
@@ -15975,7 +16052,7 @@
                         <a:t>백엔드</a:t>
                       </a:r>
                       <a:r>
-                        <a:rPr lang="ko-KR" altLang="en-US" sz="1600" dirty="0">
+                        <a:rPr lang="ko-KR" altLang="en-US" sz="1400" dirty="0">
                           <a:effectLst/>
                           <a:latin typeface="D2Coding" panose="020B0609020101020101" pitchFamily="49" charset="-127"/>
                           <a:ea typeface="D2Coding" panose="020B0609020101020101" pitchFamily="49" charset="-127"/>
@@ -15983,7 +16060,7 @@
                         <a:t> 코드 </a:t>
                       </a:r>
                       <a:r>
-                        <a:rPr lang="en-US" altLang="ko-KR" sz="1600" dirty="0">
+                        <a:rPr lang="en-US" altLang="ko-KR" sz="1400" dirty="0">
                           <a:effectLst/>
                           <a:latin typeface="D2Coding" panose="020B0609020101020101" pitchFamily="49" charset="-127"/>
                           <a:ea typeface="D2Coding" panose="020B0609020101020101" pitchFamily="49" charset="-127"/>
@@ -16050,7 +16127,7 @@
                         <a:buNone/>
                       </a:pPr>
                       <a:r>
-                        <a:rPr lang="ko-KR" altLang="en-US" sz="1600" dirty="0">
+                        <a:rPr lang="ko-KR" altLang="en-US" sz="1400" dirty="0">
                           <a:effectLst/>
                           <a:latin typeface="D2Coding" panose="020B0609020101020101" pitchFamily="49" charset="-127"/>
                           <a:ea typeface="D2Coding" panose="020B0609020101020101" pitchFamily="49" charset="-127"/>
@@ -16110,7 +16187,7 @@
                         <a:buNone/>
                       </a:pPr>
                       <a:r>
-                        <a:rPr lang="ko-KR" altLang="en-US" sz="1600" dirty="0">
+                        <a:rPr lang="ko-KR" altLang="en-US" sz="1400" dirty="0">
                           <a:effectLst/>
                           <a:latin typeface="D2Coding" panose="020B0609020101020101" pitchFamily="49" charset="-127"/>
                           <a:ea typeface="D2Coding" panose="020B0609020101020101" pitchFamily="49" charset="-127"/>
@@ -16118,7 +16195,7 @@
                         <a:t>운전자에게 주는 </a:t>
                       </a:r>
                       <a:r>
-                        <a:rPr lang="en-US" altLang="ko-KR" sz="1600" dirty="0">
+                        <a:rPr lang="en-US" altLang="ko-KR" sz="1400" dirty="0">
                           <a:effectLst/>
                           <a:latin typeface="D2Coding" panose="020B0609020101020101" pitchFamily="49" charset="-127"/>
                           <a:ea typeface="D2Coding" panose="020B0609020101020101" pitchFamily="49" charset="-127"/>
@@ -16126,7 +16203,7 @@
                         <a:t>'</a:t>
                       </a:r>
                       <a:r>
-                        <a:rPr lang="ko-KR" altLang="en-US" sz="1600" dirty="0">
+                        <a:rPr lang="ko-KR" altLang="en-US" sz="1400" dirty="0">
                           <a:effectLst/>
                           <a:latin typeface="D2Coding" panose="020B0609020101020101" pitchFamily="49" charset="-127"/>
                           <a:ea typeface="D2Coding" panose="020B0609020101020101" pitchFamily="49" charset="-127"/>
@@ -16134,7 +16211,7 @@
                         <a:t>운전 지침서</a:t>
                       </a:r>
                       <a:r>
-                        <a:rPr lang="en-US" altLang="ko-KR" sz="1600" dirty="0">
+                        <a:rPr lang="en-US" altLang="ko-KR" sz="1400" dirty="0">
                           <a:effectLst/>
                           <a:latin typeface="D2Coding" panose="020B0609020101020101" pitchFamily="49" charset="-127"/>
                           <a:ea typeface="D2Coding" panose="020B0609020101020101" pitchFamily="49" charset="-127"/>
@@ -16196,7 +16273,7 @@
                         <a:buNone/>
                       </a:pPr>
                       <a:r>
-                        <a:rPr lang="ko-KR" altLang="en-US" sz="1600" dirty="0">
+                        <a:rPr lang="ko-KR" altLang="en-US" sz="1400" dirty="0">
                           <a:effectLst/>
                           <a:latin typeface="D2Coding" panose="020B0609020101020101" pitchFamily="49" charset="-127"/>
                           <a:ea typeface="D2Coding" panose="020B0609020101020101" pitchFamily="49" charset="-127"/>
@@ -16204,7 +16281,7 @@
                         <a:t>차선 이탈 방지</a:t>
                       </a:r>
                       <a:r>
-                        <a:rPr lang="en-US" altLang="ko-KR" sz="1600" dirty="0">
+                        <a:rPr lang="en-US" altLang="ko-KR" sz="1400" dirty="0">
                           <a:effectLst/>
                           <a:latin typeface="D2Coding" panose="020B0609020101020101" pitchFamily="49" charset="-127"/>
                           <a:ea typeface="D2Coding" panose="020B0609020101020101" pitchFamily="49" charset="-127"/>
@@ -16212,7 +16289,7 @@
                         <a:t>, </a:t>
                       </a:r>
                       <a:r>
-                        <a:rPr lang="ko-KR" altLang="en-US" sz="1600" dirty="0">
+                        <a:rPr lang="ko-KR" altLang="en-US" sz="1400" dirty="0">
                           <a:effectLst/>
                           <a:latin typeface="D2Coding" panose="020B0609020101020101" pitchFamily="49" charset="-127"/>
                           <a:ea typeface="D2Coding" panose="020B0609020101020101" pitchFamily="49" charset="-127"/>
@@ -16220,7 +16297,7 @@
                         <a:t>자율주행 알고리즘 등 </a:t>
                       </a:r>
                       <a:r>
-                        <a:rPr lang="en-US" altLang="ko-KR" sz="1600" dirty="0">
+                        <a:rPr lang="en-US" altLang="ko-KR" sz="1400" dirty="0">
                           <a:effectLst/>
                           <a:latin typeface="D2Coding" panose="020B0609020101020101" pitchFamily="49" charset="-127"/>
                           <a:ea typeface="D2Coding" panose="020B0609020101020101" pitchFamily="49" charset="-127"/>
@@ -16228,7 +16305,7 @@
                         <a:t>'</a:t>
                       </a:r>
                       <a:r>
-                        <a:rPr lang="ko-KR" altLang="en-US" sz="1600" dirty="0">
+                        <a:rPr lang="ko-KR" altLang="en-US" sz="1400" dirty="0">
                           <a:effectLst/>
                           <a:latin typeface="D2Coding" panose="020B0609020101020101" pitchFamily="49" charset="-127"/>
                           <a:ea typeface="D2Coding" panose="020B0609020101020101" pitchFamily="49" charset="-127"/>
@@ -16236,7 +16313,7 @@
                         <a:t>차량 제어 시스템</a:t>
                       </a:r>
                       <a:r>
-                        <a:rPr lang="en-US" altLang="ko-KR" sz="1600" dirty="0">
+                        <a:rPr lang="en-US" altLang="ko-KR" sz="1400" dirty="0">
                           <a:effectLst/>
                           <a:latin typeface="D2Coding" panose="020B0609020101020101" pitchFamily="49" charset="-127"/>
                           <a:ea typeface="D2Coding" panose="020B0609020101020101" pitchFamily="49" charset="-127"/>
@@ -16659,8 +16736,8 @@
         </p:nvSpPr>
         <p:spPr>
           <a:xfrm>
-            <a:off x="1880652" y="2395557"/>
-            <a:ext cx="9363075" cy="4185761"/>
+            <a:off x="2137827" y="2671782"/>
+            <a:ext cx="9363075" cy="3600986"/>
           </a:xfrm>
           <a:prstGeom prst="rect">
             <a:avLst/>
@@ -16676,42 +16753,42 @@
           <a:lstStyle/>
           <a:p>
             <a:r>
-              <a:rPr lang="ko-KR" altLang="en-US" sz="1400" dirty="0" err="1">
+              <a:rPr lang="ko-KR" altLang="en-US" sz="1200" dirty="0" err="1">
                 <a:latin typeface="D2Coding" panose="020B0609020101020101" pitchFamily="49" charset="-127"/>
                 <a:ea typeface="D2Coding" panose="020B0609020101020101" pitchFamily="49" charset="-127"/>
               </a:rPr>
               <a:t>def</a:t>
             </a:r>
             <a:r>
-              <a:rPr lang="ko-KR" altLang="en-US" sz="1400" dirty="0">
+              <a:rPr lang="ko-KR" altLang="en-US" sz="1200" dirty="0">
                 <a:latin typeface="D2Coding" panose="020B0609020101020101" pitchFamily="49" charset="-127"/>
                 <a:ea typeface="D2Coding" panose="020B0609020101020101" pitchFamily="49" charset="-127"/>
               </a:rPr>
               <a:t> </a:t>
             </a:r>
             <a:r>
-              <a:rPr lang="ko-KR" altLang="en-US" sz="1400" dirty="0" err="1">
+              <a:rPr lang="ko-KR" altLang="en-US" sz="1200" dirty="0" err="1">
                 <a:latin typeface="D2Coding" panose="020B0609020101020101" pitchFamily="49" charset="-127"/>
                 <a:ea typeface="D2Coding" panose="020B0609020101020101" pitchFamily="49" charset="-127"/>
               </a:rPr>
               <a:t>run_agent_loop</a:t>
             </a:r>
             <a:r>
-              <a:rPr lang="ko-KR" altLang="en-US" sz="1400" dirty="0">
+              <a:rPr lang="ko-KR" altLang="en-US" sz="1200" dirty="0">
                 <a:latin typeface="D2Coding" panose="020B0609020101020101" pitchFamily="49" charset="-127"/>
                 <a:ea typeface="D2Coding" panose="020B0609020101020101" pitchFamily="49" charset="-127"/>
               </a:rPr>
               <a:t>(</a:t>
             </a:r>
             <a:r>
-              <a:rPr lang="ko-KR" altLang="en-US" sz="1400" dirty="0" err="1">
+              <a:rPr lang="ko-KR" altLang="en-US" sz="1200" dirty="0" err="1">
                 <a:latin typeface="D2Coding" panose="020B0609020101020101" pitchFamily="49" charset="-127"/>
                 <a:ea typeface="D2Coding" panose="020B0609020101020101" pitchFamily="49" charset="-127"/>
               </a:rPr>
               <a:t>user_query</a:t>
             </a:r>
             <a:r>
-              <a:rPr lang="ko-KR" altLang="en-US" sz="1400" dirty="0">
+              <a:rPr lang="ko-KR" altLang="en-US" sz="1200" dirty="0">
                 <a:latin typeface="D2Coding" panose="020B0609020101020101" pitchFamily="49" charset="-127"/>
                 <a:ea typeface="D2Coding" panose="020B0609020101020101" pitchFamily="49" charset="-127"/>
               </a:rPr>
@@ -16720,35 +16797,35 @@
           </a:p>
           <a:p>
             <a:r>
-              <a:rPr lang="ko-KR" altLang="en-US" sz="1400" dirty="0">
+              <a:rPr lang="ko-KR" altLang="en-US" sz="1200" dirty="0">
                 <a:latin typeface="D2Coding" panose="020B0609020101020101" pitchFamily="49" charset="-127"/>
                 <a:ea typeface="D2Coding" panose="020B0609020101020101" pitchFamily="49" charset="-127"/>
               </a:rPr>
               <a:t>    # 1. 초기 맥락(</a:t>
             </a:r>
             <a:r>
-              <a:rPr lang="ko-KR" altLang="en-US" sz="1400" dirty="0" err="1">
+              <a:rPr lang="ko-KR" altLang="en-US" sz="1200" dirty="0" err="1">
                 <a:latin typeface="D2Coding" panose="020B0609020101020101" pitchFamily="49" charset="-127"/>
                 <a:ea typeface="D2Coding" panose="020B0609020101020101" pitchFamily="49" charset="-127"/>
               </a:rPr>
               <a:t>Context</a:t>
             </a:r>
             <a:r>
-              <a:rPr lang="ko-KR" altLang="en-US" sz="1400" dirty="0">
+              <a:rPr lang="ko-KR" altLang="en-US" sz="1200" dirty="0">
                 <a:latin typeface="D2Coding" panose="020B0609020101020101" pitchFamily="49" charset="-127"/>
                 <a:ea typeface="D2Coding" panose="020B0609020101020101" pitchFamily="49" charset="-127"/>
               </a:rPr>
               <a:t>) 설정 (종료용 </a:t>
             </a:r>
             <a:r>
-              <a:rPr lang="ko-KR" altLang="en-US" sz="1400" dirty="0" err="1">
+              <a:rPr lang="ko-KR" altLang="en-US" sz="1200" dirty="0" err="1">
                 <a:latin typeface="D2Coding" panose="020B0609020101020101" pitchFamily="49" charset="-127"/>
                 <a:ea typeface="D2Coding" panose="020B0609020101020101" pitchFamily="49" charset="-127"/>
               </a:rPr>
               <a:t>output</a:t>
             </a:r>
             <a:r>
-              <a:rPr lang="ko-KR" altLang="en-US" sz="1400" dirty="0">
+              <a:rPr lang="ko-KR" altLang="en-US" sz="1200" dirty="0">
                 <a:latin typeface="D2Coding" panose="020B0609020101020101" pitchFamily="49" charset="-127"/>
                 <a:ea typeface="D2Coding" panose="020B0609020101020101" pitchFamily="49" charset="-127"/>
               </a:rPr>
@@ -16757,119 +16834,119 @@
           </a:p>
           <a:p>
             <a:r>
-              <a:rPr lang="ko-KR" altLang="en-US" sz="1400" dirty="0">
+              <a:rPr lang="ko-KR" altLang="en-US" sz="1200" dirty="0">
                 <a:latin typeface="D2Coding" panose="020B0609020101020101" pitchFamily="49" charset="-127"/>
                 <a:ea typeface="D2Coding" panose="020B0609020101020101" pitchFamily="49" charset="-127"/>
               </a:rPr>
               <a:t>    </a:t>
             </a:r>
             <a:r>
-              <a:rPr lang="ko-KR" altLang="en-US" sz="1400" dirty="0" err="1">
+              <a:rPr lang="ko-KR" altLang="en-US" sz="1200" dirty="0" err="1">
                 <a:latin typeface="D2Coding" panose="020B0609020101020101" pitchFamily="49" charset="-127"/>
                 <a:ea typeface="D2Coding" panose="020B0609020101020101" pitchFamily="49" charset="-127"/>
               </a:rPr>
               <a:t>context</a:t>
             </a:r>
             <a:r>
-              <a:rPr lang="ko-KR" altLang="en-US" sz="1400" dirty="0">
+              <a:rPr lang="ko-KR" altLang="en-US" sz="1200" dirty="0">
                 <a:latin typeface="D2Coding" panose="020B0609020101020101" pitchFamily="49" charset="-127"/>
                 <a:ea typeface="D2Coding" panose="020B0609020101020101" pitchFamily="49" charset="-127"/>
               </a:rPr>
               <a:t> = </a:t>
             </a:r>
             <a:r>
-              <a:rPr lang="ko-KR" altLang="en-US" sz="1400" dirty="0" err="1">
+              <a:rPr lang="ko-KR" altLang="en-US" sz="1200" dirty="0" err="1">
                 <a:latin typeface="D2Coding" panose="020B0609020101020101" pitchFamily="49" charset="-127"/>
                 <a:ea typeface="D2Coding" panose="020B0609020101020101" pitchFamily="49" charset="-127"/>
               </a:rPr>
               <a:t>f"질문</a:t>
             </a:r>
             <a:r>
-              <a:rPr lang="ko-KR" altLang="en-US" sz="1400" dirty="0">
+              <a:rPr lang="ko-KR" altLang="en-US" sz="1200" dirty="0">
                 <a:latin typeface="D2Coding" panose="020B0609020101020101" pitchFamily="49" charset="-127"/>
                 <a:ea typeface="D2Coding" panose="020B0609020101020101" pitchFamily="49" charset="-127"/>
               </a:rPr>
               <a:t>: {</a:t>
             </a:r>
             <a:r>
-              <a:rPr lang="ko-KR" altLang="en-US" sz="1400" dirty="0" err="1">
+              <a:rPr lang="ko-KR" altLang="en-US" sz="1200" dirty="0" err="1">
                 <a:latin typeface="D2Coding" panose="020B0609020101020101" pitchFamily="49" charset="-127"/>
                 <a:ea typeface="D2Coding" panose="020B0609020101020101" pitchFamily="49" charset="-127"/>
               </a:rPr>
               <a:t>user_query</a:t>
             </a:r>
             <a:r>
-              <a:rPr lang="ko-KR" altLang="en-US" sz="1400" dirty="0">
+              <a:rPr lang="ko-KR" altLang="en-US" sz="1200" dirty="0">
                 <a:latin typeface="D2Coding" panose="020B0609020101020101" pitchFamily="49" charset="-127"/>
                 <a:ea typeface="D2Coding" panose="020B0609020101020101" pitchFamily="49" charset="-127"/>
               </a:rPr>
               <a:t>}\</a:t>
             </a:r>
             <a:r>
-              <a:rPr lang="ko-KR" altLang="en-US" sz="1400" dirty="0" err="1">
+              <a:rPr lang="ko-KR" altLang="en-US" sz="1200" dirty="0" err="1">
                 <a:latin typeface="D2Coding" panose="020B0609020101020101" pitchFamily="49" charset="-127"/>
                 <a:ea typeface="D2Coding" panose="020B0609020101020101" pitchFamily="49" charset="-127"/>
               </a:rPr>
               <a:t>n도구</a:t>
             </a:r>
             <a:r>
-              <a:rPr lang="ko-KR" altLang="en-US" sz="1400" dirty="0">
+              <a:rPr lang="ko-KR" altLang="en-US" sz="1200" dirty="0">
                 <a:latin typeface="D2Coding" panose="020B0609020101020101" pitchFamily="49" charset="-127"/>
                 <a:ea typeface="D2Coding" panose="020B0609020101020101" pitchFamily="49" charset="-127"/>
               </a:rPr>
               <a:t>: </a:t>
             </a:r>
             <a:r>
-              <a:rPr lang="ko-KR" altLang="en-US" sz="1400" dirty="0" err="1">
+              <a:rPr lang="ko-KR" altLang="en-US" sz="1200" dirty="0" err="1">
                 <a:latin typeface="D2Coding" panose="020B0609020101020101" pitchFamily="49" charset="-127"/>
                 <a:ea typeface="D2Coding" panose="020B0609020101020101" pitchFamily="49" charset="-127"/>
               </a:rPr>
               <a:t>search</a:t>
             </a:r>
             <a:r>
-              <a:rPr lang="ko-KR" altLang="en-US" sz="1400" dirty="0">
+              <a:rPr lang="ko-KR" altLang="en-US" sz="1200" dirty="0">
                 <a:latin typeface="D2Coding" panose="020B0609020101020101" pitchFamily="49" charset="-127"/>
                 <a:ea typeface="D2Coding" panose="020B0609020101020101" pitchFamily="49" charset="-127"/>
               </a:rPr>
               <a:t>, </a:t>
             </a:r>
             <a:r>
-              <a:rPr lang="ko-KR" altLang="en-US" sz="1400" dirty="0" err="1">
+              <a:rPr lang="ko-KR" altLang="en-US" sz="1200" dirty="0" err="1">
                 <a:latin typeface="D2Coding" panose="020B0609020101020101" pitchFamily="49" charset="-127"/>
                 <a:ea typeface="D2Coding" panose="020B0609020101020101" pitchFamily="49" charset="-127"/>
               </a:rPr>
               <a:t>calculator</a:t>
             </a:r>
             <a:r>
-              <a:rPr lang="ko-KR" altLang="en-US" sz="1400" dirty="0">
+              <a:rPr lang="ko-KR" altLang="en-US" sz="1200" dirty="0">
                 <a:latin typeface="D2Coding" panose="020B0609020101020101" pitchFamily="49" charset="-127"/>
                 <a:ea typeface="D2Coding" panose="020B0609020101020101" pitchFamily="49" charset="-127"/>
               </a:rPr>
               <a:t>, </a:t>
             </a:r>
             <a:r>
-              <a:rPr lang="ko-KR" altLang="en-US" sz="1400" dirty="0" err="1">
+              <a:rPr lang="ko-KR" altLang="en-US" sz="1200" dirty="0" err="1">
                 <a:latin typeface="D2Coding" panose="020B0609020101020101" pitchFamily="49" charset="-127"/>
                 <a:ea typeface="D2Coding" panose="020B0609020101020101" pitchFamily="49" charset="-127"/>
               </a:rPr>
               <a:t>output</a:t>
             </a:r>
             <a:r>
-              <a:rPr lang="ko-KR" altLang="en-US" sz="1400" dirty="0">
+              <a:rPr lang="ko-KR" altLang="en-US" sz="1200" dirty="0">
                 <a:latin typeface="D2Coding" panose="020B0609020101020101" pitchFamily="49" charset="-127"/>
                 <a:ea typeface="D2Coding" panose="020B0609020101020101" pitchFamily="49" charset="-127"/>
               </a:rPr>
               <a:t>(</a:t>
             </a:r>
             <a:r>
-              <a:rPr lang="ko-KR" altLang="en-US" sz="1400" dirty="0" err="1">
+              <a:rPr lang="ko-KR" altLang="en-US" sz="1200" dirty="0" err="1">
                 <a:latin typeface="D2Coding" panose="020B0609020101020101" pitchFamily="49" charset="-127"/>
                 <a:ea typeface="D2Coding" panose="020B0609020101020101" pitchFamily="49" charset="-127"/>
               </a:rPr>
               <a:t>최종답</a:t>
             </a:r>
             <a:r>
-              <a:rPr lang="ko-KR" altLang="en-US" sz="1400" dirty="0">
+              <a:rPr lang="ko-KR" altLang="en-US" sz="1200" dirty="0">
                 <a:latin typeface="D2Coding" panose="020B0609020101020101" pitchFamily="49" charset="-127"/>
                 <a:ea typeface="D2Coding" panose="020B0609020101020101" pitchFamily="49" charset="-127"/>
               </a:rPr>
@@ -16877,14 +16954,14 @@
             </a:r>
           </a:p>
           <a:p>
-            <a:endParaRPr lang="ko-KR" altLang="en-US" sz="1400" dirty="0">
+            <a:endParaRPr lang="ko-KR" altLang="en-US" sz="1200" dirty="0">
               <a:latin typeface="D2Coding" panose="020B0609020101020101" pitchFamily="49" charset="-127"/>
               <a:ea typeface="D2Coding" panose="020B0609020101020101" pitchFamily="49" charset="-127"/>
             </a:endParaRPr>
           </a:p>
           <a:p>
             <a:r>
-              <a:rPr lang="ko-KR" altLang="en-US" sz="1400" dirty="0">
+              <a:rPr lang="ko-KR" altLang="en-US" sz="1200" dirty="0">
                 <a:latin typeface="D2Coding" panose="020B0609020101020101" pitchFamily="49" charset="-127"/>
                 <a:ea typeface="D2Coding" panose="020B0609020101020101" pitchFamily="49" charset="-127"/>
               </a:rPr>
@@ -16893,35 +16970,35 @@
           </a:p>
           <a:p>
             <a:r>
-              <a:rPr lang="ko-KR" altLang="en-US" sz="1400" dirty="0">
+              <a:rPr lang="ko-KR" altLang="en-US" sz="1200" dirty="0">
                 <a:latin typeface="D2Coding" panose="020B0609020101020101" pitchFamily="49" charset="-127"/>
                 <a:ea typeface="D2Coding" panose="020B0609020101020101" pitchFamily="49" charset="-127"/>
               </a:rPr>
               <a:t>    </a:t>
             </a:r>
             <a:r>
-              <a:rPr lang="ko-KR" altLang="en-US" sz="1400" dirty="0" err="1">
+              <a:rPr lang="ko-KR" altLang="en-US" sz="1200" dirty="0" err="1">
                 <a:latin typeface="D2Coding" panose="020B0609020101020101" pitchFamily="49" charset="-127"/>
                 <a:ea typeface="D2Coding" panose="020B0609020101020101" pitchFamily="49" charset="-127"/>
               </a:rPr>
               <a:t>while</a:t>
             </a:r>
             <a:r>
-              <a:rPr lang="ko-KR" altLang="en-US" sz="1400" dirty="0">
+              <a:rPr lang="ko-KR" altLang="en-US" sz="1200" dirty="0">
                 <a:latin typeface="D2Coding" panose="020B0609020101020101" pitchFamily="49" charset="-127"/>
                 <a:ea typeface="D2Coding" panose="020B0609020101020101" pitchFamily="49" charset="-127"/>
               </a:rPr>
               <a:t> </a:t>
             </a:r>
             <a:r>
-              <a:rPr lang="ko-KR" altLang="en-US" sz="1400" dirty="0" err="1">
+              <a:rPr lang="ko-KR" altLang="en-US" sz="1200" dirty="0" err="1">
                 <a:latin typeface="D2Coding" panose="020B0609020101020101" pitchFamily="49" charset="-127"/>
                 <a:ea typeface="D2Coding" panose="020B0609020101020101" pitchFamily="49" charset="-127"/>
               </a:rPr>
               <a:t>True</a:t>
             </a:r>
             <a:r>
-              <a:rPr lang="ko-KR" altLang="en-US" sz="1400" dirty="0">
+              <a:rPr lang="ko-KR" altLang="en-US" sz="1200" dirty="0">
                 <a:latin typeface="D2Coding" panose="020B0609020101020101" pitchFamily="49" charset="-127"/>
                 <a:ea typeface="D2Coding" panose="020B0609020101020101" pitchFamily="49" charset="-127"/>
               </a:rPr>
@@ -16930,35 +17007,35 @@
           </a:p>
           <a:p>
             <a:r>
-              <a:rPr lang="ko-KR" altLang="en-US" sz="1400" dirty="0">
+              <a:rPr lang="ko-KR" altLang="en-US" sz="1200" dirty="0">
                 <a:latin typeface="D2Coding" panose="020B0609020101020101" pitchFamily="49" charset="-127"/>
                 <a:ea typeface="D2Coding" panose="020B0609020101020101" pitchFamily="49" charset="-127"/>
               </a:rPr>
               <a:t>        # [</a:t>
             </a:r>
             <a:r>
-              <a:rPr lang="ko-KR" altLang="en-US" sz="1400" dirty="0" err="1">
+              <a:rPr lang="ko-KR" altLang="en-US" sz="1200" dirty="0" err="1">
                 <a:latin typeface="D2Coding" panose="020B0609020101020101" pitchFamily="49" charset="-127"/>
                 <a:ea typeface="D2Coding" panose="020B0609020101020101" pitchFamily="49" charset="-127"/>
               </a:rPr>
               <a:t>Plan</a:t>
             </a:r>
             <a:r>
-              <a:rPr lang="ko-KR" altLang="en-US" sz="1400" dirty="0">
+              <a:rPr lang="ko-KR" altLang="en-US" sz="1200" dirty="0">
                 <a:latin typeface="D2Coding" panose="020B0609020101020101" pitchFamily="49" charset="-127"/>
                 <a:ea typeface="D2Coding" panose="020B0609020101020101" pitchFamily="49" charset="-127"/>
               </a:rPr>
               <a:t>] 누적된 맥락을 토대로 </a:t>
             </a:r>
             <a:r>
-              <a:rPr lang="ko-KR" altLang="en-US" sz="1400" dirty="0" err="1">
+              <a:rPr lang="ko-KR" altLang="en-US" sz="1200" dirty="0" err="1">
                 <a:latin typeface="D2Coding" panose="020B0609020101020101" pitchFamily="49" charset="-127"/>
                 <a:ea typeface="D2Coding" panose="020B0609020101020101" pitchFamily="49" charset="-127"/>
               </a:rPr>
               <a:t>LLM이</a:t>
             </a:r>
             <a:r>
-              <a:rPr lang="ko-KR" altLang="en-US" sz="1400" dirty="0">
+              <a:rPr lang="ko-KR" altLang="en-US" sz="1200" dirty="0">
                 <a:latin typeface="D2Coding" panose="020B0609020101020101" pitchFamily="49" charset="-127"/>
                 <a:ea typeface="D2Coding" panose="020B0609020101020101" pitchFamily="49" charset="-127"/>
               </a:rPr>
@@ -16967,49 +17044,49 @@
           </a:p>
           <a:p>
             <a:r>
-              <a:rPr lang="ko-KR" altLang="en-US" sz="1400" dirty="0">
+              <a:rPr lang="ko-KR" altLang="en-US" sz="1200" dirty="0">
                 <a:latin typeface="D2Coding" panose="020B0609020101020101" pitchFamily="49" charset="-127"/>
                 <a:ea typeface="D2Coding" panose="020B0609020101020101" pitchFamily="49" charset="-127"/>
               </a:rPr>
               <a:t>        </a:t>
             </a:r>
             <a:r>
-              <a:rPr lang="ko-KR" altLang="en-US" sz="1400" dirty="0" err="1">
+              <a:rPr lang="ko-KR" altLang="en-US" sz="1200" dirty="0" err="1">
                 <a:latin typeface="D2Coding" panose="020B0609020101020101" pitchFamily="49" charset="-127"/>
                 <a:ea typeface="D2Coding" panose="020B0609020101020101" pitchFamily="49" charset="-127"/>
               </a:rPr>
               <a:t>action</a:t>
             </a:r>
             <a:r>
-              <a:rPr lang="ko-KR" altLang="en-US" sz="1400" dirty="0">
+              <a:rPr lang="ko-KR" altLang="en-US" sz="1200" dirty="0">
                 <a:latin typeface="D2Coding" panose="020B0609020101020101" pitchFamily="49" charset="-127"/>
                 <a:ea typeface="D2Coding" panose="020B0609020101020101" pitchFamily="49" charset="-127"/>
               </a:rPr>
               <a:t> = </a:t>
             </a:r>
             <a:r>
-              <a:rPr lang="ko-KR" altLang="en-US" sz="1400" dirty="0" err="1">
+              <a:rPr lang="ko-KR" altLang="en-US" sz="1200" dirty="0" err="1">
                 <a:latin typeface="D2Coding" panose="020B0609020101020101" pitchFamily="49" charset="-127"/>
                 <a:ea typeface="D2Coding" panose="020B0609020101020101" pitchFamily="49" charset="-127"/>
               </a:rPr>
               <a:t>llm.generate</a:t>
             </a:r>
             <a:r>
-              <a:rPr lang="ko-KR" altLang="en-US" sz="1400" dirty="0">
+              <a:rPr lang="ko-KR" altLang="en-US" sz="1200" dirty="0">
                 <a:latin typeface="D2Coding" panose="020B0609020101020101" pitchFamily="49" charset="-127"/>
                 <a:ea typeface="D2Coding" panose="020B0609020101020101" pitchFamily="49" charset="-127"/>
               </a:rPr>
               <a:t>(</a:t>
             </a:r>
             <a:r>
-              <a:rPr lang="ko-KR" altLang="en-US" sz="1400" dirty="0" err="1">
+              <a:rPr lang="ko-KR" altLang="en-US" sz="1200" dirty="0" err="1">
                 <a:latin typeface="D2Coding" panose="020B0609020101020101" pitchFamily="49" charset="-127"/>
                 <a:ea typeface="D2Coding" panose="020B0609020101020101" pitchFamily="49" charset="-127"/>
               </a:rPr>
               <a:t>context</a:t>
             </a:r>
             <a:r>
-              <a:rPr lang="ko-KR" altLang="en-US" sz="1400" dirty="0">
+              <a:rPr lang="ko-KR" altLang="en-US" sz="1200" dirty="0">
                 <a:latin typeface="D2Coding" panose="020B0609020101020101" pitchFamily="49" charset="-127"/>
                 <a:ea typeface="D2Coding" panose="020B0609020101020101" pitchFamily="49" charset="-127"/>
               </a:rPr>
@@ -17018,63 +17095,63 @@
           </a:p>
           <a:p>
             <a:r>
-              <a:rPr lang="ko-KR" altLang="en-US" sz="1400" dirty="0">
+              <a:rPr lang="ko-KR" altLang="en-US" sz="1200" dirty="0">
                 <a:latin typeface="D2Coding" panose="020B0609020101020101" pitchFamily="49" charset="-127"/>
                 <a:ea typeface="D2Coding" panose="020B0609020101020101" pitchFamily="49" charset="-127"/>
               </a:rPr>
               <a:t>        </a:t>
             </a:r>
             <a:r>
-              <a:rPr lang="ko-KR" altLang="en-US" sz="1400" dirty="0" err="1">
+              <a:rPr lang="ko-KR" altLang="en-US" sz="1200" dirty="0" err="1">
                 <a:latin typeface="D2Coding" panose="020B0609020101020101" pitchFamily="49" charset="-127"/>
                 <a:ea typeface="D2Coding" panose="020B0609020101020101" pitchFamily="49" charset="-127"/>
               </a:rPr>
               <a:t>tool_name</a:t>
             </a:r>
             <a:r>
-              <a:rPr lang="ko-KR" altLang="en-US" sz="1400" dirty="0">
+              <a:rPr lang="ko-KR" altLang="en-US" sz="1200" dirty="0">
                 <a:latin typeface="D2Coding" panose="020B0609020101020101" pitchFamily="49" charset="-127"/>
                 <a:ea typeface="D2Coding" panose="020B0609020101020101" pitchFamily="49" charset="-127"/>
               </a:rPr>
               <a:t>, </a:t>
             </a:r>
             <a:r>
-              <a:rPr lang="ko-KR" altLang="en-US" sz="1400" dirty="0" err="1">
+              <a:rPr lang="ko-KR" altLang="en-US" sz="1200" dirty="0" err="1">
                 <a:latin typeface="D2Coding" panose="020B0609020101020101" pitchFamily="49" charset="-127"/>
                 <a:ea typeface="D2Coding" panose="020B0609020101020101" pitchFamily="49" charset="-127"/>
               </a:rPr>
               <a:t>tool_input</a:t>
             </a:r>
             <a:r>
-              <a:rPr lang="ko-KR" altLang="en-US" sz="1400" dirty="0">
+              <a:rPr lang="ko-KR" altLang="en-US" sz="1200" dirty="0">
                 <a:latin typeface="D2Coding" panose="020B0609020101020101" pitchFamily="49" charset="-127"/>
                 <a:ea typeface="D2Coding" panose="020B0609020101020101" pitchFamily="49" charset="-127"/>
               </a:rPr>
               <a:t> = </a:t>
             </a:r>
             <a:r>
-              <a:rPr lang="ko-KR" altLang="en-US" sz="1400" dirty="0" err="1">
+              <a:rPr lang="ko-KR" altLang="en-US" sz="1200" dirty="0" err="1">
                 <a:latin typeface="D2Coding" panose="020B0609020101020101" pitchFamily="49" charset="-127"/>
                 <a:ea typeface="D2Coding" panose="020B0609020101020101" pitchFamily="49" charset="-127"/>
               </a:rPr>
               <a:t>parse_action</a:t>
             </a:r>
             <a:r>
-              <a:rPr lang="ko-KR" altLang="en-US" sz="1400" dirty="0">
+              <a:rPr lang="ko-KR" altLang="en-US" sz="1200" dirty="0">
                 <a:latin typeface="D2Coding" panose="020B0609020101020101" pitchFamily="49" charset="-127"/>
                 <a:ea typeface="D2Coding" panose="020B0609020101020101" pitchFamily="49" charset="-127"/>
               </a:rPr>
               <a:t>(</a:t>
             </a:r>
             <a:r>
-              <a:rPr lang="ko-KR" altLang="en-US" sz="1400" dirty="0" err="1">
+              <a:rPr lang="ko-KR" altLang="en-US" sz="1200" dirty="0" err="1">
                 <a:latin typeface="D2Coding" panose="020B0609020101020101" pitchFamily="49" charset="-127"/>
                 <a:ea typeface="D2Coding" panose="020B0609020101020101" pitchFamily="49" charset="-127"/>
               </a:rPr>
               <a:t>action</a:t>
             </a:r>
             <a:r>
-              <a:rPr lang="ko-KR" altLang="en-US" sz="1400" dirty="0">
+              <a:rPr lang="ko-KR" altLang="en-US" sz="1200" dirty="0">
                 <a:latin typeface="D2Coding" panose="020B0609020101020101" pitchFamily="49" charset="-127"/>
                 <a:ea typeface="D2Coding" panose="020B0609020101020101" pitchFamily="49" charset="-127"/>
               </a:rPr>
@@ -17082,56 +17159,56 @@
             </a:r>
           </a:p>
           <a:p>
-            <a:endParaRPr lang="ko-KR" altLang="en-US" sz="1400" dirty="0">
+            <a:endParaRPr lang="ko-KR" altLang="en-US" sz="1200" dirty="0">
               <a:latin typeface="D2Coding" panose="020B0609020101020101" pitchFamily="49" charset="-127"/>
               <a:ea typeface="D2Coding" panose="020B0609020101020101" pitchFamily="49" charset="-127"/>
             </a:endParaRPr>
           </a:p>
           <a:p>
             <a:r>
-              <a:rPr lang="ko-KR" altLang="en-US" sz="1400" dirty="0">
+              <a:rPr lang="ko-KR" altLang="en-US" sz="1200" dirty="0">
                 <a:latin typeface="D2Coding" panose="020B0609020101020101" pitchFamily="49" charset="-127"/>
                 <a:ea typeface="D2Coding" panose="020B0609020101020101" pitchFamily="49" charset="-127"/>
               </a:rPr>
               <a:t>        # [</a:t>
             </a:r>
             <a:r>
-              <a:rPr lang="ko-KR" altLang="en-US" sz="1400" dirty="0" err="1">
+              <a:rPr lang="ko-KR" altLang="en-US" sz="1200" dirty="0" err="1">
                 <a:latin typeface="D2Coding" panose="020B0609020101020101" pitchFamily="49" charset="-127"/>
                 <a:ea typeface="D2Coding" panose="020B0609020101020101" pitchFamily="49" charset="-127"/>
               </a:rPr>
               <a:t>Stop</a:t>
             </a:r>
             <a:r>
-              <a:rPr lang="ko-KR" altLang="en-US" sz="1400" dirty="0">
+              <a:rPr lang="ko-KR" altLang="en-US" sz="1200" dirty="0">
                 <a:latin typeface="D2Coding" panose="020B0609020101020101" pitchFamily="49" charset="-127"/>
                 <a:ea typeface="D2Coding" panose="020B0609020101020101" pitchFamily="49" charset="-127"/>
               </a:rPr>
               <a:t>] </a:t>
             </a:r>
             <a:r>
-              <a:rPr lang="ko-KR" altLang="en-US" sz="1400" dirty="0" err="1">
+              <a:rPr lang="ko-KR" altLang="en-US" sz="1200" dirty="0" err="1">
                 <a:latin typeface="D2Coding" panose="020B0609020101020101" pitchFamily="49" charset="-127"/>
                 <a:ea typeface="D2Coding" panose="020B0609020101020101" pitchFamily="49" charset="-127"/>
               </a:rPr>
               <a:t>LLM이</a:t>
             </a:r>
             <a:r>
-              <a:rPr lang="ko-KR" altLang="en-US" sz="1400" dirty="0">
+              <a:rPr lang="ko-KR" altLang="en-US" sz="1200" dirty="0">
                 <a:latin typeface="D2Coding" panose="020B0609020101020101" pitchFamily="49" charset="-127"/>
                 <a:ea typeface="D2Coding" panose="020B0609020101020101" pitchFamily="49" charset="-127"/>
               </a:rPr>
               <a:t> '</a:t>
             </a:r>
             <a:r>
-              <a:rPr lang="ko-KR" altLang="en-US" sz="1400" dirty="0" err="1">
+              <a:rPr lang="ko-KR" altLang="en-US" sz="1200" dirty="0" err="1">
                 <a:latin typeface="D2Coding" panose="020B0609020101020101" pitchFamily="49" charset="-127"/>
                 <a:ea typeface="D2Coding" panose="020B0609020101020101" pitchFamily="49" charset="-127"/>
               </a:rPr>
               <a:t>output</a:t>
             </a:r>
             <a:r>
-              <a:rPr lang="ko-KR" altLang="en-US" sz="1400" dirty="0">
+              <a:rPr lang="ko-KR" altLang="en-US" sz="1200" dirty="0">
                 <a:latin typeface="D2Coding" panose="020B0609020101020101" pitchFamily="49" charset="-127"/>
                 <a:ea typeface="D2Coding" panose="020B0609020101020101" pitchFamily="49" charset="-127"/>
               </a:rPr>
@@ -17140,49 +17217,49 @@
           </a:p>
           <a:p>
             <a:r>
-              <a:rPr lang="ko-KR" altLang="en-US" sz="1400" dirty="0">
+              <a:rPr lang="ko-KR" altLang="en-US" sz="1200" dirty="0">
                 <a:latin typeface="D2Coding" panose="020B0609020101020101" pitchFamily="49" charset="-127"/>
                 <a:ea typeface="D2Coding" panose="020B0609020101020101" pitchFamily="49" charset="-127"/>
               </a:rPr>
               <a:t>        </a:t>
             </a:r>
             <a:r>
-              <a:rPr lang="ko-KR" altLang="en-US" sz="1400" dirty="0" err="1">
+              <a:rPr lang="ko-KR" altLang="en-US" sz="1200" dirty="0" err="1">
                 <a:latin typeface="D2Coding" panose="020B0609020101020101" pitchFamily="49" charset="-127"/>
                 <a:ea typeface="D2Coding" panose="020B0609020101020101" pitchFamily="49" charset="-127"/>
               </a:rPr>
               <a:t>if</a:t>
             </a:r>
             <a:r>
-              <a:rPr lang="ko-KR" altLang="en-US" sz="1400" dirty="0">
+              <a:rPr lang="ko-KR" altLang="en-US" sz="1200" dirty="0">
                 <a:latin typeface="D2Coding" panose="020B0609020101020101" pitchFamily="49" charset="-127"/>
                 <a:ea typeface="D2Coding" panose="020B0609020101020101" pitchFamily="49" charset="-127"/>
               </a:rPr>
               <a:t> </a:t>
             </a:r>
             <a:r>
-              <a:rPr lang="ko-KR" altLang="en-US" sz="1400" dirty="0" err="1">
+              <a:rPr lang="ko-KR" altLang="en-US" sz="1200" dirty="0" err="1">
                 <a:latin typeface="D2Coding" panose="020B0609020101020101" pitchFamily="49" charset="-127"/>
                 <a:ea typeface="D2Coding" panose="020B0609020101020101" pitchFamily="49" charset="-127"/>
               </a:rPr>
               <a:t>tool_name</a:t>
             </a:r>
             <a:r>
-              <a:rPr lang="ko-KR" altLang="en-US" sz="1400" dirty="0">
+              <a:rPr lang="ko-KR" altLang="en-US" sz="1200" dirty="0">
                 <a:latin typeface="D2Coding" panose="020B0609020101020101" pitchFamily="49" charset="-127"/>
                 <a:ea typeface="D2Coding" panose="020B0609020101020101" pitchFamily="49" charset="-127"/>
               </a:rPr>
               <a:t> == "</a:t>
             </a:r>
             <a:r>
-              <a:rPr lang="ko-KR" altLang="en-US" sz="1400" dirty="0" err="1">
+              <a:rPr lang="ko-KR" altLang="en-US" sz="1200" dirty="0" err="1">
                 <a:latin typeface="D2Coding" panose="020B0609020101020101" pitchFamily="49" charset="-127"/>
                 <a:ea typeface="D2Coding" panose="020B0609020101020101" pitchFamily="49" charset="-127"/>
               </a:rPr>
               <a:t>output</a:t>
             </a:r>
             <a:r>
-              <a:rPr lang="ko-KR" altLang="en-US" sz="1400" dirty="0">
+              <a:rPr lang="ko-KR" altLang="en-US" sz="1200" dirty="0">
                 <a:latin typeface="D2Coding" panose="020B0609020101020101" pitchFamily="49" charset="-127"/>
                 <a:ea typeface="D2Coding" panose="020B0609020101020101" pitchFamily="49" charset="-127"/>
               </a:rPr>
@@ -17191,89 +17268,89 @@
           </a:p>
           <a:p>
             <a:r>
-              <a:rPr lang="ko-KR" altLang="en-US" sz="1400" dirty="0">
+              <a:rPr lang="ko-KR" altLang="en-US" sz="1200" dirty="0">
                 <a:latin typeface="D2Coding" panose="020B0609020101020101" pitchFamily="49" charset="-127"/>
                 <a:ea typeface="D2Coding" panose="020B0609020101020101" pitchFamily="49" charset="-127"/>
               </a:rPr>
               <a:t>            </a:t>
             </a:r>
             <a:r>
-              <a:rPr lang="ko-KR" altLang="en-US" sz="1400" dirty="0" err="1">
+              <a:rPr lang="ko-KR" altLang="en-US" sz="1200" dirty="0" err="1">
                 <a:latin typeface="D2Coding" panose="020B0609020101020101" pitchFamily="49" charset="-127"/>
                 <a:ea typeface="D2Coding" panose="020B0609020101020101" pitchFamily="49" charset="-127"/>
               </a:rPr>
               <a:t>return</a:t>
             </a:r>
             <a:r>
-              <a:rPr lang="ko-KR" altLang="en-US" sz="1400" dirty="0">
+              <a:rPr lang="ko-KR" altLang="en-US" sz="1200" dirty="0">
                 <a:latin typeface="D2Coding" panose="020B0609020101020101" pitchFamily="49" charset="-127"/>
                 <a:ea typeface="D2Coding" panose="020B0609020101020101" pitchFamily="49" charset="-127"/>
               </a:rPr>
               <a:t> </a:t>
             </a:r>
             <a:r>
-              <a:rPr lang="ko-KR" altLang="en-US" sz="1400" dirty="0" err="1">
+              <a:rPr lang="ko-KR" altLang="en-US" sz="1200" dirty="0" err="1">
                 <a:latin typeface="D2Coding" panose="020B0609020101020101" pitchFamily="49" charset="-127"/>
                 <a:ea typeface="D2Coding" panose="020B0609020101020101" pitchFamily="49" charset="-127"/>
               </a:rPr>
               <a:t>tool_input</a:t>
             </a:r>
-            <a:endParaRPr lang="ko-KR" altLang="en-US" sz="1400" dirty="0">
+            <a:endParaRPr lang="ko-KR" altLang="en-US" sz="1200" dirty="0">
               <a:latin typeface="D2Coding" panose="020B0609020101020101" pitchFamily="49" charset="-127"/>
               <a:ea typeface="D2Coding" panose="020B0609020101020101" pitchFamily="49" charset="-127"/>
             </a:endParaRPr>
           </a:p>
           <a:p>
-            <a:endParaRPr lang="ko-KR" altLang="en-US" sz="1400" dirty="0">
+            <a:endParaRPr lang="ko-KR" altLang="en-US" sz="1200" dirty="0">
               <a:latin typeface="D2Coding" panose="020B0609020101020101" pitchFamily="49" charset="-127"/>
               <a:ea typeface="D2Coding" panose="020B0609020101020101" pitchFamily="49" charset="-127"/>
             </a:endParaRPr>
           </a:p>
           <a:p>
             <a:r>
-              <a:rPr lang="ko-KR" altLang="en-US" sz="1400" dirty="0">
+              <a:rPr lang="ko-KR" altLang="en-US" sz="1200" dirty="0">
                 <a:latin typeface="D2Coding" panose="020B0609020101020101" pitchFamily="49" charset="-127"/>
                 <a:ea typeface="D2Coding" panose="020B0609020101020101" pitchFamily="49" charset="-127"/>
               </a:rPr>
               <a:t>        # [</a:t>
             </a:r>
             <a:r>
-              <a:rPr lang="ko-KR" altLang="en-US" sz="1400" dirty="0" err="1">
+              <a:rPr lang="ko-KR" altLang="en-US" sz="1200" dirty="0" err="1">
                 <a:latin typeface="D2Coding" panose="020B0609020101020101" pitchFamily="49" charset="-127"/>
                 <a:ea typeface="D2Coding" panose="020B0609020101020101" pitchFamily="49" charset="-127"/>
               </a:rPr>
               <a:t>Do</a:t>
             </a:r>
             <a:r>
-              <a:rPr lang="ko-KR" altLang="en-US" sz="1400" dirty="0">
+              <a:rPr lang="ko-KR" altLang="en-US" sz="1200" dirty="0">
                 <a:latin typeface="D2Coding" panose="020B0609020101020101" pitchFamily="49" charset="-127"/>
                 <a:ea typeface="D2Coding" panose="020B0609020101020101" pitchFamily="49" charset="-127"/>
               </a:rPr>
               <a:t>] </a:t>
             </a:r>
             <a:r>
-              <a:rPr lang="ko-KR" altLang="en-US" sz="1400" dirty="0" err="1">
+              <a:rPr lang="ko-KR" altLang="en-US" sz="1200" dirty="0" err="1">
                 <a:latin typeface="D2Coding" panose="020B0609020101020101" pitchFamily="49" charset="-127"/>
                 <a:ea typeface="D2Coding" panose="020B0609020101020101" pitchFamily="49" charset="-127"/>
               </a:rPr>
               <a:t>search</a:t>
             </a:r>
             <a:r>
-              <a:rPr lang="ko-KR" altLang="en-US" sz="1400" dirty="0">
+              <a:rPr lang="ko-KR" altLang="en-US" sz="1200" dirty="0">
                 <a:latin typeface="D2Coding" panose="020B0609020101020101" pitchFamily="49" charset="-127"/>
                 <a:ea typeface="D2Coding" panose="020B0609020101020101" pitchFamily="49" charset="-127"/>
               </a:rPr>
               <a:t>, </a:t>
             </a:r>
             <a:r>
-              <a:rPr lang="ko-KR" altLang="en-US" sz="1400" dirty="0" err="1">
+              <a:rPr lang="ko-KR" altLang="en-US" sz="1200" dirty="0" err="1">
                 <a:latin typeface="D2Coding" panose="020B0609020101020101" pitchFamily="49" charset="-127"/>
                 <a:ea typeface="D2Coding" panose="020B0609020101020101" pitchFamily="49" charset="-127"/>
               </a:rPr>
               <a:t>calculator</a:t>
             </a:r>
             <a:r>
-              <a:rPr lang="ko-KR" altLang="en-US" sz="1400" dirty="0">
+              <a:rPr lang="ko-KR" altLang="en-US" sz="1200" dirty="0">
                 <a:latin typeface="D2Coding" panose="020B0609020101020101" pitchFamily="49" charset="-127"/>
                 <a:ea typeface="D2Coding" panose="020B0609020101020101" pitchFamily="49" charset="-127"/>
               </a:rPr>
@@ -17282,63 +17359,63 @@
           </a:p>
           <a:p>
             <a:r>
-              <a:rPr lang="ko-KR" altLang="en-US" sz="1400" dirty="0">
+              <a:rPr lang="ko-KR" altLang="en-US" sz="1200" dirty="0">
                 <a:latin typeface="D2Coding" panose="020B0609020101020101" pitchFamily="49" charset="-127"/>
                 <a:ea typeface="D2Coding" panose="020B0609020101020101" pitchFamily="49" charset="-127"/>
               </a:rPr>
               <a:t>        </a:t>
             </a:r>
             <a:r>
-              <a:rPr lang="ko-KR" altLang="en-US" sz="1400" dirty="0" err="1">
+              <a:rPr lang="ko-KR" altLang="en-US" sz="1200" dirty="0" err="1">
                 <a:latin typeface="D2Coding" panose="020B0609020101020101" pitchFamily="49" charset="-127"/>
                 <a:ea typeface="D2Coding" panose="020B0609020101020101" pitchFamily="49" charset="-127"/>
               </a:rPr>
               <a:t>result</a:t>
             </a:r>
             <a:r>
-              <a:rPr lang="ko-KR" altLang="en-US" sz="1400" dirty="0">
+              <a:rPr lang="ko-KR" altLang="en-US" sz="1200" dirty="0">
                 <a:latin typeface="D2Coding" panose="020B0609020101020101" pitchFamily="49" charset="-127"/>
                 <a:ea typeface="D2Coding" panose="020B0609020101020101" pitchFamily="49" charset="-127"/>
               </a:rPr>
               <a:t> = </a:t>
             </a:r>
             <a:r>
-              <a:rPr lang="ko-KR" altLang="en-US" sz="1400" dirty="0" err="1">
+              <a:rPr lang="ko-KR" altLang="en-US" sz="1200" dirty="0" err="1">
                 <a:latin typeface="D2Coding" panose="020B0609020101020101" pitchFamily="49" charset="-127"/>
                 <a:ea typeface="D2Coding" panose="020B0609020101020101" pitchFamily="49" charset="-127"/>
               </a:rPr>
               <a:t>execute_tool</a:t>
             </a:r>
             <a:r>
-              <a:rPr lang="ko-KR" altLang="en-US" sz="1400" dirty="0">
+              <a:rPr lang="ko-KR" altLang="en-US" sz="1200" dirty="0">
                 <a:latin typeface="D2Coding" panose="020B0609020101020101" pitchFamily="49" charset="-127"/>
                 <a:ea typeface="D2Coding" panose="020B0609020101020101" pitchFamily="49" charset="-127"/>
               </a:rPr>
               <a:t>(</a:t>
             </a:r>
             <a:r>
-              <a:rPr lang="ko-KR" altLang="en-US" sz="1400" dirty="0" err="1">
+              <a:rPr lang="ko-KR" altLang="en-US" sz="1200" dirty="0" err="1">
                 <a:latin typeface="D2Coding" panose="020B0609020101020101" pitchFamily="49" charset="-127"/>
                 <a:ea typeface="D2Coding" panose="020B0609020101020101" pitchFamily="49" charset="-127"/>
               </a:rPr>
               <a:t>tool_name</a:t>
             </a:r>
             <a:r>
-              <a:rPr lang="ko-KR" altLang="en-US" sz="1400" dirty="0">
+              <a:rPr lang="ko-KR" altLang="en-US" sz="1200" dirty="0">
                 <a:latin typeface="D2Coding" panose="020B0609020101020101" pitchFamily="49" charset="-127"/>
                 <a:ea typeface="D2Coding" panose="020B0609020101020101" pitchFamily="49" charset="-127"/>
               </a:rPr>
               <a:t>, </a:t>
             </a:r>
             <a:r>
-              <a:rPr lang="ko-KR" altLang="en-US" sz="1400" dirty="0" err="1">
+              <a:rPr lang="ko-KR" altLang="en-US" sz="1200" dirty="0" err="1">
                 <a:latin typeface="D2Coding" panose="020B0609020101020101" pitchFamily="49" charset="-127"/>
                 <a:ea typeface="D2Coding" panose="020B0609020101020101" pitchFamily="49" charset="-127"/>
               </a:rPr>
               <a:t>tool_input</a:t>
             </a:r>
             <a:r>
-              <a:rPr lang="ko-KR" altLang="en-US" sz="1400" dirty="0">
+              <a:rPr lang="ko-KR" altLang="en-US" sz="1200" dirty="0">
                 <a:latin typeface="D2Coding" panose="020B0609020101020101" pitchFamily="49" charset="-127"/>
                 <a:ea typeface="D2Coding" panose="020B0609020101020101" pitchFamily="49" charset="-127"/>
               </a:rPr>
@@ -17346,28 +17423,28 @@
             </a:r>
           </a:p>
           <a:p>
-            <a:endParaRPr lang="ko-KR" altLang="en-US" sz="1400" dirty="0">
+            <a:endParaRPr lang="ko-KR" altLang="en-US" sz="1200" dirty="0">
               <a:latin typeface="D2Coding" panose="020B0609020101020101" pitchFamily="49" charset="-127"/>
               <a:ea typeface="D2Coding" panose="020B0609020101020101" pitchFamily="49" charset="-127"/>
             </a:endParaRPr>
           </a:p>
           <a:p>
             <a:r>
-              <a:rPr lang="ko-KR" altLang="en-US" sz="1400" dirty="0">
+              <a:rPr lang="ko-KR" altLang="en-US" sz="1200" dirty="0">
                 <a:latin typeface="D2Coding" panose="020B0609020101020101" pitchFamily="49" charset="-127"/>
                 <a:ea typeface="D2Coding" panose="020B0609020101020101" pitchFamily="49" charset="-127"/>
               </a:rPr>
               <a:t>        # [</a:t>
             </a:r>
             <a:r>
-              <a:rPr lang="ko-KR" altLang="en-US" sz="1400" dirty="0" err="1">
+              <a:rPr lang="ko-KR" altLang="en-US" sz="1200" dirty="0" err="1">
                 <a:latin typeface="D2Coding" panose="020B0609020101020101" pitchFamily="49" charset="-127"/>
                 <a:ea typeface="D2Coding" panose="020B0609020101020101" pitchFamily="49" charset="-127"/>
               </a:rPr>
               <a:t>Feedback</a:t>
             </a:r>
             <a:r>
-              <a:rPr lang="ko-KR" altLang="en-US" sz="1400" dirty="0">
+              <a:rPr lang="ko-KR" altLang="en-US" sz="1200" dirty="0">
                 <a:latin typeface="D2Coding" panose="020B0609020101020101" pitchFamily="49" charset="-127"/>
                 <a:ea typeface="D2Coding" panose="020B0609020101020101" pitchFamily="49" charset="-127"/>
               </a:rPr>
@@ -17376,91 +17453,91 @@
           </a:p>
           <a:p>
             <a:r>
-              <a:rPr lang="ko-KR" altLang="en-US" sz="1400" dirty="0">
+              <a:rPr lang="ko-KR" altLang="en-US" sz="1200" dirty="0">
                 <a:latin typeface="D2Coding" panose="020B0609020101020101" pitchFamily="49" charset="-127"/>
                 <a:ea typeface="D2Coding" panose="020B0609020101020101" pitchFamily="49" charset="-127"/>
               </a:rPr>
               <a:t>        </a:t>
             </a:r>
             <a:r>
-              <a:rPr lang="ko-KR" altLang="en-US" sz="1400" dirty="0" err="1">
+              <a:rPr lang="ko-KR" altLang="en-US" sz="1200" dirty="0" err="1">
                 <a:latin typeface="D2Coding" panose="020B0609020101020101" pitchFamily="49" charset="-127"/>
                 <a:ea typeface="D2Coding" panose="020B0609020101020101" pitchFamily="49" charset="-127"/>
               </a:rPr>
               <a:t>context</a:t>
             </a:r>
             <a:r>
-              <a:rPr lang="ko-KR" altLang="en-US" sz="1400" dirty="0">
+              <a:rPr lang="ko-KR" altLang="en-US" sz="1200" dirty="0">
                 <a:latin typeface="D2Coding" panose="020B0609020101020101" pitchFamily="49" charset="-127"/>
                 <a:ea typeface="D2Coding" panose="020B0609020101020101" pitchFamily="49" charset="-127"/>
               </a:rPr>
               <a:t> += </a:t>
             </a:r>
             <a:r>
-              <a:rPr lang="ko-KR" altLang="en-US" sz="1400" dirty="0" err="1">
+              <a:rPr lang="ko-KR" altLang="en-US" sz="1200" dirty="0" err="1">
                 <a:latin typeface="D2Coding" panose="020B0609020101020101" pitchFamily="49" charset="-127"/>
                 <a:ea typeface="D2Coding" panose="020B0609020101020101" pitchFamily="49" charset="-127"/>
               </a:rPr>
               <a:t>f</a:t>
             </a:r>
             <a:r>
-              <a:rPr lang="ko-KR" altLang="en-US" sz="1400" dirty="0">
+              <a:rPr lang="ko-KR" altLang="en-US" sz="1200" dirty="0">
                 <a:latin typeface="D2Coding" panose="020B0609020101020101" pitchFamily="49" charset="-127"/>
                 <a:ea typeface="D2Coding" panose="020B0609020101020101" pitchFamily="49" charset="-127"/>
               </a:rPr>
               <a:t>"\</a:t>
             </a:r>
             <a:r>
-              <a:rPr lang="ko-KR" altLang="en-US" sz="1400" dirty="0" err="1">
+              <a:rPr lang="ko-KR" altLang="en-US" sz="1200" dirty="0" err="1">
                 <a:latin typeface="D2Coding" panose="020B0609020101020101" pitchFamily="49" charset="-127"/>
                 <a:ea typeface="D2Coding" panose="020B0609020101020101" pitchFamily="49" charset="-127"/>
               </a:rPr>
               <a:t>n실행</a:t>
             </a:r>
             <a:r>
-              <a:rPr lang="ko-KR" altLang="en-US" sz="1400" dirty="0">
+              <a:rPr lang="ko-KR" altLang="en-US" sz="1200" dirty="0">
                 <a:latin typeface="D2Coding" panose="020B0609020101020101" pitchFamily="49" charset="-127"/>
                 <a:ea typeface="D2Coding" panose="020B0609020101020101" pitchFamily="49" charset="-127"/>
               </a:rPr>
               <a:t> 결과 [{</a:t>
             </a:r>
             <a:r>
-              <a:rPr lang="ko-KR" altLang="en-US" sz="1400" dirty="0" err="1">
+              <a:rPr lang="ko-KR" altLang="en-US" sz="1200" dirty="0" err="1">
                 <a:latin typeface="D2Coding" panose="020B0609020101020101" pitchFamily="49" charset="-127"/>
                 <a:ea typeface="D2Coding" panose="020B0609020101020101" pitchFamily="49" charset="-127"/>
               </a:rPr>
               <a:t>tool_name</a:t>
             </a:r>
             <a:r>
-              <a:rPr lang="ko-KR" altLang="en-US" sz="1400" dirty="0">
+              <a:rPr lang="ko-KR" altLang="en-US" sz="1200" dirty="0">
                 <a:latin typeface="D2Coding" panose="020B0609020101020101" pitchFamily="49" charset="-127"/>
                 <a:ea typeface="D2Coding" panose="020B0609020101020101" pitchFamily="49" charset="-127"/>
               </a:rPr>
               <a:t>}]: {</a:t>
             </a:r>
             <a:r>
-              <a:rPr lang="ko-KR" altLang="en-US" sz="1400" dirty="0" err="1">
+              <a:rPr lang="ko-KR" altLang="en-US" sz="1200" dirty="0" err="1">
                 <a:latin typeface="D2Coding" panose="020B0609020101020101" pitchFamily="49" charset="-127"/>
                 <a:ea typeface="D2Coding" panose="020B0609020101020101" pitchFamily="49" charset="-127"/>
               </a:rPr>
               <a:t>result</a:t>
             </a:r>
             <a:r>
-              <a:rPr lang="ko-KR" altLang="en-US" sz="1400" dirty="0">
+              <a:rPr lang="ko-KR" altLang="en-US" sz="1200" dirty="0">
                 <a:latin typeface="D2Coding" panose="020B0609020101020101" pitchFamily="49" charset="-127"/>
                 <a:ea typeface="D2Coding" panose="020B0609020101020101" pitchFamily="49" charset="-127"/>
               </a:rPr>
               <a:t>}\</a:t>
             </a:r>
             <a:r>
-              <a:rPr lang="ko-KR" altLang="en-US" sz="1400" dirty="0" err="1">
+              <a:rPr lang="ko-KR" altLang="en-US" sz="1200" dirty="0" err="1">
                 <a:latin typeface="D2Coding" panose="020B0609020101020101" pitchFamily="49" charset="-127"/>
                 <a:ea typeface="D2Coding" panose="020B0609020101020101" pitchFamily="49" charset="-127"/>
               </a:rPr>
               <a:t>n다음</a:t>
             </a:r>
             <a:r>
-              <a:rPr lang="ko-KR" altLang="en-US" sz="1400" dirty="0">
+              <a:rPr lang="ko-KR" altLang="en-US" sz="1200" dirty="0">
                 <a:latin typeface="D2Coding" panose="020B0609020101020101" pitchFamily="49" charset="-127"/>
                 <a:ea typeface="D2Coding" panose="020B0609020101020101" pitchFamily="49" charset="-127"/>
               </a:rPr>
@@ -17844,6 +17921,11 @@
           <a:prstGeom prst="rect">
             <a:avLst/>
           </a:prstGeom>
+          <a:ln>
+            <a:solidFill>
+              <a:schemeClr val="tx1"/>
+            </a:solidFill>
+          </a:ln>
         </p:spPr>
       </p:pic>
       <p:sp>
@@ -17867,6 +17949,11 @@
             <a:avLst/>
           </a:prstGeom>
           <a:noFill/>
+          <a:ln>
+            <a:solidFill>
+              <a:schemeClr val="tx1"/>
+            </a:solidFill>
+          </a:ln>
         </p:spPr>
         <p:txBody>
           <a:bodyPr wrap="square">
